--- a/presentacion/Taller_Agentes_IA_2h.pptx
+++ b/presentacion/Taller_Agentes_IA_2h.pptx
@@ -29,6 +29,7 @@
     <p:sldId id="277" r:id="rId28"/>
     <p:sldId id="278" r:id="rId29"/>
     <p:sldId id="279" r:id="rId30"/>
+    <p:sldId id="280" r:id="rId31"/>
   </p:sldIdLst>
   <p:sldSz cx="12191695" cy="6858000" type="screen4x3"/>
   <p:notesSz cx="6858000" cy="9144000"/>
@@ -10374,6 +10375,1038 @@
     <p:bg>
       <p:bgPr>
         <a:solidFill>
+          <a:srgbClr val="F6F5FB"/>
+        </a:solidFill>
+        <a:effectLst/>
+      </p:bgPr>
+    </p:bg>
+    <p:spTree>
+      <p:nvGrpSpPr>
+        <p:cNvPr id="1" name=""/>
+        <p:cNvGrpSpPr/>
+        <p:nvPr/>
+      </p:nvGrpSpPr>
+      <p:grpSpPr/>
+      <p:sp>
+        <p:nvSpPr>
+          <p:cNvPr id="2" name="Rectangle 1"/>
+          <p:cNvSpPr/>
+          <p:nvPr/>
+        </p:nvSpPr>
+        <p:spPr>
+          <a:xfrm>
+            <a:off x="0" y="0"/>
+            <a:ext cx="12191695" cy="1234440"/>
+          </a:xfrm>
+          <a:prstGeom prst="rect">
+            <a:avLst/>
+          </a:prstGeom>
+          <a:solidFill>
+            <a:srgbClr val="1A164B"/>
+          </a:solidFill>
+          <a:ln>
+            <a:noFill/>
+          </a:ln>
+          <a:effectLst/>
+        </p:spPr>
+        <p:style>
+          <a:lnRef idx="1">
+            <a:schemeClr val="accent1"/>
+          </a:lnRef>
+          <a:fillRef idx="3">
+            <a:schemeClr val="accent1"/>
+          </a:fillRef>
+          <a:effectRef idx="2">
+            <a:schemeClr val="accent1"/>
+          </a:effectRef>
+          <a:fontRef idx="minor">
+            <a:schemeClr val="lt1"/>
+          </a:fontRef>
+        </p:style>
+        <p:txBody>
+          <a:bodyPr rtlCol="0" anchor="ctr"/>
+          <a:lstStyle/>
+          <a:p>
+            <a:pPr algn="ctr"/>
+          </a:p>
+        </p:txBody>
+      </p:sp>
+      <p:sp>
+        <p:nvSpPr>
+          <p:cNvPr id="3" name="Rectangle 2"/>
+          <p:cNvSpPr/>
+          <p:nvPr/>
+        </p:nvSpPr>
+        <p:spPr>
+          <a:xfrm>
+            <a:off x="548640" y="365760"/>
+            <a:ext cx="128016" cy="502920"/>
+          </a:xfrm>
+          <a:prstGeom prst="rect">
+            <a:avLst/>
+          </a:prstGeom>
+          <a:solidFill>
+            <a:srgbClr val="22D3EE"/>
+          </a:solidFill>
+          <a:ln>
+            <a:noFill/>
+          </a:ln>
+          <a:effectLst/>
+        </p:spPr>
+        <p:style>
+          <a:lnRef idx="1">
+            <a:schemeClr val="accent1"/>
+          </a:lnRef>
+          <a:fillRef idx="3">
+            <a:schemeClr val="accent1"/>
+          </a:fillRef>
+          <a:effectRef idx="2">
+            <a:schemeClr val="accent1"/>
+          </a:effectRef>
+          <a:fontRef idx="minor">
+            <a:schemeClr val="lt1"/>
+          </a:fontRef>
+        </p:style>
+        <p:txBody>
+          <a:bodyPr rtlCol="0" anchor="ctr"/>
+          <a:lstStyle/>
+          <a:p>
+            <a:pPr algn="ctr"/>
+          </a:p>
+        </p:txBody>
+      </p:sp>
+      <p:sp>
+        <p:nvSpPr>
+          <p:cNvPr id="4" name="TextBox 3"/>
+          <p:cNvSpPr txBox="1"/>
+          <p:nvPr/>
+        </p:nvSpPr>
+        <p:spPr>
+          <a:xfrm>
+            <a:off x="777240" y="274320"/>
+            <a:ext cx="10972800" cy="731520"/>
+          </a:xfrm>
+          <a:prstGeom prst="rect">
+            <a:avLst/>
+          </a:prstGeom>
+          <a:noFill/>
+        </p:spPr>
+        <p:txBody>
+          <a:bodyPr wrap="square" anchor="t" lIns="0" rIns="0" tIns="0" bIns="0">
+            <a:spAutoFit/>
+          </a:bodyPr>
+          <a:lstStyle/>
+          <a:p>
+            <a:pPr algn="l">
+              <a:lnSpc>
+                <a:spcPct val="100000"/>
+              </a:lnSpc>
+              <a:spcBef>
+                <a:spcPts val="0"/>
+              </a:spcBef>
+              <a:spcAft>
+                <a:spcPts val="0"/>
+              </a:spcAft>
+            </a:pPr>
+            <a:r>
+              <a:rPr sz="3200" b="1" i="0">
+                <a:solidFill>
+                  <a:srgbClr val="FFFFFF"/>
+                </a:solidFill>
+                <a:latin typeface="Segoe UI Semibold"/>
+              </a:rPr>
+              <a:t>El grafo de nuestro código</a:t>
+            </a:r>
+          </a:p>
+        </p:txBody>
+      </p:sp>
+      <p:sp>
+        <p:nvSpPr>
+          <p:cNvPr id="5" name="TextBox 4"/>
+          <p:cNvSpPr txBox="1"/>
+          <p:nvPr/>
+        </p:nvSpPr>
+        <p:spPr>
+          <a:xfrm>
+            <a:off x="822960" y="850392"/>
+            <a:ext cx="10972800" cy="365760"/>
+          </a:xfrm>
+          <a:prstGeom prst="rect">
+            <a:avLst/>
+          </a:prstGeom>
+          <a:noFill/>
+        </p:spPr>
+        <p:txBody>
+          <a:bodyPr wrap="square" anchor="t" lIns="0" rIns="0" tIns="0" bIns="0">
+            <a:spAutoFit/>
+          </a:bodyPr>
+          <a:lstStyle/>
+          <a:p>
+            <a:pPr algn="l">
+              <a:lnSpc>
+                <a:spcPct val="100000"/>
+              </a:lnSpc>
+              <a:spcBef>
+                <a:spcPts val="0"/>
+              </a:spcBef>
+              <a:spcAft>
+                <a:spcPts val="0"/>
+              </a:spcAft>
+            </a:pPr>
+            <a:r>
+              <a:rPr sz="1400" b="0" i="0">
+                <a:solidFill>
+                  <a:srgbClr val="B9B3E6"/>
+                </a:solidFill>
+                <a:latin typeface="Segoe UI"/>
+              </a:rPr>
+              <a:t>El flujo real de cli/03_langgraph.py: clasifica la pregunta y la enruta</a:t>
+            </a:r>
+          </a:p>
+        </p:txBody>
+      </p:sp>
+      <p:pic>
+        <p:nvPicPr>
+          <p:cNvPr id="6" name="Picture 5" descr="langgraph_diagram.png"/>
+          <p:cNvPicPr>
+            <a:picLocks noChangeAspect="1"/>
+          </p:cNvPicPr>
+          <p:nvPr/>
+        </p:nvPicPr>
+        <p:blipFill>
+          <a:blip r:embed="rId2"/>
+          <a:stretch>
+            <a:fillRect/>
+          </a:stretch>
+        </p:blipFill>
+        <p:spPr>
+          <a:xfrm>
+            <a:off x="548640" y="1554480"/>
+            <a:ext cx="6309360" cy="4645202"/>
+          </a:xfrm>
+          <a:prstGeom prst="rect">
+            <a:avLst/>
+          </a:prstGeom>
+        </p:spPr>
+      </p:pic>
+      <p:sp>
+        <p:nvSpPr>
+          <p:cNvPr id="7" name="Rounded Rectangle 6"/>
+          <p:cNvSpPr/>
+          <p:nvPr/>
+        </p:nvSpPr>
+        <p:spPr>
+          <a:xfrm>
+            <a:off x="7452360" y="1554480"/>
+            <a:ext cx="4114800" cy="4343400"/>
+          </a:xfrm>
+          <a:prstGeom prst="roundRect">
+            <a:avLst/>
+          </a:prstGeom>
+          <a:solidFill>
+            <a:srgbClr val="FFFFFF"/>
+          </a:solidFill>
+          <a:ln>
+            <a:noFill/>
+          </a:ln>
+          <a:effectLst/>
+        </p:spPr>
+        <p:style>
+          <a:lnRef idx="1">
+            <a:schemeClr val="accent1"/>
+          </a:lnRef>
+          <a:fillRef idx="3">
+            <a:schemeClr val="accent1"/>
+          </a:fillRef>
+          <a:effectRef idx="2">
+            <a:schemeClr val="accent1"/>
+          </a:effectRef>
+          <a:fontRef idx="minor">
+            <a:schemeClr val="lt1"/>
+          </a:fontRef>
+        </p:style>
+        <p:txBody>
+          <a:bodyPr rtlCol="0" anchor="ctr"/>
+          <a:lstStyle/>
+          <a:p>
+            <a:pPr algn="ctr"/>
+          </a:p>
+        </p:txBody>
+      </p:sp>
+      <p:sp>
+        <p:nvSpPr>
+          <p:cNvPr id="8" name="Rectangle 7"/>
+          <p:cNvSpPr/>
+          <p:nvPr/>
+        </p:nvSpPr>
+        <p:spPr>
+          <a:xfrm>
+            <a:off x="7452360" y="1554480"/>
+            <a:ext cx="4114800" cy="164592"/>
+          </a:xfrm>
+          <a:prstGeom prst="rect">
+            <a:avLst/>
+          </a:prstGeom>
+          <a:solidFill>
+            <a:srgbClr val="22D3EE"/>
+          </a:solidFill>
+          <a:ln>
+            <a:noFill/>
+          </a:ln>
+          <a:effectLst/>
+        </p:spPr>
+        <p:style>
+          <a:lnRef idx="1">
+            <a:schemeClr val="accent1"/>
+          </a:lnRef>
+          <a:fillRef idx="3">
+            <a:schemeClr val="accent1"/>
+          </a:fillRef>
+          <a:effectRef idx="2">
+            <a:schemeClr val="accent1"/>
+          </a:effectRef>
+          <a:fontRef idx="minor">
+            <a:schemeClr val="lt1"/>
+          </a:fontRef>
+        </p:style>
+        <p:txBody>
+          <a:bodyPr rtlCol="0" anchor="ctr"/>
+          <a:lstStyle/>
+          <a:p>
+            <a:pPr algn="ctr"/>
+          </a:p>
+        </p:txBody>
+      </p:sp>
+      <p:sp>
+        <p:nvSpPr>
+          <p:cNvPr id="9" name="TextBox 8"/>
+          <p:cNvSpPr txBox="1"/>
+          <p:nvPr/>
+        </p:nvSpPr>
+        <p:spPr>
+          <a:xfrm>
+            <a:off x="7726679" y="1874519"/>
+            <a:ext cx="3566160" cy="365760"/>
+          </a:xfrm>
+          <a:prstGeom prst="rect">
+            <a:avLst/>
+          </a:prstGeom>
+          <a:noFill/>
+        </p:spPr>
+        <p:txBody>
+          <a:bodyPr wrap="square" anchor="t" lIns="0" rIns="0" tIns="0" bIns="0">
+            <a:spAutoFit/>
+          </a:bodyPr>
+          <a:lstStyle/>
+          <a:p>
+            <a:pPr algn="l">
+              <a:lnSpc>
+                <a:spcPct val="100000"/>
+              </a:lnSpc>
+              <a:spcBef>
+                <a:spcPts val="0"/>
+              </a:spcBef>
+              <a:spcAft>
+                <a:spcPts val="0"/>
+              </a:spcAft>
+            </a:pPr>
+            <a:r>
+              <a:rPr sz="1600" b="1" i="0">
+                <a:solidFill>
+                  <a:srgbClr val="1E1B2E"/>
+                </a:solidFill>
+                <a:latin typeface="Segoe UI Semibold"/>
+              </a:rPr>
+              <a:t>Cómo leerlo</a:t>
+            </a:r>
+          </a:p>
+        </p:txBody>
+      </p:sp>
+      <p:sp>
+        <p:nvSpPr>
+          <p:cNvPr id="10" name="Oval 9"/>
+          <p:cNvSpPr/>
+          <p:nvPr/>
+        </p:nvSpPr>
+        <p:spPr>
+          <a:xfrm>
+            <a:off x="7726679" y="2423160"/>
+            <a:ext cx="146304" cy="146304"/>
+          </a:xfrm>
+          <a:prstGeom prst="ellipse">
+            <a:avLst/>
+          </a:prstGeom>
+          <a:solidFill>
+            <a:srgbClr val="6D28D9"/>
+          </a:solidFill>
+          <a:ln>
+            <a:noFill/>
+          </a:ln>
+          <a:effectLst/>
+        </p:spPr>
+        <p:style>
+          <a:lnRef idx="1">
+            <a:schemeClr val="accent1"/>
+          </a:lnRef>
+          <a:fillRef idx="3">
+            <a:schemeClr val="accent1"/>
+          </a:fillRef>
+          <a:effectRef idx="2">
+            <a:schemeClr val="accent1"/>
+          </a:effectRef>
+          <a:fontRef idx="minor">
+            <a:schemeClr val="lt1"/>
+          </a:fontRef>
+        </p:style>
+        <p:txBody>
+          <a:bodyPr rtlCol="0" anchor="ctr"/>
+          <a:lstStyle/>
+          <a:p>
+            <a:pPr algn="ctr"/>
+          </a:p>
+        </p:txBody>
+      </p:sp>
+      <p:sp>
+        <p:nvSpPr>
+          <p:cNvPr id="11" name="TextBox 10"/>
+          <p:cNvSpPr txBox="1"/>
+          <p:nvPr/>
+        </p:nvSpPr>
+        <p:spPr>
+          <a:xfrm>
+            <a:off x="8001000" y="2331720"/>
+            <a:ext cx="3383280" cy="365760"/>
+          </a:xfrm>
+          <a:prstGeom prst="rect">
+            <a:avLst/>
+          </a:prstGeom>
+          <a:noFill/>
+        </p:spPr>
+        <p:txBody>
+          <a:bodyPr wrap="square" anchor="t" lIns="0" rIns="0" tIns="0" bIns="0">
+            <a:spAutoFit/>
+          </a:bodyPr>
+          <a:lstStyle/>
+          <a:p>
+            <a:pPr algn="l">
+              <a:lnSpc>
+                <a:spcPct val="100000"/>
+              </a:lnSpc>
+              <a:spcBef>
+                <a:spcPts val="0"/>
+              </a:spcBef>
+              <a:spcAft>
+                <a:spcPts val="0"/>
+              </a:spcAft>
+            </a:pPr>
+            <a:r>
+              <a:rPr sz="1350" b="1" i="0">
+                <a:solidFill>
+                  <a:srgbClr val="1E1B2E"/>
+                </a:solidFill>
+                <a:latin typeface="Segoe UI Semibold"/>
+              </a:rPr>
+              <a:t>clasificar</a:t>
+            </a:r>
+          </a:p>
+        </p:txBody>
+      </p:sp>
+      <p:sp>
+        <p:nvSpPr>
+          <p:cNvPr id="12" name="TextBox 11"/>
+          <p:cNvSpPr txBox="1"/>
+          <p:nvPr/>
+        </p:nvSpPr>
+        <p:spPr>
+          <a:xfrm>
+            <a:off x="8001000" y="2651760"/>
+            <a:ext cx="3383280" cy="548640"/>
+          </a:xfrm>
+          <a:prstGeom prst="rect">
+            <a:avLst/>
+          </a:prstGeom>
+          <a:noFill/>
+        </p:spPr>
+        <p:txBody>
+          <a:bodyPr wrap="square" anchor="t" lIns="0" rIns="0" tIns="0" bIns="0">
+            <a:spAutoFit/>
+          </a:bodyPr>
+          <a:lstStyle/>
+          <a:p>
+            <a:pPr algn="l">
+              <a:lnSpc>
+                <a:spcPct val="102000"/>
+              </a:lnSpc>
+              <a:spcBef>
+                <a:spcPts val="0"/>
+              </a:spcBef>
+              <a:spcAft>
+                <a:spcPts val="0"/>
+              </a:spcAft>
+            </a:pPr>
+            <a:r>
+              <a:rPr sz="1150" b="0" i="0">
+                <a:solidFill>
+                  <a:srgbClr val="6B6682"/>
+                </a:solidFill>
+                <a:latin typeface="Segoe UI"/>
+              </a:rPr>
+              <a:t>un LLM decide si la pregunta es técnica o general</a:t>
+            </a:r>
+          </a:p>
+        </p:txBody>
+      </p:sp>
+      <p:sp>
+        <p:nvSpPr>
+          <p:cNvPr id="13" name="Oval 12"/>
+          <p:cNvSpPr/>
+          <p:nvPr/>
+        </p:nvSpPr>
+        <p:spPr>
+          <a:xfrm>
+            <a:off x="7726679" y="3319272"/>
+            <a:ext cx="146304" cy="146304"/>
+          </a:xfrm>
+          <a:prstGeom prst="ellipse">
+            <a:avLst/>
+          </a:prstGeom>
+          <a:solidFill>
+            <a:srgbClr val="FB7185"/>
+          </a:solidFill>
+          <a:ln>
+            <a:noFill/>
+          </a:ln>
+          <a:effectLst/>
+        </p:spPr>
+        <p:style>
+          <a:lnRef idx="1">
+            <a:schemeClr val="accent1"/>
+          </a:lnRef>
+          <a:fillRef idx="3">
+            <a:schemeClr val="accent1"/>
+          </a:fillRef>
+          <a:effectRef idx="2">
+            <a:schemeClr val="accent1"/>
+          </a:effectRef>
+          <a:fontRef idx="minor">
+            <a:schemeClr val="lt1"/>
+          </a:fontRef>
+        </p:style>
+        <p:txBody>
+          <a:bodyPr rtlCol="0" anchor="ctr"/>
+          <a:lstStyle/>
+          <a:p>
+            <a:pPr algn="ctr"/>
+          </a:p>
+        </p:txBody>
+      </p:sp>
+      <p:sp>
+        <p:nvSpPr>
+          <p:cNvPr id="14" name="TextBox 13"/>
+          <p:cNvSpPr txBox="1"/>
+          <p:nvPr/>
+        </p:nvSpPr>
+        <p:spPr>
+          <a:xfrm>
+            <a:off x="8001000" y="3227832"/>
+            <a:ext cx="3383280" cy="365760"/>
+          </a:xfrm>
+          <a:prstGeom prst="rect">
+            <a:avLst/>
+          </a:prstGeom>
+          <a:noFill/>
+        </p:spPr>
+        <p:txBody>
+          <a:bodyPr wrap="square" anchor="t" lIns="0" rIns="0" tIns="0" bIns="0">
+            <a:spAutoFit/>
+          </a:bodyPr>
+          <a:lstStyle/>
+          <a:p>
+            <a:pPr algn="l">
+              <a:lnSpc>
+                <a:spcPct val="100000"/>
+              </a:lnSpc>
+              <a:spcBef>
+                <a:spcPts val="0"/>
+              </a:spcBef>
+              <a:spcAft>
+                <a:spcPts val="0"/>
+              </a:spcAft>
+            </a:pPr>
+            <a:r>
+              <a:rPr sz="1350" b="1" i="0">
+                <a:solidFill>
+                  <a:srgbClr val="1E1B2E"/>
+                </a:solidFill>
+                <a:latin typeface="Segoe UI Semibold"/>
+              </a:rPr>
+              <a:t>aristas condicionales</a:t>
+            </a:r>
+          </a:p>
+        </p:txBody>
+      </p:sp>
+      <p:sp>
+        <p:nvSpPr>
+          <p:cNvPr id="15" name="TextBox 14"/>
+          <p:cNvSpPr txBox="1"/>
+          <p:nvPr/>
+        </p:nvSpPr>
+        <p:spPr>
+          <a:xfrm>
+            <a:off x="8001000" y="3547872"/>
+            <a:ext cx="3383280" cy="548640"/>
+          </a:xfrm>
+          <a:prstGeom prst="rect">
+            <a:avLst/>
+          </a:prstGeom>
+          <a:noFill/>
+        </p:spPr>
+        <p:txBody>
+          <a:bodyPr wrap="square" anchor="t" lIns="0" rIns="0" tIns="0" bIns="0">
+            <a:spAutoFit/>
+          </a:bodyPr>
+          <a:lstStyle/>
+          <a:p>
+            <a:pPr algn="l">
+              <a:lnSpc>
+                <a:spcPct val="102000"/>
+              </a:lnSpc>
+              <a:spcBef>
+                <a:spcPts val="0"/>
+              </a:spcBef>
+              <a:spcAft>
+                <a:spcPts val="0"/>
+              </a:spcAft>
+            </a:pPr>
+            <a:r>
+              <a:rPr sz="1150" b="0" i="0">
+                <a:solidFill>
+                  <a:srgbClr val="6B6682"/>
+                </a:solidFill>
+                <a:latin typeface="Segoe UI"/>
+              </a:rPr>
+              <a:t>enrutan según esa categoría (tecnica / general)</a:t>
+            </a:r>
+          </a:p>
+        </p:txBody>
+      </p:sp>
+      <p:sp>
+        <p:nvSpPr>
+          <p:cNvPr id="16" name="Oval 15"/>
+          <p:cNvSpPr/>
+          <p:nvPr/>
+        </p:nvSpPr>
+        <p:spPr>
+          <a:xfrm>
+            <a:off x="7726679" y="4215384"/>
+            <a:ext cx="146304" cy="146304"/>
+          </a:xfrm>
+          <a:prstGeom prst="ellipse">
+            <a:avLst/>
+          </a:prstGeom>
+          <a:solidFill>
+            <a:srgbClr val="22D3EE"/>
+          </a:solidFill>
+          <a:ln>
+            <a:noFill/>
+          </a:ln>
+          <a:effectLst/>
+        </p:spPr>
+        <p:style>
+          <a:lnRef idx="1">
+            <a:schemeClr val="accent1"/>
+          </a:lnRef>
+          <a:fillRef idx="3">
+            <a:schemeClr val="accent1"/>
+          </a:fillRef>
+          <a:effectRef idx="2">
+            <a:schemeClr val="accent1"/>
+          </a:effectRef>
+          <a:fontRef idx="minor">
+            <a:schemeClr val="lt1"/>
+          </a:fontRef>
+        </p:style>
+        <p:txBody>
+          <a:bodyPr rtlCol="0" anchor="ctr"/>
+          <a:lstStyle/>
+          <a:p>
+            <a:pPr algn="ctr"/>
+          </a:p>
+        </p:txBody>
+      </p:sp>
+      <p:sp>
+        <p:nvSpPr>
+          <p:cNvPr id="17" name="TextBox 16"/>
+          <p:cNvSpPr txBox="1"/>
+          <p:nvPr/>
+        </p:nvSpPr>
+        <p:spPr>
+          <a:xfrm>
+            <a:off x="8001000" y="4123944"/>
+            <a:ext cx="3383280" cy="365760"/>
+          </a:xfrm>
+          <a:prstGeom prst="rect">
+            <a:avLst/>
+          </a:prstGeom>
+          <a:noFill/>
+        </p:spPr>
+        <p:txBody>
+          <a:bodyPr wrap="square" anchor="t" lIns="0" rIns="0" tIns="0" bIns="0">
+            <a:spAutoFit/>
+          </a:bodyPr>
+          <a:lstStyle/>
+          <a:p>
+            <a:pPr algn="l">
+              <a:lnSpc>
+                <a:spcPct val="100000"/>
+              </a:lnSpc>
+              <a:spcBef>
+                <a:spcPts val="0"/>
+              </a:spcBef>
+              <a:spcAft>
+                <a:spcPts val="0"/>
+              </a:spcAft>
+            </a:pPr>
+            <a:r>
+              <a:rPr sz="1350" b="1" i="0">
+                <a:solidFill>
+                  <a:srgbClr val="1E1B2E"/>
+                </a:solidFill>
+                <a:latin typeface="Segoe UI Semibold"/>
+              </a:rPr>
+              <a:t>responder_*</a:t>
+            </a:r>
+          </a:p>
+        </p:txBody>
+      </p:sp>
+      <p:sp>
+        <p:nvSpPr>
+          <p:cNvPr id="18" name="TextBox 17"/>
+          <p:cNvSpPr txBox="1"/>
+          <p:nvPr/>
+        </p:nvSpPr>
+        <p:spPr>
+          <a:xfrm>
+            <a:off x="8001000" y="4443984"/>
+            <a:ext cx="3383280" cy="548640"/>
+          </a:xfrm>
+          <a:prstGeom prst="rect">
+            <a:avLst/>
+          </a:prstGeom>
+          <a:noFill/>
+        </p:spPr>
+        <p:txBody>
+          <a:bodyPr wrap="square" anchor="t" lIns="0" rIns="0" tIns="0" bIns="0">
+            <a:spAutoFit/>
+          </a:bodyPr>
+          <a:lstStyle/>
+          <a:p>
+            <a:pPr algn="l">
+              <a:lnSpc>
+                <a:spcPct val="102000"/>
+              </a:lnSpc>
+              <a:spcBef>
+                <a:spcPts val="0"/>
+              </a:spcBef>
+              <a:spcAft>
+                <a:spcPts val="0"/>
+              </a:spcAft>
+            </a:pPr>
+            <a:r>
+              <a:rPr sz="1150" b="0" i="0">
+                <a:solidFill>
+                  <a:srgbClr val="6B6682"/>
+                </a:solidFill>
+                <a:latin typeface="Segoe UI"/>
+              </a:rPr>
+              <a:t>cada rama responde con un estilo distinto</a:t>
+            </a:r>
+          </a:p>
+        </p:txBody>
+      </p:sp>
+      <p:sp>
+        <p:nvSpPr>
+          <p:cNvPr id="19" name="Oval 18"/>
+          <p:cNvSpPr/>
+          <p:nvPr/>
+        </p:nvSpPr>
+        <p:spPr>
+          <a:xfrm>
+            <a:off x="7726679" y="5111496"/>
+            <a:ext cx="146304" cy="146304"/>
+          </a:xfrm>
+          <a:prstGeom prst="ellipse">
+            <a:avLst/>
+          </a:prstGeom>
+          <a:solidFill>
+            <a:srgbClr val="FBBF24"/>
+          </a:solidFill>
+          <a:ln>
+            <a:noFill/>
+          </a:ln>
+          <a:effectLst/>
+        </p:spPr>
+        <p:style>
+          <a:lnRef idx="1">
+            <a:schemeClr val="accent1"/>
+          </a:lnRef>
+          <a:fillRef idx="3">
+            <a:schemeClr val="accent1"/>
+          </a:fillRef>
+          <a:effectRef idx="2">
+            <a:schemeClr val="accent1"/>
+          </a:effectRef>
+          <a:fontRef idx="minor">
+            <a:schemeClr val="lt1"/>
+          </a:fontRef>
+        </p:style>
+        <p:txBody>
+          <a:bodyPr rtlCol="0" anchor="ctr"/>
+          <a:lstStyle/>
+          <a:p>
+            <a:pPr algn="ctr"/>
+          </a:p>
+        </p:txBody>
+      </p:sp>
+      <p:sp>
+        <p:nvSpPr>
+          <p:cNvPr id="20" name="TextBox 19"/>
+          <p:cNvSpPr txBox="1"/>
+          <p:nvPr/>
+        </p:nvSpPr>
+        <p:spPr>
+          <a:xfrm>
+            <a:off x="8001000" y="5020056"/>
+            <a:ext cx="3383280" cy="365760"/>
+          </a:xfrm>
+          <a:prstGeom prst="rect">
+            <a:avLst/>
+          </a:prstGeom>
+          <a:noFill/>
+        </p:spPr>
+        <p:txBody>
+          <a:bodyPr wrap="square" anchor="t" lIns="0" rIns="0" tIns="0" bIns="0">
+            <a:spAutoFit/>
+          </a:bodyPr>
+          <a:lstStyle/>
+          <a:p>
+            <a:pPr algn="l">
+              <a:lnSpc>
+                <a:spcPct val="100000"/>
+              </a:lnSpc>
+              <a:spcBef>
+                <a:spcPts val="0"/>
+              </a:spcBef>
+              <a:spcAft>
+                <a:spcPts val="0"/>
+              </a:spcAft>
+            </a:pPr>
+            <a:r>
+              <a:rPr sz="1350" b="1" i="0">
+                <a:solidFill>
+                  <a:srgbClr val="1E1B2E"/>
+                </a:solidFill>
+                <a:latin typeface="Segoe UI Semibold"/>
+              </a:rPr>
+              <a:t>START / END</a:t>
+            </a:r>
+          </a:p>
+        </p:txBody>
+      </p:sp>
+      <p:sp>
+        <p:nvSpPr>
+          <p:cNvPr id="21" name="TextBox 20"/>
+          <p:cNvSpPr txBox="1"/>
+          <p:nvPr/>
+        </p:nvSpPr>
+        <p:spPr>
+          <a:xfrm>
+            <a:off x="8001000" y="5340096"/>
+            <a:ext cx="3383280" cy="548640"/>
+          </a:xfrm>
+          <a:prstGeom prst="rect">
+            <a:avLst/>
+          </a:prstGeom>
+          <a:noFill/>
+        </p:spPr>
+        <p:txBody>
+          <a:bodyPr wrap="square" anchor="t" lIns="0" rIns="0" tIns="0" bIns="0">
+            <a:spAutoFit/>
+          </a:bodyPr>
+          <a:lstStyle/>
+          <a:p>
+            <a:pPr algn="l">
+              <a:lnSpc>
+                <a:spcPct val="102000"/>
+              </a:lnSpc>
+              <a:spcBef>
+                <a:spcPts val="0"/>
+              </a:spcBef>
+              <a:spcAft>
+                <a:spcPts val="0"/>
+              </a:spcAft>
+            </a:pPr>
+            <a:r>
+              <a:rPr sz="1150" b="0" i="0">
+                <a:solidFill>
+                  <a:srgbClr val="6B6682"/>
+                </a:solidFill>
+                <a:latin typeface="Segoe UI"/>
+              </a:rPr>
+              <a:t>entrada y salida del grafo</a:t>
+            </a:r>
+          </a:p>
+        </p:txBody>
+      </p:sp>
+      <p:sp>
+        <p:nvSpPr>
+          <p:cNvPr id="22" name="TextBox 21"/>
+          <p:cNvSpPr txBox="1"/>
+          <p:nvPr/>
+        </p:nvSpPr>
+        <p:spPr>
+          <a:xfrm>
+            <a:off x="640080" y="6172200"/>
+            <a:ext cx="10927080" cy="365760"/>
+          </a:xfrm>
+          <a:prstGeom prst="rect">
+            <a:avLst/>
+          </a:prstGeom>
+          <a:noFill/>
+        </p:spPr>
+        <p:txBody>
+          <a:bodyPr wrap="square" anchor="t" lIns="0" rIns="0" tIns="0" bIns="0">
+            <a:spAutoFit/>
+          </a:bodyPr>
+          <a:lstStyle/>
+          <a:p>
+            <a:pPr algn="ctr">
+              <a:lnSpc>
+                <a:spcPct val="100000"/>
+              </a:lnSpc>
+              <a:spcBef>
+                <a:spcPts val="0"/>
+              </a:spcBef>
+              <a:spcAft>
+                <a:spcPts val="0"/>
+              </a:spcAft>
+            </a:pPr>
+            <a:r>
+              <a:rPr sz="1100" b="0" i="1">
+                <a:solidFill>
+                  <a:srgbClr val="6B6682"/>
+                </a:solidFill>
+                <a:latin typeface="Segoe UI"/>
+              </a:rPr>
+              <a:t>Es exactamente el grafo que compilas en construir_grafo(): nodos = pasos, aristas = transiciones.</a:t>
+            </a:r>
+          </a:p>
+        </p:txBody>
+      </p:sp>
+      <p:sp>
+        <p:nvSpPr>
+          <p:cNvPr id="23" name="TextBox 22"/>
+          <p:cNvSpPr txBox="1"/>
+          <p:nvPr/>
+        </p:nvSpPr>
+        <p:spPr>
+          <a:xfrm>
+            <a:off x="548640" y="6400800"/>
+            <a:ext cx="5486400" cy="274320"/>
+          </a:xfrm>
+          <a:prstGeom prst="rect">
+            <a:avLst/>
+          </a:prstGeom>
+          <a:noFill/>
+        </p:spPr>
+        <p:txBody>
+          <a:bodyPr wrap="square" anchor="t" lIns="0" rIns="0" tIns="0" bIns="0">
+            <a:spAutoFit/>
+          </a:bodyPr>
+          <a:lstStyle/>
+          <a:p>
+            <a:pPr algn="l">
+              <a:lnSpc>
+                <a:spcPct val="100000"/>
+              </a:lnSpc>
+              <a:spcBef>
+                <a:spcPts val="0"/>
+              </a:spcBef>
+              <a:spcAft>
+                <a:spcPts val="0"/>
+              </a:spcAft>
+            </a:pPr>
+            <a:r>
+              <a:rPr sz="1000" b="0" i="0">
+                <a:solidFill>
+                  <a:srgbClr val="6B6682"/>
+                </a:solidFill>
+                <a:latin typeface="Segoe UI"/>
+              </a:rPr>
+              <a:t>Taller de Agentes de IA  ·  Microsoft</a:t>
+            </a:r>
+          </a:p>
+        </p:txBody>
+      </p:sp>
+      <p:sp>
+        <p:nvSpPr>
+          <p:cNvPr id="24" name="TextBox 23"/>
+          <p:cNvSpPr txBox="1"/>
+          <p:nvPr/>
+        </p:nvSpPr>
+        <p:spPr>
+          <a:xfrm>
+            <a:off x="11277295" y="6400800"/>
+            <a:ext cx="548640" cy="274320"/>
+          </a:xfrm>
+          <a:prstGeom prst="rect">
+            <a:avLst/>
+          </a:prstGeom>
+          <a:noFill/>
+        </p:spPr>
+        <p:txBody>
+          <a:bodyPr wrap="square" anchor="t" lIns="0" rIns="0" tIns="0" bIns="0">
+            <a:spAutoFit/>
+          </a:bodyPr>
+          <a:lstStyle/>
+          <a:p>
+            <a:pPr algn="r">
+              <a:lnSpc>
+                <a:spcPct val="100000"/>
+              </a:lnSpc>
+              <a:spcBef>
+                <a:spcPts val="0"/>
+              </a:spcBef>
+              <a:spcAft>
+                <a:spcPts val="0"/>
+              </a:spcAft>
+            </a:pPr>
+            <a:r>
+              <a:rPr sz="1100" b="0" i="0">
+                <a:solidFill>
+                  <a:srgbClr val="6B6682"/>
+                </a:solidFill>
+                <a:latin typeface="Segoe UI"/>
+              </a:rPr>
+              <a:t>15</a:t>
+            </a:r>
+          </a:p>
+        </p:txBody>
+      </p:sp>
+    </p:spTree>
+  </p:cSld>
+  <p:clrMapOvr>
+    <a:masterClrMapping/>
+  </p:clrMapOvr>
+</p:sld>
+</file>
+
+<file path=ppt/slides/slide16.xml><?xml version="1.0" encoding="utf-8"?>
+<p:sld xmlns:a="http://schemas.openxmlformats.org/drawingml/2006/main" xmlns:p="http://schemas.openxmlformats.org/presentationml/2006/main" xmlns:r="http://schemas.openxmlformats.org/officeDocument/2006/relationships">
+  <p:cSld>
+    <p:bg>
+      <p:bgPr>
+        <a:solidFill>
           <a:srgbClr val="1A164B"/>
         </a:solidFill>
         <a:effectLst/>
@@ -11508,1020 +12541,6 @@
               <a:rPr sz="1100" b="0" i="0">
                 <a:solidFill>
                   <a:srgbClr val="22D3EE"/>
-                </a:solidFill>
-                <a:latin typeface="Segoe UI"/>
-              </a:rPr>
-              <a:t>15</a:t>
-            </a:r>
-          </a:p>
-        </p:txBody>
-      </p:sp>
-    </p:spTree>
-  </p:cSld>
-  <p:clrMapOvr>
-    <a:masterClrMapping/>
-  </p:clrMapOvr>
-</p:sld>
-</file>
-
-<file path=ppt/slides/slide16.xml><?xml version="1.0" encoding="utf-8"?>
-<p:sld xmlns:a="http://schemas.openxmlformats.org/drawingml/2006/main" xmlns:p="http://schemas.openxmlformats.org/presentationml/2006/main" xmlns:r="http://schemas.openxmlformats.org/officeDocument/2006/relationships">
-  <p:cSld>
-    <p:bg>
-      <p:bgPr>
-        <a:solidFill>
-          <a:srgbClr val="F6F5FB"/>
-        </a:solidFill>
-        <a:effectLst/>
-      </p:bgPr>
-    </p:bg>
-    <p:spTree>
-      <p:nvGrpSpPr>
-        <p:cNvPr id="1" name=""/>
-        <p:cNvGrpSpPr/>
-        <p:nvPr/>
-      </p:nvGrpSpPr>
-      <p:grpSpPr/>
-      <p:sp>
-        <p:nvSpPr>
-          <p:cNvPr id="2" name="Rectangle 1"/>
-          <p:cNvSpPr/>
-          <p:nvPr/>
-        </p:nvSpPr>
-        <p:spPr>
-          <a:xfrm>
-            <a:off x="8138160" y="0"/>
-            <a:ext cx="4053535" cy="6858000"/>
-          </a:xfrm>
-          <a:prstGeom prst="rect">
-            <a:avLst/>
-          </a:prstGeom>
-          <a:solidFill>
-            <a:srgbClr val="1A164B"/>
-          </a:solidFill>
-          <a:ln>
-            <a:noFill/>
-          </a:ln>
-          <a:effectLst/>
-        </p:spPr>
-        <p:style>
-          <a:lnRef idx="1">
-            <a:schemeClr val="accent1"/>
-          </a:lnRef>
-          <a:fillRef idx="3">
-            <a:schemeClr val="accent1"/>
-          </a:fillRef>
-          <a:effectRef idx="2">
-            <a:schemeClr val="accent1"/>
-          </a:effectRef>
-          <a:fontRef idx="minor">
-            <a:schemeClr val="lt1"/>
-          </a:fontRef>
-        </p:style>
-        <p:txBody>
-          <a:bodyPr rtlCol="0" anchor="ctr"/>
-          <a:lstStyle/>
-          <a:p>
-            <a:pPr algn="ctr"/>
-          </a:p>
-        </p:txBody>
-      </p:sp>
-      <p:sp>
-        <p:nvSpPr>
-          <p:cNvPr id="3" name="Rectangle 2"/>
-          <p:cNvSpPr/>
-          <p:nvPr/>
-        </p:nvSpPr>
-        <p:spPr>
-          <a:xfrm>
-            <a:off x="8138160" y="0"/>
-            <a:ext cx="4053535" cy="6858000"/>
-          </a:xfrm>
-          <a:prstGeom prst="rect">
-            <a:avLst/>
-          </a:prstGeom>
-          <a:gradFill>
-            <a:gsLst>
-              <a:gs pos="0">
-                <a:srgbClr val="2A226E"/>
-              </a:gs>
-              <a:gs pos="100000">
-                <a:srgbClr val="1A164B"/>
-              </a:gs>
-            </a:gsLst>
-            <a:lin ang="6900000" scaled="1"/>
-          </a:gradFill>
-          <a:ln>
-            <a:noFill/>
-          </a:ln>
-          <a:effectLst/>
-        </p:spPr>
-        <p:style>
-          <a:lnRef idx="1">
-            <a:schemeClr val="accent1"/>
-          </a:lnRef>
-          <a:fillRef idx="3">
-            <a:schemeClr val="accent1"/>
-          </a:fillRef>
-          <a:effectRef idx="2">
-            <a:schemeClr val="accent1"/>
-          </a:effectRef>
-          <a:fontRef idx="minor">
-            <a:schemeClr val="lt1"/>
-          </a:fontRef>
-        </p:style>
-        <p:txBody>
-          <a:bodyPr rtlCol="0" anchor="ctr"/>
-          <a:lstStyle/>
-          <a:p>
-            <a:pPr algn="ctr"/>
-          </a:p>
-        </p:txBody>
-      </p:sp>
-      <p:sp>
-        <p:nvSpPr>
-          <p:cNvPr id="4" name="Oval 3"/>
-          <p:cNvSpPr/>
-          <p:nvPr/>
-        </p:nvSpPr>
-        <p:spPr>
-          <a:xfrm>
-            <a:off x="9509760" y="1371600"/>
-            <a:ext cx="1554480" cy="1554480"/>
-          </a:xfrm>
-          <a:prstGeom prst="ellipse">
-            <a:avLst/>
-          </a:prstGeom>
-          <a:solidFill>
-            <a:srgbClr val="22D3EE"/>
-          </a:solidFill>
-          <a:ln>
-            <a:noFill/>
-          </a:ln>
-          <a:effectLst/>
-        </p:spPr>
-        <p:style>
-          <a:lnRef idx="1">
-            <a:schemeClr val="accent1"/>
-          </a:lnRef>
-          <a:fillRef idx="3">
-            <a:schemeClr val="accent1"/>
-          </a:fillRef>
-          <a:effectRef idx="2">
-            <a:schemeClr val="accent1"/>
-          </a:effectRef>
-          <a:fontRef idx="minor">
-            <a:schemeClr val="lt1"/>
-          </a:fontRef>
-        </p:style>
-        <p:txBody>
-          <a:bodyPr rtlCol="0" anchor="ctr"/>
-          <a:lstStyle/>
-          <a:p>
-            <a:pPr algn="ctr"/>
-          </a:p>
-        </p:txBody>
-      </p:sp>
-      <p:sp>
-        <p:nvSpPr>
-          <p:cNvPr id="5" name="TextBox 4"/>
-          <p:cNvSpPr txBox="1"/>
-          <p:nvPr/>
-        </p:nvSpPr>
-        <p:spPr>
-          <a:xfrm>
-            <a:off x="9509760" y="1353312"/>
-            <a:ext cx="1554480" cy="1554480"/>
-          </a:xfrm>
-          <a:prstGeom prst="rect">
-            <a:avLst/>
-          </a:prstGeom>
-          <a:noFill/>
-        </p:spPr>
-        <p:txBody>
-          <a:bodyPr wrap="square" anchor="ctr" lIns="0" rIns="0" tIns="0" bIns="0">
-            <a:spAutoFit/>
-          </a:bodyPr>
-          <a:lstStyle/>
-          <a:p>
-            <a:pPr algn="ctr">
-              <a:lnSpc>
-                <a:spcPct val="100000"/>
-              </a:lnSpc>
-              <a:spcBef>
-                <a:spcPts val="0"/>
-              </a:spcBef>
-              <a:spcAft>
-                <a:spcPts val="0"/>
-              </a:spcAft>
-            </a:pPr>
-            <a:r>
-              <a:rPr sz="5400" b="1" i="0">
-                <a:solidFill>
-                  <a:srgbClr val="FFFFFF"/>
-                </a:solidFill>
-                <a:latin typeface="Segoe UI Emoji"/>
-              </a:rPr>
-              <a:t>📚</a:t>
-            </a:r>
-          </a:p>
-        </p:txBody>
-      </p:sp>
-      <p:sp>
-        <p:nvSpPr>
-          <p:cNvPr id="6" name="TextBox 5"/>
-          <p:cNvSpPr txBox="1"/>
-          <p:nvPr/>
-        </p:nvSpPr>
-        <p:spPr>
-          <a:xfrm>
-            <a:off x="8138160" y="3383280"/>
-            <a:ext cx="4053535" cy="1097280"/>
-          </a:xfrm>
-          <a:prstGeom prst="rect">
-            <a:avLst/>
-          </a:prstGeom>
-          <a:noFill/>
-        </p:spPr>
-        <p:txBody>
-          <a:bodyPr wrap="square" anchor="t" lIns="0" rIns="0" tIns="0" bIns="0">
-            <a:spAutoFit/>
-          </a:bodyPr>
-          <a:lstStyle/>
-          <a:p>
-            <a:pPr algn="ctr">
-              <a:lnSpc>
-                <a:spcPct val="100000"/>
-              </a:lnSpc>
-              <a:spcBef>
-                <a:spcPts val="0"/>
-              </a:spcBef>
-              <a:spcAft>
-                <a:spcPts val="0"/>
-              </a:spcAft>
-            </a:pPr>
-            <a:r>
-              <a:rPr sz="6000" b="1" i="0">
-                <a:solidFill>
-                  <a:srgbClr val="22D3EE"/>
-                </a:solidFill>
-                <a:latin typeface="Segoe UI Semibold"/>
-              </a:rPr>
-              <a:t>RAG</a:t>
-            </a:r>
-          </a:p>
-        </p:txBody>
-      </p:sp>
-      <p:sp>
-        <p:nvSpPr>
-          <p:cNvPr id="7" name="TextBox 6"/>
-          <p:cNvSpPr txBox="1"/>
-          <p:nvPr/>
-        </p:nvSpPr>
-        <p:spPr>
-          <a:xfrm>
-            <a:off x="8138160" y="4480560"/>
-            <a:ext cx="4053535" cy="731520"/>
-          </a:xfrm>
-          <a:prstGeom prst="rect">
-            <a:avLst/>
-          </a:prstGeom>
-          <a:noFill/>
-        </p:spPr>
-        <p:txBody>
-          <a:bodyPr wrap="square" anchor="t" lIns="0" rIns="0" tIns="0" bIns="0">
-            <a:spAutoFit/>
-          </a:bodyPr>
-          <a:lstStyle/>
-          <a:p>
-            <a:pPr algn="ctr">
-              <a:lnSpc>
-                <a:spcPct val="100000"/>
-              </a:lnSpc>
-              <a:spcBef>
-                <a:spcPts val="0"/>
-              </a:spcBef>
-              <a:spcAft>
-                <a:spcPts val="0"/>
-              </a:spcAft>
-            </a:pPr>
-            <a:r>
-              <a:rPr sz="1400" b="0" i="0">
-                <a:solidFill>
-                  <a:srgbClr val="B9B3E6"/>
-                </a:solidFill>
-                <a:latin typeface="Segoe UI"/>
-              </a:rPr>
-              <a:t>Retrieval-Augmented Generation</a:t>
-            </a:r>
-          </a:p>
-        </p:txBody>
-      </p:sp>
-      <p:sp>
-        <p:nvSpPr>
-          <p:cNvPr id="8" name="Oval 7"/>
-          <p:cNvSpPr/>
-          <p:nvPr/>
-        </p:nvSpPr>
-        <p:spPr>
-          <a:xfrm>
-            <a:off x="640080" y="822960"/>
-            <a:ext cx="457200" cy="457200"/>
-          </a:xfrm>
-          <a:prstGeom prst="ellipse">
-            <a:avLst/>
-          </a:prstGeom>
-          <a:solidFill>
-            <a:srgbClr val="22D3EE"/>
-          </a:solidFill>
-          <a:ln>
-            <a:noFill/>
-          </a:ln>
-          <a:effectLst/>
-        </p:spPr>
-        <p:style>
-          <a:lnRef idx="1">
-            <a:schemeClr val="accent1"/>
-          </a:lnRef>
-          <a:fillRef idx="3">
-            <a:schemeClr val="accent1"/>
-          </a:fillRef>
-          <a:effectRef idx="2">
-            <a:schemeClr val="accent1"/>
-          </a:effectRef>
-          <a:fontRef idx="minor">
-            <a:schemeClr val="lt1"/>
-          </a:fontRef>
-        </p:style>
-        <p:txBody>
-          <a:bodyPr rtlCol="0" anchor="ctr"/>
-          <a:lstStyle/>
-          <a:p>
-            <a:pPr algn="ctr"/>
-          </a:p>
-        </p:txBody>
-      </p:sp>
-      <p:sp>
-        <p:nvSpPr>
-          <p:cNvPr id="9" name="TextBox 8"/>
-          <p:cNvSpPr txBox="1"/>
-          <p:nvPr/>
-        </p:nvSpPr>
-        <p:spPr>
-          <a:xfrm>
-            <a:off x="640080" y="841248"/>
-            <a:ext cx="457200" cy="457200"/>
-          </a:xfrm>
-          <a:prstGeom prst="rect">
-            <a:avLst/>
-          </a:prstGeom>
-          <a:noFill/>
-        </p:spPr>
-        <p:txBody>
-          <a:bodyPr wrap="square" anchor="ctr" lIns="0" rIns="0" tIns="0" bIns="0">
-            <a:spAutoFit/>
-          </a:bodyPr>
-          <a:lstStyle/>
-          <a:p>
-            <a:pPr algn="ctr">
-              <a:lnSpc>
-                <a:spcPct val="100000"/>
-              </a:lnSpc>
-              <a:spcBef>
-                <a:spcPts val="0"/>
-              </a:spcBef>
-              <a:spcAft>
-                <a:spcPts val="0"/>
-              </a:spcAft>
-            </a:pPr>
-            <a:r>
-              <a:rPr sz="1800" b="1" i="0">
-                <a:solidFill>
-                  <a:srgbClr val="FFFFFF"/>
-                </a:solidFill>
-                <a:latin typeface="Segoe UI Semibold"/>
-              </a:rPr>
-              <a:t>6</a:t>
-            </a:r>
-          </a:p>
-        </p:txBody>
-      </p:sp>
-      <p:sp>
-        <p:nvSpPr>
-          <p:cNvPr id="10" name="TextBox 9"/>
-          <p:cNvSpPr txBox="1"/>
-          <p:nvPr/>
-        </p:nvSpPr>
-        <p:spPr>
-          <a:xfrm>
-            <a:off x="1280160" y="841248"/>
-            <a:ext cx="6400800" cy="411480"/>
-          </a:xfrm>
-          <a:prstGeom prst="rect">
-            <a:avLst/>
-          </a:prstGeom>
-          <a:noFill/>
-        </p:spPr>
-        <p:txBody>
-          <a:bodyPr wrap="square" anchor="ctr" lIns="0" rIns="0" tIns="0" bIns="0">
-            <a:spAutoFit/>
-          </a:bodyPr>
-          <a:lstStyle/>
-          <a:p>
-            <a:pPr algn="l">
-              <a:lnSpc>
-                <a:spcPct val="100000"/>
-              </a:lnSpc>
-              <a:spcBef>
-                <a:spcPts val="0"/>
-              </a:spcBef>
-              <a:spcAft>
-                <a:spcPts val="0"/>
-              </a:spcAft>
-            </a:pPr>
-            <a:r>
-              <a:rPr sz="1500" b="1" i="0">
-                <a:solidFill>
-                  <a:srgbClr val="22D3EE"/>
-                </a:solidFill>
-                <a:latin typeface="Segoe UI Semibold"/>
-              </a:rPr>
-              <a:t>CONOCIMIENTO</a:t>
-            </a:r>
-          </a:p>
-        </p:txBody>
-      </p:sp>
-      <p:sp>
-        <p:nvSpPr>
-          <p:cNvPr id="11" name="TextBox 10"/>
-          <p:cNvSpPr txBox="1"/>
-          <p:nvPr/>
-        </p:nvSpPr>
-        <p:spPr>
-          <a:xfrm>
-            <a:off x="640080" y="1417320"/>
-            <a:ext cx="7223760" cy="1188720"/>
-          </a:xfrm>
-          <a:prstGeom prst="rect">
-            <a:avLst/>
-          </a:prstGeom>
-          <a:noFill/>
-        </p:spPr>
-        <p:txBody>
-          <a:bodyPr wrap="square" anchor="t" lIns="0" rIns="0" tIns="0" bIns="0">
-            <a:spAutoFit/>
-          </a:bodyPr>
-          <a:lstStyle/>
-          <a:p>
-            <a:pPr algn="l">
-              <a:lnSpc>
-                <a:spcPct val="95000"/>
-              </a:lnSpc>
-              <a:spcBef>
-                <a:spcPts val="0"/>
-              </a:spcBef>
-              <a:spcAft>
-                <a:spcPts val="0"/>
-              </a:spcAft>
-            </a:pPr>
-            <a:r>
-              <a:rPr sz="3400" b="1" i="0">
-                <a:solidFill>
-                  <a:srgbClr val="1E1B2E"/>
-                </a:solidFill>
-                <a:latin typeface="Segoe UI Semibold"/>
-              </a:rPr>
-              <a:t>¿Qué es RAG?</a:t>
-            </a:r>
-          </a:p>
-        </p:txBody>
-      </p:sp>
-      <p:sp>
-        <p:nvSpPr>
-          <p:cNvPr id="12" name="TextBox 11"/>
-          <p:cNvSpPr txBox="1"/>
-          <p:nvPr/>
-        </p:nvSpPr>
-        <p:spPr>
-          <a:xfrm>
-            <a:off x="658368" y="2514600"/>
-            <a:ext cx="7223760" cy="457200"/>
-          </a:xfrm>
-          <a:prstGeom prst="rect">
-            <a:avLst/>
-          </a:prstGeom>
-          <a:noFill/>
-        </p:spPr>
-        <p:txBody>
-          <a:bodyPr wrap="square" anchor="t" lIns="0" rIns="0" tIns="0" bIns="0">
-            <a:spAutoFit/>
-          </a:bodyPr>
-          <a:lstStyle/>
-          <a:p>
-            <a:pPr algn="l">
-              <a:lnSpc>
-                <a:spcPct val="100000"/>
-              </a:lnSpc>
-              <a:spcBef>
-                <a:spcPts val="0"/>
-              </a:spcBef>
-              <a:spcAft>
-                <a:spcPts val="0"/>
-              </a:spcAft>
-            </a:pPr>
-            <a:r>
-              <a:rPr sz="1500" b="0" i="1">
-                <a:solidFill>
-                  <a:srgbClr val="6B6682"/>
-                </a:solidFill>
-                <a:latin typeface="Segoe UI"/>
-              </a:rPr>
-              <a:t>Retrieval-Augmented Generation — Generación Aumentada por Recuperación</a:t>
-            </a:r>
-          </a:p>
-        </p:txBody>
-      </p:sp>
-      <p:sp>
-        <p:nvSpPr>
-          <p:cNvPr id="13" name="Rounded Rectangle 12"/>
-          <p:cNvSpPr/>
-          <p:nvPr/>
-        </p:nvSpPr>
-        <p:spPr>
-          <a:xfrm>
-            <a:off x="640080" y="3246120"/>
-            <a:ext cx="7086600" cy="841248"/>
-          </a:xfrm>
-          <a:prstGeom prst="roundRect">
-            <a:avLst/>
-          </a:prstGeom>
-          <a:solidFill>
-            <a:srgbClr val="FFFFFF"/>
-          </a:solidFill>
-          <a:ln>
-            <a:noFill/>
-          </a:ln>
-          <a:effectLst/>
-        </p:spPr>
-        <p:style>
-          <a:lnRef idx="1">
-            <a:schemeClr val="accent1"/>
-          </a:lnRef>
-          <a:fillRef idx="3">
-            <a:schemeClr val="accent1"/>
-          </a:fillRef>
-          <a:effectRef idx="2">
-            <a:schemeClr val="accent1"/>
-          </a:effectRef>
-          <a:fontRef idx="minor">
-            <a:schemeClr val="lt1"/>
-          </a:fontRef>
-        </p:style>
-        <p:txBody>
-          <a:bodyPr rtlCol="0" anchor="ctr"/>
-          <a:lstStyle/>
-          <a:p>
-            <a:pPr algn="ctr"/>
-          </a:p>
-        </p:txBody>
-      </p:sp>
-      <p:sp>
-        <p:nvSpPr>
-          <p:cNvPr id="14" name="Rectangle 13"/>
-          <p:cNvSpPr/>
-          <p:nvPr/>
-        </p:nvSpPr>
-        <p:spPr>
-          <a:xfrm>
-            <a:off x="640080" y="3246120"/>
-            <a:ext cx="100584" cy="841248"/>
-          </a:xfrm>
-          <a:prstGeom prst="rect">
-            <a:avLst/>
-          </a:prstGeom>
-          <a:solidFill>
-            <a:srgbClr val="22D3EE"/>
-          </a:solidFill>
-          <a:ln>
-            <a:noFill/>
-          </a:ln>
-          <a:effectLst/>
-        </p:spPr>
-        <p:style>
-          <a:lnRef idx="1">
-            <a:schemeClr val="accent1"/>
-          </a:lnRef>
-          <a:fillRef idx="3">
-            <a:schemeClr val="accent1"/>
-          </a:fillRef>
-          <a:effectRef idx="2">
-            <a:schemeClr val="accent1"/>
-          </a:effectRef>
-          <a:fontRef idx="minor">
-            <a:schemeClr val="lt1"/>
-          </a:fontRef>
-        </p:style>
-        <p:txBody>
-          <a:bodyPr rtlCol="0" anchor="ctr"/>
-          <a:lstStyle/>
-          <a:p>
-            <a:pPr algn="ctr"/>
-          </a:p>
-        </p:txBody>
-      </p:sp>
-      <p:sp>
-        <p:nvSpPr>
-          <p:cNvPr id="15" name="TextBox 14"/>
-          <p:cNvSpPr txBox="1"/>
-          <p:nvPr/>
-        </p:nvSpPr>
-        <p:spPr>
-          <a:xfrm>
-            <a:off x="960120" y="3392424"/>
-            <a:ext cx="6583680" cy="548640"/>
-          </a:xfrm>
-          <a:prstGeom prst="rect">
-            <a:avLst/>
-          </a:prstGeom>
-          <a:noFill/>
-        </p:spPr>
-        <p:txBody>
-          <a:bodyPr wrap="square" anchor="ctr" lIns="0" rIns="0" tIns="0" bIns="0">
-            <a:spAutoFit/>
-          </a:bodyPr>
-          <a:lstStyle/>
-          <a:p>
-            <a:pPr algn="l">
-              <a:lnSpc>
-                <a:spcPct val="100000"/>
-              </a:lnSpc>
-              <a:spcBef>
-                <a:spcPts val="0"/>
-              </a:spcBef>
-              <a:spcAft>
-                <a:spcPts val="0"/>
-              </a:spcAft>
-            </a:pPr>
-            <a:r>
-              <a:rPr sz="1550" b="0" i="0">
-                <a:solidFill>
-                  <a:srgbClr val="1E1B2E"/>
-                </a:solidFill>
-                <a:latin typeface="Segoe UI"/>
-              </a:rPr>
-              <a:t>Recupera contexto relevante antes de responder</a:t>
-            </a:r>
-          </a:p>
-        </p:txBody>
-      </p:sp>
-      <p:sp>
-        <p:nvSpPr>
-          <p:cNvPr id="16" name="Rounded Rectangle 15"/>
-          <p:cNvSpPr/>
-          <p:nvPr/>
-        </p:nvSpPr>
-        <p:spPr>
-          <a:xfrm>
-            <a:off x="640080" y="4206240"/>
-            <a:ext cx="7086600" cy="841248"/>
-          </a:xfrm>
-          <a:prstGeom prst="roundRect">
-            <a:avLst/>
-          </a:prstGeom>
-          <a:solidFill>
-            <a:srgbClr val="FFFFFF"/>
-          </a:solidFill>
-          <a:ln>
-            <a:noFill/>
-          </a:ln>
-          <a:effectLst/>
-        </p:spPr>
-        <p:style>
-          <a:lnRef idx="1">
-            <a:schemeClr val="accent1"/>
-          </a:lnRef>
-          <a:fillRef idx="3">
-            <a:schemeClr val="accent1"/>
-          </a:fillRef>
-          <a:effectRef idx="2">
-            <a:schemeClr val="accent1"/>
-          </a:effectRef>
-          <a:fontRef idx="minor">
-            <a:schemeClr val="lt1"/>
-          </a:fontRef>
-        </p:style>
-        <p:txBody>
-          <a:bodyPr rtlCol="0" anchor="ctr"/>
-          <a:lstStyle/>
-          <a:p>
-            <a:pPr algn="ctr"/>
-          </a:p>
-        </p:txBody>
-      </p:sp>
-      <p:sp>
-        <p:nvSpPr>
-          <p:cNvPr id="17" name="Rectangle 16"/>
-          <p:cNvSpPr/>
-          <p:nvPr/>
-        </p:nvSpPr>
-        <p:spPr>
-          <a:xfrm>
-            <a:off x="640080" y="4206240"/>
-            <a:ext cx="100584" cy="841248"/>
-          </a:xfrm>
-          <a:prstGeom prst="rect">
-            <a:avLst/>
-          </a:prstGeom>
-          <a:solidFill>
-            <a:srgbClr val="22D3EE"/>
-          </a:solidFill>
-          <a:ln>
-            <a:noFill/>
-          </a:ln>
-          <a:effectLst/>
-        </p:spPr>
-        <p:style>
-          <a:lnRef idx="1">
-            <a:schemeClr val="accent1"/>
-          </a:lnRef>
-          <a:fillRef idx="3">
-            <a:schemeClr val="accent1"/>
-          </a:fillRef>
-          <a:effectRef idx="2">
-            <a:schemeClr val="accent1"/>
-          </a:effectRef>
-          <a:fontRef idx="minor">
-            <a:schemeClr val="lt1"/>
-          </a:fontRef>
-        </p:style>
-        <p:txBody>
-          <a:bodyPr rtlCol="0" anchor="ctr"/>
-          <a:lstStyle/>
-          <a:p>
-            <a:pPr algn="ctr"/>
-          </a:p>
-        </p:txBody>
-      </p:sp>
-      <p:sp>
-        <p:nvSpPr>
-          <p:cNvPr id="18" name="TextBox 17"/>
-          <p:cNvSpPr txBox="1"/>
-          <p:nvPr/>
-        </p:nvSpPr>
-        <p:spPr>
-          <a:xfrm>
-            <a:off x="960120" y="4352544"/>
-            <a:ext cx="6583680" cy="548640"/>
-          </a:xfrm>
-          <a:prstGeom prst="rect">
-            <a:avLst/>
-          </a:prstGeom>
-          <a:noFill/>
-        </p:spPr>
-        <p:txBody>
-          <a:bodyPr wrap="square" anchor="ctr" lIns="0" rIns="0" tIns="0" bIns="0">
-            <a:spAutoFit/>
-          </a:bodyPr>
-          <a:lstStyle/>
-          <a:p>
-            <a:pPr algn="l">
-              <a:lnSpc>
-                <a:spcPct val="100000"/>
-              </a:lnSpc>
-              <a:spcBef>
-                <a:spcPts val="0"/>
-              </a:spcBef>
-              <a:spcAft>
-                <a:spcPts val="0"/>
-              </a:spcAft>
-            </a:pPr>
-            <a:r>
-              <a:rPr sz="1550" b="0" i="0">
-                <a:solidFill>
-                  <a:srgbClr val="1E1B2E"/>
-                </a:solidFill>
-                <a:latin typeface="Segoe UI"/>
-              </a:rPr>
-              <a:t>Combina búsqueda + generación de texto</a:t>
-            </a:r>
-          </a:p>
-        </p:txBody>
-      </p:sp>
-      <p:sp>
-        <p:nvSpPr>
-          <p:cNvPr id="19" name="Rounded Rectangle 18"/>
-          <p:cNvSpPr/>
-          <p:nvPr/>
-        </p:nvSpPr>
-        <p:spPr>
-          <a:xfrm>
-            <a:off x="640080" y="5166359"/>
-            <a:ext cx="7086600" cy="841248"/>
-          </a:xfrm>
-          <a:prstGeom prst="roundRect">
-            <a:avLst/>
-          </a:prstGeom>
-          <a:solidFill>
-            <a:srgbClr val="FFFFFF"/>
-          </a:solidFill>
-          <a:ln>
-            <a:noFill/>
-          </a:ln>
-          <a:effectLst/>
-        </p:spPr>
-        <p:style>
-          <a:lnRef idx="1">
-            <a:schemeClr val="accent1"/>
-          </a:lnRef>
-          <a:fillRef idx="3">
-            <a:schemeClr val="accent1"/>
-          </a:fillRef>
-          <a:effectRef idx="2">
-            <a:schemeClr val="accent1"/>
-          </a:effectRef>
-          <a:fontRef idx="minor">
-            <a:schemeClr val="lt1"/>
-          </a:fontRef>
-        </p:style>
-        <p:txBody>
-          <a:bodyPr rtlCol="0" anchor="ctr"/>
-          <a:lstStyle/>
-          <a:p>
-            <a:pPr algn="ctr"/>
-          </a:p>
-        </p:txBody>
-      </p:sp>
-      <p:sp>
-        <p:nvSpPr>
-          <p:cNvPr id="20" name="Rectangle 19"/>
-          <p:cNvSpPr/>
-          <p:nvPr/>
-        </p:nvSpPr>
-        <p:spPr>
-          <a:xfrm>
-            <a:off x="640080" y="5166359"/>
-            <a:ext cx="100584" cy="841248"/>
-          </a:xfrm>
-          <a:prstGeom prst="rect">
-            <a:avLst/>
-          </a:prstGeom>
-          <a:solidFill>
-            <a:srgbClr val="22D3EE"/>
-          </a:solidFill>
-          <a:ln>
-            <a:noFill/>
-          </a:ln>
-          <a:effectLst/>
-        </p:spPr>
-        <p:style>
-          <a:lnRef idx="1">
-            <a:schemeClr val="accent1"/>
-          </a:lnRef>
-          <a:fillRef idx="3">
-            <a:schemeClr val="accent1"/>
-          </a:fillRef>
-          <a:effectRef idx="2">
-            <a:schemeClr val="accent1"/>
-          </a:effectRef>
-          <a:fontRef idx="minor">
-            <a:schemeClr val="lt1"/>
-          </a:fontRef>
-        </p:style>
-        <p:txBody>
-          <a:bodyPr rtlCol="0" anchor="ctr"/>
-          <a:lstStyle/>
-          <a:p>
-            <a:pPr algn="ctr"/>
-          </a:p>
-        </p:txBody>
-      </p:sp>
-      <p:sp>
-        <p:nvSpPr>
-          <p:cNvPr id="21" name="TextBox 20"/>
-          <p:cNvSpPr txBox="1"/>
-          <p:nvPr/>
-        </p:nvSpPr>
-        <p:spPr>
-          <a:xfrm>
-            <a:off x="960120" y="5312664"/>
-            <a:ext cx="6583680" cy="548640"/>
-          </a:xfrm>
-          <a:prstGeom prst="rect">
-            <a:avLst/>
-          </a:prstGeom>
-          <a:noFill/>
-        </p:spPr>
-        <p:txBody>
-          <a:bodyPr wrap="square" anchor="ctr" lIns="0" rIns="0" tIns="0" bIns="0">
-            <a:spAutoFit/>
-          </a:bodyPr>
-          <a:lstStyle/>
-          <a:p>
-            <a:pPr algn="l">
-              <a:lnSpc>
-                <a:spcPct val="100000"/>
-              </a:lnSpc>
-              <a:spcBef>
-                <a:spcPts val="0"/>
-              </a:spcBef>
-              <a:spcAft>
-                <a:spcPts val="0"/>
-              </a:spcAft>
-            </a:pPr>
-            <a:r>
-              <a:rPr sz="1550" b="0" i="0">
-                <a:solidFill>
-                  <a:srgbClr val="1E1B2E"/>
-                </a:solidFill>
-                <a:latin typeface="Segoe UI"/>
-              </a:rPr>
-              <a:t>Reduce alucinaciones y mejora la precisión</a:t>
-            </a:r>
-          </a:p>
-        </p:txBody>
-      </p:sp>
-      <p:sp>
-        <p:nvSpPr>
-          <p:cNvPr id="22" name="TextBox 21"/>
-          <p:cNvSpPr txBox="1"/>
-          <p:nvPr/>
-        </p:nvSpPr>
-        <p:spPr>
-          <a:xfrm>
-            <a:off x="548640" y="6400800"/>
-            <a:ext cx="5486400" cy="274320"/>
-          </a:xfrm>
-          <a:prstGeom prst="rect">
-            <a:avLst/>
-          </a:prstGeom>
-          <a:noFill/>
-        </p:spPr>
-        <p:txBody>
-          <a:bodyPr wrap="square" anchor="t" lIns="0" rIns="0" tIns="0" bIns="0">
-            <a:spAutoFit/>
-          </a:bodyPr>
-          <a:lstStyle/>
-          <a:p>
-            <a:pPr algn="l">
-              <a:lnSpc>
-                <a:spcPct val="100000"/>
-              </a:lnSpc>
-              <a:spcBef>
-                <a:spcPts val="0"/>
-              </a:spcBef>
-              <a:spcAft>
-                <a:spcPts val="0"/>
-              </a:spcAft>
-            </a:pPr>
-            <a:r>
-              <a:rPr sz="1000" b="0" i="0">
-                <a:solidFill>
-                  <a:srgbClr val="6B6682"/>
-                </a:solidFill>
-                <a:latin typeface="Segoe UI"/>
-              </a:rPr>
-              <a:t>Taller de Agentes de IA  ·  Microsoft</a:t>
-            </a:r>
-          </a:p>
-        </p:txBody>
-      </p:sp>
-      <p:sp>
-        <p:nvSpPr>
-          <p:cNvPr id="23" name="TextBox 22"/>
-          <p:cNvSpPr txBox="1"/>
-          <p:nvPr/>
-        </p:nvSpPr>
-        <p:spPr>
-          <a:xfrm>
-            <a:off x="11277295" y="6400800"/>
-            <a:ext cx="548640" cy="274320"/>
-          </a:xfrm>
-          <a:prstGeom prst="rect">
-            <a:avLst/>
-          </a:prstGeom>
-          <a:noFill/>
-        </p:spPr>
-        <p:txBody>
-          <a:bodyPr wrap="square" anchor="t" lIns="0" rIns="0" tIns="0" bIns="0">
-            <a:spAutoFit/>
-          </a:bodyPr>
-          <a:lstStyle/>
-          <a:p>
-            <a:pPr algn="r">
-              <a:lnSpc>
-                <a:spcPct val="100000"/>
-              </a:lnSpc>
-              <a:spcBef>
-                <a:spcPts val="0"/>
-              </a:spcBef>
-              <a:spcAft>
-                <a:spcPts val="0"/>
-              </a:spcAft>
-            </a:pPr>
-            <a:r>
-              <a:rPr sz="1100" b="0" i="0">
-                <a:solidFill>
-                  <a:srgbClr val="6B6682"/>
                 </a:solidFill>
                 <a:latin typeface="Segoe UI"/>
               </a:rPr>
@@ -12564,8 +12583,8 @@
         </p:nvSpPr>
         <p:spPr>
           <a:xfrm>
-            <a:off x="0" y="0"/>
-            <a:ext cx="12191695" cy="1234440"/>
+            <a:off x="8138160" y="0"/>
+            <a:ext cx="4053535" cy="6858000"/>
           </a:xfrm>
           <a:prstGeom prst="rect">
             <a:avLst/>
@@ -12608,10 +12627,62 @@
         </p:nvSpPr>
         <p:spPr>
           <a:xfrm>
-            <a:off x="548640" y="365760"/>
-            <a:ext cx="128016" cy="502920"/>
-          </a:xfrm>
-          <a:prstGeom prst="rect">
+            <a:off x="8138160" y="0"/>
+            <a:ext cx="4053535" cy="6858000"/>
+          </a:xfrm>
+          <a:prstGeom prst="rect">
+            <a:avLst/>
+          </a:prstGeom>
+          <a:gradFill>
+            <a:gsLst>
+              <a:gs pos="0">
+                <a:srgbClr val="2A226E"/>
+              </a:gs>
+              <a:gs pos="100000">
+                <a:srgbClr val="1A164B"/>
+              </a:gs>
+            </a:gsLst>
+            <a:lin ang="6900000" scaled="1"/>
+          </a:gradFill>
+          <a:ln>
+            <a:noFill/>
+          </a:ln>
+          <a:effectLst/>
+        </p:spPr>
+        <p:style>
+          <a:lnRef idx="1">
+            <a:schemeClr val="accent1"/>
+          </a:lnRef>
+          <a:fillRef idx="3">
+            <a:schemeClr val="accent1"/>
+          </a:fillRef>
+          <a:effectRef idx="2">
+            <a:schemeClr val="accent1"/>
+          </a:effectRef>
+          <a:fontRef idx="minor">
+            <a:schemeClr val="lt1"/>
+          </a:fontRef>
+        </p:style>
+        <p:txBody>
+          <a:bodyPr rtlCol="0" anchor="ctr"/>
+          <a:lstStyle/>
+          <a:p>
+            <a:pPr algn="ctr"/>
+          </a:p>
+        </p:txBody>
+      </p:sp>
+      <p:sp>
+        <p:nvSpPr>
+          <p:cNvPr id="4" name="Oval 3"/>
+          <p:cNvSpPr/>
+          <p:nvPr/>
+        </p:nvSpPr>
+        <p:spPr>
+          <a:xfrm>
+            <a:off x="9509760" y="1371600"/>
+            <a:ext cx="1554480" cy="1554480"/>
+          </a:xfrm>
+          <a:prstGeom prst="ellipse">
             <a:avLst/>
           </a:prstGeom>
           <a:solidFill>
@@ -12646,14 +12717,59 @@
       </p:sp>
       <p:sp>
         <p:nvSpPr>
-          <p:cNvPr id="4" name="TextBox 3"/>
-          <p:cNvSpPr txBox="1"/>
-          <p:nvPr/>
-        </p:nvSpPr>
-        <p:spPr>
-          <a:xfrm>
-            <a:off x="777240" y="274320"/>
-            <a:ext cx="10058400" cy="731520"/>
+          <p:cNvPr id="5" name="TextBox 4"/>
+          <p:cNvSpPr txBox="1"/>
+          <p:nvPr/>
+        </p:nvSpPr>
+        <p:spPr>
+          <a:xfrm>
+            <a:off x="9509760" y="1353312"/>
+            <a:ext cx="1554480" cy="1554480"/>
+          </a:xfrm>
+          <a:prstGeom prst="rect">
+            <a:avLst/>
+          </a:prstGeom>
+          <a:noFill/>
+        </p:spPr>
+        <p:txBody>
+          <a:bodyPr wrap="square" anchor="ctr" lIns="0" rIns="0" tIns="0" bIns="0">
+            <a:spAutoFit/>
+          </a:bodyPr>
+          <a:lstStyle/>
+          <a:p>
+            <a:pPr algn="ctr">
+              <a:lnSpc>
+                <a:spcPct val="100000"/>
+              </a:lnSpc>
+              <a:spcBef>
+                <a:spcPts val="0"/>
+              </a:spcBef>
+              <a:spcAft>
+                <a:spcPts val="0"/>
+              </a:spcAft>
+            </a:pPr>
+            <a:r>
+              <a:rPr sz="5400" b="1" i="0">
+                <a:solidFill>
+                  <a:srgbClr val="FFFFFF"/>
+                </a:solidFill>
+                <a:latin typeface="Segoe UI Emoji"/>
+              </a:rPr>
+              <a:t>📚</a:t>
+            </a:r>
+          </a:p>
+        </p:txBody>
+      </p:sp>
+      <p:sp>
+        <p:nvSpPr>
+          <p:cNvPr id="6" name="TextBox 5"/>
+          <p:cNvSpPr txBox="1"/>
+          <p:nvPr/>
+        </p:nvSpPr>
+        <p:spPr>
+          <a:xfrm>
+            <a:off x="8138160" y="3383280"/>
+            <a:ext cx="4053535" cy="1097280"/>
           </a:xfrm>
           <a:prstGeom prst="rect">
             <a:avLst/>
@@ -12666,6 +12782,185 @@
           </a:bodyPr>
           <a:lstStyle/>
           <a:p>
+            <a:pPr algn="ctr">
+              <a:lnSpc>
+                <a:spcPct val="100000"/>
+              </a:lnSpc>
+              <a:spcBef>
+                <a:spcPts val="0"/>
+              </a:spcBef>
+              <a:spcAft>
+                <a:spcPts val="0"/>
+              </a:spcAft>
+            </a:pPr>
+            <a:r>
+              <a:rPr sz="6000" b="1" i="0">
+                <a:solidFill>
+                  <a:srgbClr val="22D3EE"/>
+                </a:solidFill>
+                <a:latin typeface="Segoe UI Semibold"/>
+              </a:rPr>
+              <a:t>RAG</a:t>
+            </a:r>
+          </a:p>
+        </p:txBody>
+      </p:sp>
+      <p:sp>
+        <p:nvSpPr>
+          <p:cNvPr id="7" name="TextBox 6"/>
+          <p:cNvSpPr txBox="1"/>
+          <p:nvPr/>
+        </p:nvSpPr>
+        <p:spPr>
+          <a:xfrm>
+            <a:off x="8138160" y="4480560"/>
+            <a:ext cx="4053535" cy="731520"/>
+          </a:xfrm>
+          <a:prstGeom prst="rect">
+            <a:avLst/>
+          </a:prstGeom>
+          <a:noFill/>
+        </p:spPr>
+        <p:txBody>
+          <a:bodyPr wrap="square" anchor="t" lIns="0" rIns="0" tIns="0" bIns="0">
+            <a:spAutoFit/>
+          </a:bodyPr>
+          <a:lstStyle/>
+          <a:p>
+            <a:pPr algn="ctr">
+              <a:lnSpc>
+                <a:spcPct val="100000"/>
+              </a:lnSpc>
+              <a:spcBef>
+                <a:spcPts val="0"/>
+              </a:spcBef>
+              <a:spcAft>
+                <a:spcPts val="0"/>
+              </a:spcAft>
+            </a:pPr>
+            <a:r>
+              <a:rPr sz="1400" b="0" i="0">
+                <a:solidFill>
+                  <a:srgbClr val="B9B3E6"/>
+                </a:solidFill>
+                <a:latin typeface="Segoe UI"/>
+              </a:rPr>
+              <a:t>Retrieval-Augmented Generation</a:t>
+            </a:r>
+          </a:p>
+        </p:txBody>
+      </p:sp>
+      <p:sp>
+        <p:nvSpPr>
+          <p:cNvPr id="8" name="Oval 7"/>
+          <p:cNvSpPr/>
+          <p:nvPr/>
+        </p:nvSpPr>
+        <p:spPr>
+          <a:xfrm>
+            <a:off x="640080" y="822960"/>
+            <a:ext cx="457200" cy="457200"/>
+          </a:xfrm>
+          <a:prstGeom prst="ellipse">
+            <a:avLst/>
+          </a:prstGeom>
+          <a:solidFill>
+            <a:srgbClr val="22D3EE"/>
+          </a:solidFill>
+          <a:ln>
+            <a:noFill/>
+          </a:ln>
+          <a:effectLst/>
+        </p:spPr>
+        <p:style>
+          <a:lnRef idx="1">
+            <a:schemeClr val="accent1"/>
+          </a:lnRef>
+          <a:fillRef idx="3">
+            <a:schemeClr val="accent1"/>
+          </a:fillRef>
+          <a:effectRef idx="2">
+            <a:schemeClr val="accent1"/>
+          </a:effectRef>
+          <a:fontRef idx="minor">
+            <a:schemeClr val="lt1"/>
+          </a:fontRef>
+        </p:style>
+        <p:txBody>
+          <a:bodyPr rtlCol="0" anchor="ctr"/>
+          <a:lstStyle/>
+          <a:p>
+            <a:pPr algn="ctr"/>
+          </a:p>
+        </p:txBody>
+      </p:sp>
+      <p:sp>
+        <p:nvSpPr>
+          <p:cNvPr id="9" name="TextBox 8"/>
+          <p:cNvSpPr txBox="1"/>
+          <p:nvPr/>
+        </p:nvSpPr>
+        <p:spPr>
+          <a:xfrm>
+            <a:off x="640080" y="841248"/>
+            <a:ext cx="457200" cy="457200"/>
+          </a:xfrm>
+          <a:prstGeom prst="rect">
+            <a:avLst/>
+          </a:prstGeom>
+          <a:noFill/>
+        </p:spPr>
+        <p:txBody>
+          <a:bodyPr wrap="square" anchor="ctr" lIns="0" rIns="0" tIns="0" bIns="0">
+            <a:spAutoFit/>
+          </a:bodyPr>
+          <a:lstStyle/>
+          <a:p>
+            <a:pPr algn="ctr">
+              <a:lnSpc>
+                <a:spcPct val="100000"/>
+              </a:lnSpc>
+              <a:spcBef>
+                <a:spcPts val="0"/>
+              </a:spcBef>
+              <a:spcAft>
+                <a:spcPts val="0"/>
+              </a:spcAft>
+            </a:pPr>
+            <a:r>
+              <a:rPr sz="1800" b="1" i="0">
+                <a:solidFill>
+                  <a:srgbClr val="FFFFFF"/>
+                </a:solidFill>
+                <a:latin typeface="Segoe UI Semibold"/>
+              </a:rPr>
+              <a:t>6</a:t>
+            </a:r>
+          </a:p>
+        </p:txBody>
+      </p:sp>
+      <p:sp>
+        <p:nvSpPr>
+          <p:cNvPr id="10" name="TextBox 9"/>
+          <p:cNvSpPr txBox="1"/>
+          <p:nvPr/>
+        </p:nvSpPr>
+        <p:spPr>
+          <a:xfrm>
+            <a:off x="1280160" y="841248"/>
+            <a:ext cx="6400800" cy="411480"/>
+          </a:xfrm>
+          <a:prstGeom prst="rect">
+            <a:avLst/>
+          </a:prstGeom>
+          <a:noFill/>
+        </p:spPr>
+        <p:txBody>
+          <a:bodyPr wrap="square" anchor="ctr" lIns="0" rIns="0" tIns="0" bIns="0">
+            <a:spAutoFit/>
+          </a:bodyPr>
+          <a:lstStyle/>
+          <a:p>
             <a:pPr algn="l">
               <a:lnSpc>
                 <a:spcPct val="100000"/>
@@ -12678,27 +12973,27 @@
               </a:spcAft>
             </a:pPr>
             <a:r>
-              <a:rPr sz="3200" b="1" i="0">
-                <a:solidFill>
-                  <a:srgbClr val="FFFFFF"/>
+              <a:rPr sz="1500" b="1" i="0">
+                <a:solidFill>
+                  <a:srgbClr val="22D3EE"/>
                 </a:solidFill>
                 <a:latin typeface="Segoe UI Semibold"/>
               </a:rPr>
-              <a:t>Componentes de RAG</a:t>
-            </a:r>
-          </a:p>
-        </p:txBody>
-      </p:sp>
-      <p:sp>
-        <p:nvSpPr>
-          <p:cNvPr id="5" name="TextBox 4"/>
-          <p:cNvSpPr txBox="1"/>
-          <p:nvPr/>
-        </p:nvSpPr>
-        <p:spPr>
-          <a:xfrm>
-            <a:off x="822960" y="850392"/>
-            <a:ext cx="10058400" cy="365760"/>
+              <a:t>CONOCIMIENTO</a:t>
+            </a:r>
+          </a:p>
+        </p:txBody>
+      </p:sp>
+      <p:sp>
+        <p:nvSpPr>
+          <p:cNvPr id="11" name="TextBox 10"/>
+          <p:cNvSpPr txBox="1"/>
+          <p:nvPr/>
+        </p:nvSpPr>
+        <p:spPr>
+          <a:xfrm>
+            <a:off x="640080" y="1417320"/>
+            <a:ext cx="7223760" cy="1188720"/>
           </a:xfrm>
           <a:prstGeom prst="rect">
             <a:avLst/>
@@ -12713,37 +13008,82 @@
           <a:p>
             <a:pPr algn="l">
               <a:lnSpc>
-                <a:spcPct val="100000"/>
-              </a:lnSpc>
-              <a:spcBef>
-                <a:spcPts val="0"/>
-              </a:spcBef>
-              <a:spcAft>
-                <a:spcPts val="0"/>
-              </a:spcAft>
-            </a:pPr>
-            <a:r>
-              <a:rPr sz="1400" b="0" i="0">
-                <a:solidFill>
-                  <a:srgbClr val="B9B3E6"/>
+                <a:spcPct val="95000"/>
+              </a:lnSpc>
+              <a:spcBef>
+                <a:spcPts val="0"/>
+              </a:spcBef>
+              <a:spcAft>
+                <a:spcPts val="0"/>
+              </a:spcAft>
+            </a:pPr>
+            <a:r>
+              <a:rPr sz="3400" b="1" i="0">
+                <a:solidFill>
+                  <a:srgbClr val="1E1B2E"/>
+                </a:solidFill>
+                <a:latin typeface="Segoe UI Semibold"/>
+              </a:rPr>
+              <a:t>¿Qué es RAG?</a:t>
+            </a:r>
+          </a:p>
+        </p:txBody>
+      </p:sp>
+      <p:sp>
+        <p:nvSpPr>
+          <p:cNvPr id="12" name="TextBox 11"/>
+          <p:cNvSpPr txBox="1"/>
+          <p:nvPr/>
+        </p:nvSpPr>
+        <p:spPr>
+          <a:xfrm>
+            <a:off x="658368" y="2514600"/>
+            <a:ext cx="7223760" cy="457200"/>
+          </a:xfrm>
+          <a:prstGeom prst="rect">
+            <a:avLst/>
+          </a:prstGeom>
+          <a:noFill/>
+        </p:spPr>
+        <p:txBody>
+          <a:bodyPr wrap="square" anchor="t" lIns="0" rIns="0" tIns="0" bIns="0">
+            <a:spAutoFit/>
+          </a:bodyPr>
+          <a:lstStyle/>
+          <a:p>
+            <a:pPr algn="l">
+              <a:lnSpc>
+                <a:spcPct val="100000"/>
+              </a:lnSpc>
+              <a:spcBef>
+                <a:spcPts val="0"/>
+              </a:spcBef>
+              <a:spcAft>
+                <a:spcPts val="0"/>
+              </a:spcAft>
+            </a:pPr>
+            <a:r>
+              <a:rPr sz="1500" b="0" i="1">
+                <a:solidFill>
+                  <a:srgbClr val="6B6682"/>
                 </a:solidFill>
                 <a:latin typeface="Segoe UI"/>
               </a:rPr>
-              <a:t>El pipeline que convierte documentos en respuestas</a:t>
-            </a:r>
-          </a:p>
-        </p:txBody>
-      </p:sp>
-      <p:sp>
-        <p:nvSpPr>
-          <p:cNvPr id="6" name="Rounded Rectangle 5"/>
+              <a:t>Retrieval-Augmented Generation — Generación Aumentada por Recuperación</a:t>
+            </a:r>
+          </a:p>
+        </p:txBody>
+      </p:sp>
+      <p:sp>
+        <p:nvSpPr>
+          <p:cNvPr id="13" name="Rounded Rectangle 12"/>
           <p:cNvSpPr/>
           <p:nvPr/>
         </p:nvSpPr>
         <p:spPr>
           <a:xfrm>
-            <a:off x="640080" y="2468880"/>
-            <a:ext cx="1965960" cy="2468880"/>
+            <a:off x="640080" y="3246120"/>
+            <a:ext cx="7086600" cy="841248"/>
           </a:xfrm>
           <a:prstGeom prst="roundRect">
             <a:avLst/>
@@ -12780,20 +13120,20 @@
       </p:sp>
       <p:sp>
         <p:nvSpPr>
-          <p:cNvPr id="7" name="Oval 6"/>
+          <p:cNvPr id="14" name="Rectangle 13"/>
           <p:cNvSpPr/>
           <p:nvPr/>
         </p:nvSpPr>
         <p:spPr>
           <a:xfrm>
-            <a:off x="1165860" y="2788920"/>
-            <a:ext cx="914400" cy="914400"/>
-          </a:xfrm>
-          <a:prstGeom prst="ellipse">
+            <a:off x="640080" y="3246120"/>
+            <a:ext cx="100584" cy="841248"/>
+          </a:xfrm>
+          <a:prstGeom prst="rect">
             <a:avLst/>
           </a:prstGeom>
           <a:solidFill>
-            <a:srgbClr val="6D28D9"/>
+            <a:srgbClr val="22D3EE"/>
           </a:solidFill>
           <a:ln>
             <a:noFill/>
@@ -12824,14 +13164,14 @@
       </p:sp>
       <p:sp>
         <p:nvSpPr>
-          <p:cNvPr id="8" name="TextBox 7"/>
-          <p:cNvSpPr txBox="1"/>
-          <p:nvPr/>
-        </p:nvSpPr>
-        <p:spPr>
-          <a:xfrm>
-            <a:off x="1165860" y="2770632"/>
-            <a:ext cx="914400" cy="914400"/>
+          <p:cNvPr id="15" name="TextBox 14"/>
+          <p:cNvSpPr txBox="1"/>
+          <p:nvPr/>
+        </p:nvSpPr>
+        <p:spPr>
+          <a:xfrm>
+            <a:off x="960120" y="3392424"/>
+            <a:ext cx="6583680" cy="548640"/>
           </a:xfrm>
           <a:prstGeom prst="rect">
             <a:avLst/>
@@ -12844,219 +13184,39 @@
           </a:bodyPr>
           <a:lstStyle/>
           <a:p>
-            <a:pPr algn="ctr">
-              <a:lnSpc>
-                <a:spcPct val="100000"/>
-              </a:lnSpc>
-              <a:spcBef>
-                <a:spcPts val="0"/>
-              </a:spcBef>
-              <a:spcAft>
-                <a:spcPts val="0"/>
-              </a:spcAft>
-            </a:pPr>
-            <a:r>
-              <a:rPr sz="3400" b="1" i="0">
-                <a:solidFill>
-                  <a:srgbClr val="FFFFFF"/>
-                </a:solidFill>
-                <a:latin typeface="Segoe UI Emoji"/>
-              </a:rPr>
-              <a:t>📄</a:t>
-            </a:r>
-          </a:p>
-        </p:txBody>
-      </p:sp>
-      <p:sp>
-        <p:nvSpPr>
-          <p:cNvPr id="9" name="TextBox 8"/>
-          <p:cNvSpPr txBox="1"/>
-          <p:nvPr/>
-        </p:nvSpPr>
-        <p:spPr>
-          <a:xfrm>
-            <a:off x="640080" y="3886200"/>
-            <a:ext cx="1965960" cy="457200"/>
-          </a:xfrm>
-          <a:prstGeom prst="rect">
-            <a:avLst/>
-          </a:prstGeom>
-          <a:noFill/>
-        </p:spPr>
-        <p:txBody>
-          <a:bodyPr wrap="square" anchor="t" lIns="0" rIns="0" tIns="0" bIns="0">
-            <a:spAutoFit/>
-          </a:bodyPr>
-          <a:lstStyle/>
-          <a:p>
-            <a:pPr algn="ctr">
-              <a:lnSpc>
-                <a:spcPct val="100000"/>
-              </a:lnSpc>
-              <a:spcBef>
-                <a:spcPts val="0"/>
-              </a:spcBef>
-              <a:spcAft>
-                <a:spcPts val="0"/>
-              </a:spcAft>
-            </a:pPr>
-            <a:r>
-              <a:rPr sz="1550" b="1" i="0">
+            <a:pPr algn="l">
+              <a:lnSpc>
+                <a:spcPct val="100000"/>
+              </a:lnSpc>
+              <a:spcBef>
+                <a:spcPts val="0"/>
+              </a:spcBef>
+              <a:spcAft>
+                <a:spcPts val="0"/>
+              </a:spcAft>
+            </a:pPr>
+            <a:r>
+              <a:rPr sz="1550" b="0" i="0">
                 <a:solidFill>
                   <a:srgbClr val="1E1B2E"/>
                 </a:solidFill>
-                <a:latin typeface="Segoe UI Semibold"/>
-              </a:rPr>
-              <a:t>Documentos</a:t>
-            </a:r>
-          </a:p>
-        </p:txBody>
-      </p:sp>
-      <p:sp>
-        <p:nvSpPr>
-          <p:cNvPr id="10" name="TextBox 9"/>
-          <p:cNvSpPr txBox="1"/>
-          <p:nvPr/>
-        </p:nvSpPr>
-        <p:spPr>
-          <a:xfrm>
-            <a:off x="640080" y="4343400"/>
-            <a:ext cx="1965960" cy="292608"/>
-          </a:xfrm>
-          <a:prstGeom prst="rect">
-            <a:avLst/>
-          </a:prstGeom>
-          <a:noFill/>
-        </p:spPr>
-        <p:txBody>
-          <a:bodyPr wrap="square" anchor="t" lIns="0" rIns="0" tIns="0" bIns="0">
-            <a:spAutoFit/>
-          </a:bodyPr>
-          <a:lstStyle/>
-          <a:p>
-            <a:pPr algn="ctr">
-              <a:lnSpc>
-                <a:spcPct val="100000"/>
-              </a:lnSpc>
-              <a:spcBef>
-                <a:spcPts val="0"/>
-              </a:spcBef>
-              <a:spcAft>
-                <a:spcPts val="0"/>
-              </a:spcAft>
-            </a:pPr>
-            <a:r>
-              <a:rPr sz="1150" b="0" i="0">
-                <a:solidFill>
-                  <a:srgbClr val="6B6682"/>
-                </a:solidFill>
                 <a:latin typeface="Segoe UI"/>
               </a:rPr>
-              <a:t>Fuentes de</a:t>
-            </a:r>
-          </a:p>
-        </p:txBody>
-      </p:sp>
-      <p:sp>
-        <p:nvSpPr>
-          <p:cNvPr id="11" name="TextBox 10"/>
-          <p:cNvSpPr txBox="1"/>
-          <p:nvPr/>
-        </p:nvSpPr>
-        <p:spPr>
-          <a:xfrm>
-            <a:off x="640080" y="4636008"/>
-            <a:ext cx="1965960" cy="292608"/>
-          </a:xfrm>
-          <a:prstGeom prst="rect">
-            <a:avLst/>
-          </a:prstGeom>
-          <a:noFill/>
-        </p:spPr>
-        <p:txBody>
-          <a:bodyPr wrap="square" anchor="t" lIns="0" rIns="0" tIns="0" bIns="0">
-            <a:spAutoFit/>
-          </a:bodyPr>
-          <a:lstStyle/>
-          <a:p>
-            <a:pPr algn="ctr">
-              <a:lnSpc>
-                <a:spcPct val="100000"/>
-              </a:lnSpc>
-              <a:spcBef>
-                <a:spcPts val="0"/>
-              </a:spcBef>
-              <a:spcAft>
-                <a:spcPts val="0"/>
-              </a:spcAft>
-            </a:pPr>
-            <a:r>
-              <a:rPr sz="1150" b="0" i="0">
-                <a:solidFill>
-                  <a:srgbClr val="6B6682"/>
-                </a:solidFill>
-                <a:latin typeface="Segoe UI"/>
-              </a:rPr>
-              <a:t>conocimiento</a:t>
-            </a:r>
-          </a:p>
-        </p:txBody>
-      </p:sp>
-      <p:sp>
-        <p:nvSpPr>
-          <p:cNvPr id="12" name="TextBox 11"/>
-          <p:cNvSpPr txBox="1"/>
-          <p:nvPr/>
-        </p:nvSpPr>
-        <p:spPr>
-          <a:xfrm>
-            <a:off x="2560320" y="3063240"/>
-            <a:ext cx="347472" cy="457200"/>
-          </a:xfrm>
-          <a:prstGeom prst="rect">
-            <a:avLst/>
-          </a:prstGeom>
-          <a:noFill/>
-        </p:spPr>
-        <p:txBody>
-          <a:bodyPr wrap="square" anchor="ctr" lIns="0" rIns="0" tIns="0" bIns="0">
-            <a:spAutoFit/>
-          </a:bodyPr>
-          <a:lstStyle/>
-          <a:p>
-            <a:pPr algn="ctr">
-              <a:lnSpc>
-                <a:spcPct val="100000"/>
-              </a:lnSpc>
-              <a:spcBef>
-                <a:spcPts val="0"/>
-              </a:spcBef>
-              <a:spcAft>
-                <a:spcPts val="0"/>
-              </a:spcAft>
-            </a:pPr>
-            <a:r>
-              <a:rPr sz="2200" b="1" i="0">
-                <a:solidFill>
-                  <a:srgbClr val="8B5CF6"/>
-                </a:solidFill>
-                <a:latin typeface="Segoe UI"/>
-              </a:rPr>
-              <a:t>→</a:t>
-            </a:r>
-          </a:p>
-        </p:txBody>
-      </p:sp>
-      <p:sp>
-        <p:nvSpPr>
-          <p:cNvPr id="13" name="Rounded Rectangle 12"/>
+              <a:t>Recupera contexto relevante antes de responder</a:t>
+            </a:r>
+          </a:p>
+        </p:txBody>
+      </p:sp>
+      <p:sp>
+        <p:nvSpPr>
+          <p:cNvPr id="16" name="Rounded Rectangle 15"/>
           <p:cNvSpPr/>
           <p:nvPr/>
         </p:nvSpPr>
         <p:spPr>
           <a:xfrm>
-            <a:off x="2862072" y="2468880"/>
-            <a:ext cx="1965960" cy="2468880"/>
+            <a:off x="640080" y="4206240"/>
+            <a:ext cx="7086600" cy="841248"/>
           </a:xfrm>
           <a:prstGeom prst="roundRect">
             <a:avLst/>
@@ -13093,20 +13253,20 @@
       </p:sp>
       <p:sp>
         <p:nvSpPr>
-          <p:cNvPr id="14" name="Oval 13"/>
+          <p:cNvPr id="17" name="Rectangle 16"/>
           <p:cNvSpPr/>
           <p:nvPr/>
         </p:nvSpPr>
         <p:spPr>
           <a:xfrm>
-            <a:off x="3387852" y="2788920"/>
-            <a:ext cx="914400" cy="914400"/>
-          </a:xfrm>
-          <a:prstGeom prst="ellipse">
+            <a:off x="640080" y="4206240"/>
+            <a:ext cx="100584" cy="841248"/>
+          </a:xfrm>
+          <a:prstGeom prst="rect">
             <a:avLst/>
           </a:prstGeom>
           <a:solidFill>
-            <a:srgbClr val="FB7185"/>
+            <a:srgbClr val="22D3EE"/>
           </a:solidFill>
           <a:ln>
             <a:noFill/>
@@ -13137,14 +13297,14 @@
       </p:sp>
       <p:sp>
         <p:nvSpPr>
-          <p:cNvPr id="15" name="TextBox 14"/>
-          <p:cNvSpPr txBox="1"/>
-          <p:nvPr/>
-        </p:nvSpPr>
-        <p:spPr>
-          <a:xfrm>
-            <a:off x="3387852" y="2770632"/>
-            <a:ext cx="914400" cy="914400"/>
+          <p:cNvPr id="18" name="TextBox 17"/>
+          <p:cNvSpPr txBox="1"/>
+          <p:nvPr/>
+        </p:nvSpPr>
+        <p:spPr>
+          <a:xfrm>
+            <a:off x="960120" y="4352544"/>
+            <a:ext cx="6583680" cy="548640"/>
           </a:xfrm>
           <a:prstGeom prst="rect">
             <a:avLst/>
@@ -13157,219 +13317,39 @@
           </a:bodyPr>
           <a:lstStyle/>
           <a:p>
-            <a:pPr algn="ctr">
-              <a:lnSpc>
-                <a:spcPct val="100000"/>
-              </a:lnSpc>
-              <a:spcBef>
-                <a:spcPts val="0"/>
-              </a:spcBef>
-              <a:spcAft>
-                <a:spcPts val="0"/>
-              </a:spcAft>
-            </a:pPr>
-            <a:r>
-              <a:rPr sz="3400" b="1" i="0">
-                <a:solidFill>
-                  <a:srgbClr val="FFFFFF"/>
-                </a:solidFill>
-                <a:latin typeface="Segoe UI Emoji"/>
-              </a:rPr>
-              <a:t>✂️</a:t>
-            </a:r>
-          </a:p>
-        </p:txBody>
-      </p:sp>
-      <p:sp>
-        <p:nvSpPr>
-          <p:cNvPr id="16" name="TextBox 15"/>
-          <p:cNvSpPr txBox="1"/>
-          <p:nvPr/>
-        </p:nvSpPr>
-        <p:spPr>
-          <a:xfrm>
-            <a:off x="2862072" y="3886200"/>
-            <a:ext cx="1965960" cy="457200"/>
-          </a:xfrm>
-          <a:prstGeom prst="rect">
-            <a:avLst/>
-          </a:prstGeom>
-          <a:noFill/>
-        </p:spPr>
-        <p:txBody>
-          <a:bodyPr wrap="square" anchor="t" lIns="0" rIns="0" tIns="0" bIns="0">
-            <a:spAutoFit/>
-          </a:bodyPr>
-          <a:lstStyle/>
-          <a:p>
-            <a:pPr algn="ctr">
-              <a:lnSpc>
-                <a:spcPct val="100000"/>
-              </a:lnSpc>
-              <a:spcBef>
-                <a:spcPts val="0"/>
-              </a:spcBef>
-              <a:spcAft>
-                <a:spcPts val="0"/>
-              </a:spcAft>
-            </a:pPr>
-            <a:r>
-              <a:rPr sz="1550" b="1" i="0">
+            <a:pPr algn="l">
+              <a:lnSpc>
+                <a:spcPct val="100000"/>
+              </a:lnSpc>
+              <a:spcBef>
+                <a:spcPts val="0"/>
+              </a:spcBef>
+              <a:spcAft>
+                <a:spcPts val="0"/>
+              </a:spcAft>
+            </a:pPr>
+            <a:r>
+              <a:rPr sz="1550" b="0" i="0">
                 <a:solidFill>
                   <a:srgbClr val="1E1B2E"/>
                 </a:solidFill>
-                <a:latin typeface="Segoe UI Semibold"/>
-              </a:rPr>
-              <a:t>Chunks</a:t>
-            </a:r>
-          </a:p>
-        </p:txBody>
-      </p:sp>
-      <p:sp>
-        <p:nvSpPr>
-          <p:cNvPr id="17" name="TextBox 16"/>
-          <p:cNvSpPr txBox="1"/>
-          <p:nvPr/>
-        </p:nvSpPr>
-        <p:spPr>
-          <a:xfrm>
-            <a:off x="2862072" y="4343400"/>
-            <a:ext cx="1965960" cy="292608"/>
-          </a:xfrm>
-          <a:prstGeom prst="rect">
-            <a:avLst/>
-          </a:prstGeom>
-          <a:noFill/>
-        </p:spPr>
-        <p:txBody>
-          <a:bodyPr wrap="square" anchor="t" lIns="0" rIns="0" tIns="0" bIns="0">
-            <a:spAutoFit/>
-          </a:bodyPr>
-          <a:lstStyle/>
-          <a:p>
-            <a:pPr algn="ctr">
-              <a:lnSpc>
-                <a:spcPct val="100000"/>
-              </a:lnSpc>
-              <a:spcBef>
-                <a:spcPts val="0"/>
-              </a:spcBef>
-              <a:spcAft>
-                <a:spcPts val="0"/>
-              </a:spcAft>
-            </a:pPr>
-            <a:r>
-              <a:rPr sz="1150" b="0" i="0">
-                <a:solidFill>
-                  <a:srgbClr val="6B6682"/>
-                </a:solidFill>
                 <a:latin typeface="Segoe UI"/>
               </a:rPr>
-              <a:t>Fragmentos</a:t>
-            </a:r>
-          </a:p>
-        </p:txBody>
-      </p:sp>
-      <p:sp>
-        <p:nvSpPr>
-          <p:cNvPr id="18" name="TextBox 17"/>
-          <p:cNvSpPr txBox="1"/>
-          <p:nvPr/>
-        </p:nvSpPr>
-        <p:spPr>
-          <a:xfrm>
-            <a:off x="2862072" y="4636008"/>
-            <a:ext cx="1965960" cy="292608"/>
-          </a:xfrm>
-          <a:prstGeom prst="rect">
-            <a:avLst/>
-          </a:prstGeom>
-          <a:noFill/>
-        </p:spPr>
-        <p:txBody>
-          <a:bodyPr wrap="square" anchor="t" lIns="0" rIns="0" tIns="0" bIns="0">
-            <a:spAutoFit/>
-          </a:bodyPr>
-          <a:lstStyle/>
-          <a:p>
-            <a:pPr algn="ctr">
-              <a:lnSpc>
-                <a:spcPct val="100000"/>
-              </a:lnSpc>
-              <a:spcBef>
-                <a:spcPts val="0"/>
-              </a:spcBef>
-              <a:spcAft>
-                <a:spcPts val="0"/>
-              </a:spcAft>
-            </a:pPr>
-            <a:r>
-              <a:rPr sz="1150" b="0" i="0">
-                <a:solidFill>
-                  <a:srgbClr val="6B6682"/>
-                </a:solidFill>
-                <a:latin typeface="Segoe UI"/>
-              </a:rPr>
-              <a:t>manejables</a:t>
-            </a:r>
-          </a:p>
-        </p:txBody>
-      </p:sp>
-      <p:sp>
-        <p:nvSpPr>
-          <p:cNvPr id="19" name="TextBox 18"/>
-          <p:cNvSpPr txBox="1"/>
-          <p:nvPr/>
-        </p:nvSpPr>
-        <p:spPr>
-          <a:xfrm>
-            <a:off x="4782312" y="3063240"/>
-            <a:ext cx="347472" cy="457200"/>
-          </a:xfrm>
-          <a:prstGeom prst="rect">
-            <a:avLst/>
-          </a:prstGeom>
-          <a:noFill/>
-        </p:spPr>
-        <p:txBody>
-          <a:bodyPr wrap="square" anchor="ctr" lIns="0" rIns="0" tIns="0" bIns="0">
-            <a:spAutoFit/>
-          </a:bodyPr>
-          <a:lstStyle/>
-          <a:p>
-            <a:pPr algn="ctr">
-              <a:lnSpc>
-                <a:spcPct val="100000"/>
-              </a:lnSpc>
-              <a:spcBef>
-                <a:spcPts val="0"/>
-              </a:spcBef>
-              <a:spcAft>
-                <a:spcPts val="0"/>
-              </a:spcAft>
-            </a:pPr>
-            <a:r>
-              <a:rPr sz="2200" b="1" i="0">
-                <a:solidFill>
-                  <a:srgbClr val="8B5CF6"/>
-                </a:solidFill>
-                <a:latin typeface="Segoe UI"/>
-              </a:rPr>
-              <a:t>→</a:t>
-            </a:r>
-          </a:p>
-        </p:txBody>
-      </p:sp>
-      <p:sp>
-        <p:nvSpPr>
-          <p:cNvPr id="20" name="Rounded Rectangle 19"/>
+              <a:t>Combina búsqueda + generación de texto</a:t>
+            </a:r>
+          </a:p>
+        </p:txBody>
+      </p:sp>
+      <p:sp>
+        <p:nvSpPr>
+          <p:cNvPr id="19" name="Rounded Rectangle 18"/>
           <p:cNvSpPr/>
           <p:nvPr/>
         </p:nvSpPr>
         <p:spPr>
           <a:xfrm>
-            <a:off x="5084064" y="2468880"/>
-            <a:ext cx="1965960" cy="2468880"/>
+            <a:off x="640080" y="5166359"/>
+            <a:ext cx="7086600" cy="841248"/>
           </a:xfrm>
           <a:prstGeom prst="roundRect">
             <a:avLst/>
@@ -13406,329 +13386,16 @@
       </p:sp>
       <p:sp>
         <p:nvSpPr>
-          <p:cNvPr id="21" name="Oval 20"/>
+          <p:cNvPr id="20" name="Rectangle 19"/>
           <p:cNvSpPr/>
           <p:nvPr/>
         </p:nvSpPr>
         <p:spPr>
           <a:xfrm>
-            <a:off x="5609844" y="2788920"/>
-            <a:ext cx="914400" cy="914400"/>
-          </a:xfrm>
-          <a:prstGeom prst="ellipse">
-            <a:avLst/>
-          </a:prstGeom>
-          <a:solidFill>
-            <a:srgbClr val="FBBF24"/>
-          </a:solidFill>
-          <a:ln>
-            <a:noFill/>
-          </a:ln>
-          <a:effectLst/>
-        </p:spPr>
-        <p:style>
-          <a:lnRef idx="1">
-            <a:schemeClr val="accent1"/>
-          </a:lnRef>
-          <a:fillRef idx="3">
-            <a:schemeClr val="accent1"/>
-          </a:fillRef>
-          <a:effectRef idx="2">
-            <a:schemeClr val="accent1"/>
-          </a:effectRef>
-          <a:fontRef idx="minor">
-            <a:schemeClr val="lt1"/>
-          </a:fontRef>
-        </p:style>
-        <p:txBody>
-          <a:bodyPr rtlCol="0" anchor="ctr"/>
-          <a:lstStyle/>
-          <a:p>
-            <a:pPr algn="ctr"/>
-          </a:p>
-        </p:txBody>
-      </p:sp>
-      <p:sp>
-        <p:nvSpPr>
-          <p:cNvPr id="22" name="TextBox 21"/>
-          <p:cNvSpPr txBox="1"/>
-          <p:nvPr/>
-        </p:nvSpPr>
-        <p:spPr>
-          <a:xfrm>
-            <a:off x="5609844" y="2770632"/>
-            <a:ext cx="914400" cy="914400"/>
-          </a:xfrm>
-          <a:prstGeom prst="rect">
-            <a:avLst/>
-          </a:prstGeom>
-          <a:noFill/>
-        </p:spPr>
-        <p:txBody>
-          <a:bodyPr wrap="square" anchor="ctr" lIns="0" rIns="0" tIns="0" bIns="0">
-            <a:spAutoFit/>
-          </a:bodyPr>
-          <a:lstStyle/>
-          <a:p>
-            <a:pPr algn="ctr">
-              <a:lnSpc>
-                <a:spcPct val="100000"/>
-              </a:lnSpc>
-              <a:spcBef>
-                <a:spcPts val="0"/>
-              </a:spcBef>
-              <a:spcAft>
-                <a:spcPts val="0"/>
-              </a:spcAft>
-            </a:pPr>
-            <a:r>
-              <a:rPr sz="3400" b="1" i="0">
-                <a:solidFill>
-                  <a:srgbClr val="FFFFFF"/>
-                </a:solidFill>
-                <a:latin typeface="Segoe UI Emoji"/>
-              </a:rPr>
-              <a:t>🔢</a:t>
-            </a:r>
-          </a:p>
-        </p:txBody>
-      </p:sp>
-      <p:sp>
-        <p:nvSpPr>
-          <p:cNvPr id="23" name="TextBox 22"/>
-          <p:cNvSpPr txBox="1"/>
-          <p:nvPr/>
-        </p:nvSpPr>
-        <p:spPr>
-          <a:xfrm>
-            <a:off x="5084064" y="3886200"/>
-            <a:ext cx="1965960" cy="457200"/>
-          </a:xfrm>
-          <a:prstGeom prst="rect">
-            <a:avLst/>
-          </a:prstGeom>
-          <a:noFill/>
-        </p:spPr>
-        <p:txBody>
-          <a:bodyPr wrap="square" anchor="t" lIns="0" rIns="0" tIns="0" bIns="0">
-            <a:spAutoFit/>
-          </a:bodyPr>
-          <a:lstStyle/>
-          <a:p>
-            <a:pPr algn="ctr">
-              <a:lnSpc>
-                <a:spcPct val="100000"/>
-              </a:lnSpc>
-              <a:spcBef>
-                <a:spcPts val="0"/>
-              </a:spcBef>
-              <a:spcAft>
-                <a:spcPts val="0"/>
-              </a:spcAft>
-            </a:pPr>
-            <a:r>
-              <a:rPr sz="1550" b="1" i="0">
-                <a:solidFill>
-                  <a:srgbClr val="1E1B2E"/>
-                </a:solidFill>
-                <a:latin typeface="Segoe UI Semibold"/>
-              </a:rPr>
-              <a:t>Embeddings</a:t>
-            </a:r>
-          </a:p>
-        </p:txBody>
-      </p:sp>
-      <p:sp>
-        <p:nvSpPr>
-          <p:cNvPr id="24" name="TextBox 23"/>
-          <p:cNvSpPr txBox="1"/>
-          <p:nvPr/>
-        </p:nvSpPr>
-        <p:spPr>
-          <a:xfrm>
-            <a:off x="5084064" y="4343400"/>
-            <a:ext cx="1965960" cy="292608"/>
-          </a:xfrm>
-          <a:prstGeom prst="rect">
-            <a:avLst/>
-          </a:prstGeom>
-          <a:noFill/>
-        </p:spPr>
-        <p:txBody>
-          <a:bodyPr wrap="square" anchor="t" lIns="0" rIns="0" tIns="0" bIns="0">
-            <a:spAutoFit/>
-          </a:bodyPr>
-          <a:lstStyle/>
-          <a:p>
-            <a:pPr algn="ctr">
-              <a:lnSpc>
-                <a:spcPct val="100000"/>
-              </a:lnSpc>
-              <a:spcBef>
-                <a:spcPts val="0"/>
-              </a:spcBef>
-              <a:spcAft>
-                <a:spcPts val="0"/>
-              </a:spcAft>
-            </a:pPr>
-            <a:r>
-              <a:rPr sz="1150" b="0" i="0">
-                <a:solidFill>
-                  <a:srgbClr val="6B6682"/>
-                </a:solidFill>
-                <a:latin typeface="Segoe UI"/>
-              </a:rPr>
-              <a:t>Vectores</a:t>
-            </a:r>
-          </a:p>
-        </p:txBody>
-      </p:sp>
-      <p:sp>
-        <p:nvSpPr>
-          <p:cNvPr id="25" name="TextBox 24"/>
-          <p:cNvSpPr txBox="1"/>
-          <p:nvPr/>
-        </p:nvSpPr>
-        <p:spPr>
-          <a:xfrm>
-            <a:off x="5084064" y="4636008"/>
-            <a:ext cx="1965960" cy="292608"/>
-          </a:xfrm>
-          <a:prstGeom prst="rect">
-            <a:avLst/>
-          </a:prstGeom>
-          <a:noFill/>
-        </p:spPr>
-        <p:txBody>
-          <a:bodyPr wrap="square" anchor="t" lIns="0" rIns="0" tIns="0" bIns="0">
-            <a:spAutoFit/>
-          </a:bodyPr>
-          <a:lstStyle/>
-          <a:p>
-            <a:pPr algn="ctr">
-              <a:lnSpc>
-                <a:spcPct val="100000"/>
-              </a:lnSpc>
-              <a:spcBef>
-                <a:spcPts val="0"/>
-              </a:spcBef>
-              <a:spcAft>
-                <a:spcPts val="0"/>
-              </a:spcAft>
-            </a:pPr>
-            <a:r>
-              <a:rPr sz="1150" b="0" i="0">
-                <a:solidFill>
-                  <a:srgbClr val="6B6682"/>
-                </a:solidFill>
-                <a:latin typeface="Segoe UI"/>
-              </a:rPr>
-              <a:t>numéricos</a:t>
-            </a:r>
-          </a:p>
-        </p:txBody>
-      </p:sp>
-      <p:sp>
-        <p:nvSpPr>
-          <p:cNvPr id="26" name="TextBox 25"/>
-          <p:cNvSpPr txBox="1"/>
-          <p:nvPr/>
-        </p:nvSpPr>
-        <p:spPr>
-          <a:xfrm>
-            <a:off x="7004303" y="3063240"/>
-            <a:ext cx="347472" cy="457200"/>
-          </a:xfrm>
-          <a:prstGeom prst="rect">
-            <a:avLst/>
-          </a:prstGeom>
-          <a:noFill/>
-        </p:spPr>
-        <p:txBody>
-          <a:bodyPr wrap="square" anchor="ctr" lIns="0" rIns="0" tIns="0" bIns="0">
-            <a:spAutoFit/>
-          </a:bodyPr>
-          <a:lstStyle/>
-          <a:p>
-            <a:pPr algn="ctr">
-              <a:lnSpc>
-                <a:spcPct val="100000"/>
-              </a:lnSpc>
-              <a:spcBef>
-                <a:spcPts val="0"/>
-              </a:spcBef>
-              <a:spcAft>
-                <a:spcPts val="0"/>
-              </a:spcAft>
-            </a:pPr>
-            <a:r>
-              <a:rPr sz="2200" b="1" i="0">
-                <a:solidFill>
-                  <a:srgbClr val="8B5CF6"/>
-                </a:solidFill>
-                <a:latin typeface="Segoe UI"/>
-              </a:rPr>
-              <a:t>→</a:t>
-            </a:r>
-          </a:p>
-        </p:txBody>
-      </p:sp>
-      <p:sp>
-        <p:nvSpPr>
-          <p:cNvPr id="27" name="Rounded Rectangle 26"/>
-          <p:cNvSpPr/>
-          <p:nvPr/>
-        </p:nvSpPr>
-        <p:spPr>
-          <a:xfrm>
-            <a:off x="7306055" y="2468880"/>
-            <a:ext cx="1965960" cy="2468880"/>
-          </a:xfrm>
-          <a:prstGeom prst="roundRect">
-            <a:avLst/>
-          </a:prstGeom>
-          <a:solidFill>
-            <a:srgbClr val="FFFFFF"/>
-          </a:solidFill>
-          <a:ln>
-            <a:noFill/>
-          </a:ln>
-          <a:effectLst/>
-        </p:spPr>
-        <p:style>
-          <a:lnRef idx="1">
-            <a:schemeClr val="accent1"/>
-          </a:lnRef>
-          <a:fillRef idx="3">
-            <a:schemeClr val="accent1"/>
-          </a:fillRef>
-          <a:effectRef idx="2">
-            <a:schemeClr val="accent1"/>
-          </a:effectRef>
-          <a:fontRef idx="minor">
-            <a:schemeClr val="lt1"/>
-          </a:fontRef>
-        </p:style>
-        <p:txBody>
-          <a:bodyPr rtlCol="0" anchor="ctr"/>
-          <a:lstStyle/>
-          <a:p>
-            <a:pPr algn="ctr"/>
-          </a:p>
-        </p:txBody>
-      </p:sp>
-      <p:sp>
-        <p:nvSpPr>
-          <p:cNvPr id="28" name="Oval 27"/>
-          <p:cNvSpPr/>
-          <p:nvPr/>
-        </p:nvSpPr>
-        <p:spPr>
-          <a:xfrm>
-            <a:off x="7831836" y="2788920"/>
-            <a:ext cx="914400" cy="914400"/>
-          </a:xfrm>
-          <a:prstGeom prst="ellipse">
+            <a:off x="640080" y="5166359"/>
+            <a:ext cx="100584" cy="841248"/>
+          </a:xfrm>
+          <a:prstGeom prst="rect">
             <a:avLst/>
           </a:prstGeom>
           <a:solidFill>
@@ -13763,14 +13430,14 @@
       </p:sp>
       <p:sp>
         <p:nvSpPr>
-          <p:cNvPr id="29" name="TextBox 28"/>
-          <p:cNvSpPr txBox="1"/>
-          <p:nvPr/>
-        </p:nvSpPr>
-        <p:spPr>
-          <a:xfrm>
-            <a:off x="7831836" y="2770632"/>
-            <a:ext cx="914400" cy="914400"/>
+          <p:cNvPr id="21" name="TextBox 20"/>
+          <p:cNvSpPr txBox="1"/>
+          <p:nvPr/>
+        </p:nvSpPr>
+        <p:spPr>
+          <a:xfrm>
+            <a:off x="960120" y="5312664"/>
+            <a:ext cx="6583680" cy="548640"/>
           </a:xfrm>
           <a:prstGeom prst="rect">
             <a:avLst/>
@@ -13783,480 +13450,32 @@
           </a:bodyPr>
           <a:lstStyle/>
           <a:p>
-            <a:pPr algn="ctr">
-              <a:lnSpc>
-                <a:spcPct val="100000"/>
-              </a:lnSpc>
-              <a:spcBef>
-                <a:spcPts val="0"/>
-              </a:spcBef>
-              <a:spcAft>
-                <a:spcPts val="0"/>
-              </a:spcAft>
-            </a:pPr>
-            <a:r>
-              <a:rPr sz="3400" b="1" i="0">
-                <a:solidFill>
-                  <a:srgbClr val="FFFFFF"/>
-                </a:solidFill>
-                <a:latin typeface="Segoe UI Emoji"/>
-              </a:rPr>
-              <a:t>🗄️</a:t>
-            </a:r>
-          </a:p>
-        </p:txBody>
-      </p:sp>
-      <p:sp>
-        <p:nvSpPr>
-          <p:cNvPr id="30" name="TextBox 29"/>
-          <p:cNvSpPr txBox="1"/>
-          <p:nvPr/>
-        </p:nvSpPr>
-        <p:spPr>
-          <a:xfrm>
-            <a:off x="7306055" y="3886200"/>
-            <a:ext cx="1965960" cy="457200"/>
-          </a:xfrm>
-          <a:prstGeom prst="rect">
-            <a:avLst/>
-          </a:prstGeom>
-          <a:noFill/>
-        </p:spPr>
-        <p:txBody>
-          <a:bodyPr wrap="square" anchor="t" lIns="0" rIns="0" tIns="0" bIns="0">
-            <a:spAutoFit/>
-          </a:bodyPr>
-          <a:lstStyle/>
-          <a:p>
-            <a:pPr algn="ctr">
-              <a:lnSpc>
-                <a:spcPct val="100000"/>
-              </a:lnSpc>
-              <a:spcBef>
-                <a:spcPts val="0"/>
-              </a:spcBef>
-              <a:spcAft>
-                <a:spcPts val="0"/>
-              </a:spcAft>
-            </a:pPr>
-            <a:r>
-              <a:rPr sz="1550" b="1" i="0">
+            <a:pPr algn="l">
+              <a:lnSpc>
+                <a:spcPct val="100000"/>
+              </a:lnSpc>
+              <a:spcBef>
+                <a:spcPts val="0"/>
+              </a:spcBef>
+              <a:spcAft>
+                <a:spcPts val="0"/>
+              </a:spcAft>
+            </a:pPr>
+            <a:r>
+              <a:rPr sz="1550" b="0" i="0">
                 <a:solidFill>
                   <a:srgbClr val="1E1B2E"/>
                 </a:solidFill>
-                <a:latin typeface="Segoe UI Semibold"/>
-              </a:rPr>
-              <a:t>Vector store</a:t>
-            </a:r>
-          </a:p>
-        </p:txBody>
-      </p:sp>
-      <p:sp>
-        <p:nvSpPr>
-          <p:cNvPr id="31" name="TextBox 30"/>
-          <p:cNvSpPr txBox="1"/>
-          <p:nvPr/>
-        </p:nvSpPr>
-        <p:spPr>
-          <a:xfrm>
-            <a:off x="7306055" y="4343400"/>
-            <a:ext cx="1965960" cy="292608"/>
-          </a:xfrm>
-          <a:prstGeom prst="rect">
-            <a:avLst/>
-          </a:prstGeom>
-          <a:noFill/>
-        </p:spPr>
-        <p:txBody>
-          <a:bodyPr wrap="square" anchor="t" lIns="0" rIns="0" tIns="0" bIns="0">
-            <a:spAutoFit/>
-          </a:bodyPr>
-          <a:lstStyle/>
-          <a:p>
-            <a:pPr algn="ctr">
-              <a:lnSpc>
-                <a:spcPct val="100000"/>
-              </a:lnSpc>
-              <a:spcBef>
-                <a:spcPts val="0"/>
-              </a:spcBef>
-              <a:spcAft>
-                <a:spcPts val="0"/>
-              </a:spcAft>
-            </a:pPr>
-            <a:r>
-              <a:rPr sz="1150" b="0" i="0">
-                <a:solidFill>
-                  <a:srgbClr val="6B6682"/>
-                </a:solidFill>
                 <a:latin typeface="Segoe UI"/>
               </a:rPr>
-              <a:t>Búsqueda por</a:t>
-            </a:r>
-          </a:p>
-        </p:txBody>
-      </p:sp>
-      <p:sp>
-        <p:nvSpPr>
-          <p:cNvPr id="32" name="TextBox 31"/>
-          <p:cNvSpPr txBox="1"/>
-          <p:nvPr/>
-        </p:nvSpPr>
-        <p:spPr>
-          <a:xfrm>
-            <a:off x="7306055" y="4636008"/>
-            <a:ext cx="1965960" cy="292608"/>
-          </a:xfrm>
-          <a:prstGeom prst="rect">
-            <a:avLst/>
-          </a:prstGeom>
-          <a:noFill/>
-        </p:spPr>
-        <p:txBody>
-          <a:bodyPr wrap="square" anchor="t" lIns="0" rIns="0" tIns="0" bIns="0">
-            <a:spAutoFit/>
-          </a:bodyPr>
-          <a:lstStyle/>
-          <a:p>
-            <a:pPr algn="ctr">
-              <a:lnSpc>
-                <a:spcPct val="100000"/>
-              </a:lnSpc>
-              <a:spcBef>
-                <a:spcPts val="0"/>
-              </a:spcBef>
-              <a:spcAft>
-                <a:spcPts val="0"/>
-              </a:spcAft>
-            </a:pPr>
-            <a:r>
-              <a:rPr sz="1150" b="0" i="0">
-                <a:solidFill>
-                  <a:srgbClr val="6B6682"/>
-                </a:solidFill>
-                <a:latin typeface="Segoe UI"/>
-              </a:rPr>
-              <a:t>similitud</a:t>
-            </a:r>
-          </a:p>
-        </p:txBody>
-      </p:sp>
-      <p:sp>
-        <p:nvSpPr>
-          <p:cNvPr id="33" name="TextBox 32"/>
-          <p:cNvSpPr txBox="1"/>
-          <p:nvPr/>
-        </p:nvSpPr>
-        <p:spPr>
-          <a:xfrm>
-            <a:off x="9226295" y="3063240"/>
-            <a:ext cx="347472" cy="457200"/>
-          </a:xfrm>
-          <a:prstGeom prst="rect">
-            <a:avLst/>
-          </a:prstGeom>
-          <a:noFill/>
-        </p:spPr>
-        <p:txBody>
-          <a:bodyPr wrap="square" anchor="ctr" lIns="0" rIns="0" tIns="0" bIns="0">
-            <a:spAutoFit/>
-          </a:bodyPr>
-          <a:lstStyle/>
-          <a:p>
-            <a:pPr algn="ctr">
-              <a:lnSpc>
-                <a:spcPct val="100000"/>
-              </a:lnSpc>
-              <a:spcBef>
-                <a:spcPts val="0"/>
-              </a:spcBef>
-              <a:spcAft>
-                <a:spcPts val="0"/>
-              </a:spcAft>
-            </a:pPr>
-            <a:r>
-              <a:rPr sz="2200" b="1" i="0">
-                <a:solidFill>
-                  <a:srgbClr val="8B5CF6"/>
-                </a:solidFill>
-                <a:latin typeface="Segoe UI"/>
-              </a:rPr>
-              <a:t>→</a:t>
-            </a:r>
-          </a:p>
-        </p:txBody>
-      </p:sp>
-      <p:sp>
-        <p:nvSpPr>
-          <p:cNvPr id="34" name="Rounded Rectangle 33"/>
-          <p:cNvSpPr/>
-          <p:nvPr/>
-        </p:nvSpPr>
-        <p:spPr>
-          <a:xfrm>
-            <a:off x="9528047" y="2468880"/>
-            <a:ext cx="1965960" cy="2468880"/>
-          </a:xfrm>
-          <a:prstGeom prst="roundRect">
-            <a:avLst/>
-          </a:prstGeom>
-          <a:solidFill>
-            <a:srgbClr val="FFFFFF"/>
-          </a:solidFill>
-          <a:ln>
-            <a:noFill/>
-          </a:ln>
-          <a:effectLst/>
-        </p:spPr>
-        <p:style>
-          <a:lnRef idx="1">
-            <a:schemeClr val="accent1"/>
-          </a:lnRef>
-          <a:fillRef idx="3">
-            <a:schemeClr val="accent1"/>
-          </a:fillRef>
-          <a:effectRef idx="2">
-            <a:schemeClr val="accent1"/>
-          </a:effectRef>
-          <a:fontRef idx="minor">
-            <a:schemeClr val="lt1"/>
-          </a:fontRef>
-        </p:style>
-        <p:txBody>
-          <a:bodyPr rtlCol="0" anchor="ctr"/>
-          <a:lstStyle/>
-          <a:p>
-            <a:pPr algn="ctr"/>
-          </a:p>
-        </p:txBody>
-      </p:sp>
-      <p:sp>
-        <p:nvSpPr>
-          <p:cNvPr id="35" name="Oval 34"/>
-          <p:cNvSpPr/>
-          <p:nvPr/>
-        </p:nvSpPr>
-        <p:spPr>
-          <a:xfrm>
-            <a:off x="10053827" y="2788920"/>
-            <a:ext cx="914400" cy="914400"/>
-          </a:xfrm>
-          <a:prstGeom prst="ellipse">
-            <a:avLst/>
-          </a:prstGeom>
-          <a:solidFill>
-            <a:srgbClr val="8B5CF6"/>
-          </a:solidFill>
-          <a:ln>
-            <a:noFill/>
-          </a:ln>
-          <a:effectLst/>
-        </p:spPr>
-        <p:style>
-          <a:lnRef idx="1">
-            <a:schemeClr val="accent1"/>
-          </a:lnRef>
-          <a:fillRef idx="3">
-            <a:schemeClr val="accent1"/>
-          </a:fillRef>
-          <a:effectRef idx="2">
-            <a:schemeClr val="accent1"/>
-          </a:effectRef>
-          <a:fontRef idx="minor">
-            <a:schemeClr val="lt1"/>
-          </a:fontRef>
-        </p:style>
-        <p:txBody>
-          <a:bodyPr rtlCol="0" anchor="ctr"/>
-          <a:lstStyle/>
-          <a:p>
-            <a:pPr algn="ctr"/>
-          </a:p>
-        </p:txBody>
-      </p:sp>
-      <p:sp>
-        <p:nvSpPr>
-          <p:cNvPr id="36" name="TextBox 35"/>
-          <p:cNvSpPr txBox="1"/>
-          <p:nvPr/>
-        </p:nvSpPr>
-        <p:spPr>
-          <a:xfrm>
-            <a:off x="10053827" y="2770632"/>
-            <a:ext cx="914400" cy="914400"/>
-          </a:xfrm>
-          <a:prstGeom prst="rect">
-            <a:avLst/>
-          </a:prstGeom>
-          <a:noFill/>
-        </p:spPr>
-        <p:txBody>
-          <a:bodyPr wrap="square" anchor="ctr" lIns="0" rIns="0" tIns="0" bIns="0">
-            <a:spAutoFit/>
-          </a:bodyPr>
-          <a:lstStyle/>
-          <a:p>
-            <a:pPr algn="ctr">
-              <a:lnSpc>
-                <a:spcPct val="100000"/>
-              </a:lnSpc>
-              <a:spcBef>
-                <a:spcPts val="0"/>
-              </a:spcBef>
-              <a:spcAft>
-                <a:spcPts val="0"/>
-              </a:spcAft>
-            </a:pPr>
-            <a:r>
-              <a:rPr sz="3400" b="1" i="0">
-                <a:solidFill>
-                  <a:srgbClr val="FFFFFF"/>
-                </a:solidFill>
-                <a:latin typeface="Segoe UI Emoji"/>
-              </a:rPr>
-              <a:t>🤖</a:t>
-            </a:r>
-          </a:p>
-        </p:txBody>
-      </p:sp>
-      <p:sp>
-        <p:nvSpPr>
-          <p:cNvPr id="37" name="TextBox 36"/>
-          <p:cNvSpPr txBox="1"/>
-          <p:nvPr/>
-        </p:nvSpPr>
-        <p:spPr>
-          <a:xfrm>
-            <a:off x="9528047" y="3886200"/>
-            <a:ext cx="1965960" cy="457200"/>
-          </a:xfrm>
-          <a:prstGeom prst="rect">
-            <a:avLst/>
-          </a:prstGeom>
-          <a:noFill/>
-        </p:spPr>
-        <p:txBody>
-          <a:bodyPr wrap="square" anchor="t" lIns="0" rIns="0" tIns="0" bIns="0">
-            <a:spAutoFit/>
-          </a:bodyPr>
-          <a:lstStyle/>
-          <a:p>
-            <a:pPr algn="ctr">
-              <a:lnSpc>
-                <a:spcPct val="100000"/>
-              </a:lnSpc>
-              <a:spcBef>
-                <a:spcPts val="0"/>
-              </a:spcBef>
-              <a:spcAft>
-                <a:spcPts val="0"/>
-              </a:spcAft>
-            </a:pPr>
-            <a:r>
-              <a:rPr sz="1550" b="1" i="0">
-                <a:solidFill>
-                  <a:srgbClr val="1E1B2E"/>
-                </a:solidFill>
-                <a:latin typeface="Segoe UI Semibold"/>
-              </a:rPr>
-              <a:t>LLM + contexto</a:t>
-            </a:r>
-          </a:p>
-        </p:txBody>
-      </p:sp>
-      <p:sp>
-        <p:nvSpPr>
-          <p:cNvPr id="38" name="TextBox 37"/>
-          <p:cNvSpPr txBox="1"/>
-          <p:nvPr/>
-        </p:nvSpPr>
-        <p:spPr>
-          <a:xfrm>
-            <a:off x="9528047" y="4343400"/>
-            <a:ext cx="1965960" cy="292608"/>
-          </a:xfrm>
-          <a:prstGeom prst="rect">
-            <a:avLst/>
-          </a:prstGeom>
-          <a:noFill/>
-        </p:spPr>
-        <p:txBody>
-          <a:bodyPr wrap="square" anchor="t" lIns="0" rIns="0" tIns="0" bIns="0">
-            <a:spAutoFit/>
-          </a:bodyPr>
-          <a:lstStyle/>
-          <a:p>
-            <a:pPr algn="ctr">
-              <a:lnSpc>
-                <a:spcPct val="100000"/>
-              </a:lnSpc>
-              <a:spcBef>
-                <a:spcPts val="0"/>
-              </a:spcBef>
-              <a:spcAft>
-                <a:spcPts val="0"/>
-              </a:spcAft>
-            </a:pPr>
-            <a:r>
-              <a:rPr sz="1150" b="0" i="0">
-                <a:solidFill>
-                  <a:srgbClr val="6B6682"/>
-                </a:solidFill>
-                <a:latin typeface="Segoe UI"/>
-              </a:rPr>
-              <a:t>Respuesta</a:t>
-            </a:r>
-          </a:p>
-        </p:txBody>
-      </p:sp>
-      <p:sp>
-        <p:nvSpPr>
-          <p:cNvPr id="39" name="TextBox 38"/>
-          <p:cNvSpPr txBox="1"/>
-          <p:nvPr/>
-        </p:nvSpPr>
-        <p:spPr>
-          <a:xfrm>
-            <a:off x="9528047" y="4636008"/>
-            <a:ext cx="1965960" cy="292608"/>
-          </a:xfrm>
-          <a:prstGeom prst="rect">
-            <a:avLst/>
-          </a:prstGeom>
-          <a:noFill/>
-        </p:spPr>
-        <p:txBody>
-          <a:bodyPr wrap="square" anchor="t" lIns="0" rIns="0" tIns="0" bIns="0">
-            <a:spAutoFit/>
-          </a:bodyPr>
-          <a:lstStyle/>
-          <a:p>
-            <a:pPr algn="ctr">
-              <a:lnSpc>
-                <a:spcPct val="100000"/>
-              </a:lnSpc>
-              <a:spcBef>
-                <a:spcPts val="0"/>
-              </a:spcBef>
-              <a:spcAft>
-                <a:spcPts val="0"/>
-              </a:spcAft>
-            </a:pPr>
-            <a:r>
-              <a:rPr sz="1150" b="0" i="0">
-                <a:solidFill>
-                  <a:srgbClr val="6B6682"/>
-                </a:solidFill>
-                <a:latin typeface="Segoe UI"/>
-              </a:rPr>
-              <a:t>fundamentada</a:t>
-            </a:r>
-          </a:p>
-        </p:txBody>
-      </p:sp>
-      <p:sp>
-        <p:nvSpPr>
-          <p:cNvPr id="40" name="TextBox 39"/>
+              <a:t>Reduce alucinaciones y mejora la precisión</a:t>
+            </a:r>
+          </a:p>
+        </p:txBody>
+      </p:sp>
+      <p:sp>
+        <p:nvSpPr>
+          <p:cNvPr id="22" name="TextBox 21"/>
           <p:cNvSpPr txBox="1"/>
           <p:nvPr/>
         </p:nvSpPr>
@@ -14301,7 +13520,7 @@
       </p:sp>
       <p:sp>
         <p:nvSpPr>
-          <p:cNvPr id="41" name="TextBox 40"/>
+          <p:cNvPr id="23" name="TextBox 22"/>
           <p:cNvSpPr txBox="1"/>
           <p:nvPr/>
         </p:nvSpPr>
@@ -14467,7 +13686,7 @@
         <p:spPr>
           <a:xfrm>
             <a:off x="777240" y="274320"/>
-            <a:ext cx="10972800" cy="731520"/>
+            <a:ext cx="10058400" cy="731520"/>
           </a:xfrm>
           <a:prstGeom prst="rect">
             <a:avLst/>
@@ -14498,7 +13717,7 @@
                 </a:solidFill>
                 <a:latin typeface="Segoe UI Semibold"/>
               </a:rPr>
-              <a:t>¿Cómo se mide la similitud?</a:t>
+              <a:t>Componentes de RAG</a:t>
             </a:r>
           </a:p>
         </p:txBody>
@@ -14512,7 +13731,7 @@
         <p:spPr>
           <a:xfrm>
             <a:off x="822960" y="850392"/>
-            <a:ext cx="10972800" cy="365760"/>
+            <a:ext cx="10058400" cy="365760"/>
           </a:xfrm>
           <a:prstGeom prst="rect">
             <a:avLst/>
@@ -14543,7 +13762,7 @@
                 </a:solidFill>
                 <a:latin typeface="Segoe UI"/>
               </a:rPr>
-              <a:t>Comparar dos embeddings (vectores) para encontrar el más parecido</a:t>
+              <a:t>El pipeline que convierte documentos en respuestas</a:t>
             </a:r>
           </a:p>
         </p:txBody>
@@ -14556,8 +13775,8 @@
         </p:nvSpPr>
         <p:spPr>
           <a:xfrm>
-            <a:off x="777240" y="1600200"/>
-            <a:ext cx="3383280" cy="4480560"/>
+            <a:off x="640080" y="2468880"/>
+            <a:ext cx="1965960" cy="2468880"/>
           </a:xfrm>
           <a:prstGeom prst="roundRect">
             <a:avLst/>
@@ -14594,16 +13813,955 @@
       </p:sp>
       <p:sp>
         <p:nvSpPr>
-          <p:cNvPr id="7" name="Rectangle 6"/>
+          <p:cNvPr id="7" name="Oval 6"/>
           <p:cNvSpPr/>
           <p:nvPr/>
         </p:nvSpPr>
         <p:spPr>
           <a:xfrm>
-            <a:off x="777240" y="1600200"/>
-            <a:ext cx="3383280" cy="164592"/>
-          </a:xfrm>
-          <a:prstGeom prst="rect">
+            <a:off x="1165860" y="2788920"/>
+            <a:ext cx="914400" cy="914400"/>
+          </a:xfrm>
+          <a:prstGeom prst="ellipse">
+            <a:avLst/>
+          </a:prstGeom>
+          <a:solidFill>
+            <a:srgbClr val="6D28D9"/>
+          </a:solidFill>
+          <a:ln>
+            <a:noFill/>
+          </a:ln>
+          <a:effectLst/>
+        </p:spPr>
+        <p:style>
+          <a:lnRef idx="1">
+            <a:schemeClr val="accent1"/>
+          </a:lnRef>
+          <a:fillRef idx="3">
+            <a:schemeClr val="accent1"/>
+          </a:fillRef>
+          <a:effectRef idx="2">
+            <a:schemeClr val="accent1"/>
+          </a:effectRef>
+          <a:fontRef idx="minor">
+            <a:schemeClr val="lt1"/>
+          </a:fontRef>
+        </p:style>
+        <p:txBody>
+          <a:bodyPr rtlCol="0" anchor="ctr"/>
+          <a:lstStyle/>
+          <a:p>
+            <a:pPr algn="ctr"/>
+          </a:p>
+        </p:txBody>
+      </p:sp>
+      <p:sp>
+        <p:nvSpPr>
+          <p:cNvPr id="8" name="TextBox 7"/>
+          <p:cNvSpPr txBox="1"/>
+          <p:nvPr/>
+        </p:nvSpPr>
+        <p:spPr>
+          <a:xfrm>
+            <a:off x="1165860" y="2770632"/>
+            <a:ext cx="914400" cy="914400"/>
+          </a:xfrm>
+          <a:prstGeom prst="rect">
+            <a:avLst/>
+          </a:prstGeom>
+          <a:noFill/>
+        </p:spPr>
+        <p:txBody>
+          <a:bodyPr wrap="square" anchor="ctr" lIns="0" rIns="0" tIns="0" bIns="0">
+            <a:spAutoFit/>
+          </a:bodyPr>
+          <a:lstStyle/>
+          <a:p>
+            <a:pPr algn="ctr">
+              <a:lnSpc>
+                <a:spcPct val="100000"/>
+              </a:lnSpc>
+              <a:spcBef>
+                <a:spcPts val="0"/>
+              </a:spcBef>
+              <a:spcAft>
+                <a:spcPts val="0"/>
+              </a:spcAft>
+            </a:pPr>
+            <a:r>
+              <a:rPr sz="3400" b="1" i="0">
+                <a:solidFill>
+                  <a:srgbClr val="FFFFFF"/>
+                </a:solidFill>
+                <a:latin typeface="Segoe UI Emoji"/>
+              </a:rPr>
+              <a:t>📄</a:t>
+            </a:r>
+          </a:p>
+        </p:txBody>
+      </p:sp>
+      <p:sp>
+        <p:nvSpPr>
+          <p:cNvPr id="9" name="TextBox 8"/>
+          <p:cNvSpPr txBox="1"/>
+          <p:nvPr/>
+        </p:nvSpPr>
+        <p:spPr>
+          <a:xfrm>
+            <a:off x="640080" y="3886200"/>
+            <a:ext cx="1965960" cy="457200"/>
+          </a:xfrm>
+          <a:prstGeom prst="rect">
+            <a:avLst/>
+          </a:prstGeom>
+          <a:noFill/>
+        </p:spPr>
+        <p:txBody>
+          <a:bodyPr wrap="square" anchor="t" lIns="0" rIns="0" tIns="0" bIns="0">
+            <a:spAutoFit/>
+          </a:bodyPr>
+          <a:lstStyle/>
+          <a:p>
+            <a:pPr algn="ctr">
+              <a:lnSpc>
+                <a:spcPct val="100000"/>
+              </a:lnSpc>
+              <a:spcBef>
+                <a:spcPts val="0"/>
+              </a:spcBef>
+              <a:spcAft>
+                <a:spcPts val="0"/>
+              </a:spcAft>
+            </a:pPr>
+            <a:r>
+              <a:rPr sz="1550" b="1" i="0">
+                <a:solidFill>
+                  <a:srgbClr val="1E1B2E"/>
+                </a:solidFill>
+                <a:latin typeface="Segoe UI Semibold"/>
+              </a:rPr>
+              <a:t>Documentos</a:t>
+            </a:r>
+          </a:p>
+        </p:txBody>
+      </p:sp>
+      <p:sp>
+        <p:nvSpPr>
+          <p:cNvPr id="10" name="TextBox 9"/>
+          <p:cNvSpPr txBox="1"/>
+          <p:nvPr/>
+        </p:nvSpPr>
+        <p:spPr>
+          <a:xfrm>
+            <a:off x="640080" y="4343400"/>
+            <a:ext cx="1965960" cy="292608"/>
+          </a:xfrm>
+          <a:prstGeom prst="rect">
+            <a:avLst/>
+          </a:prstGeom>
+          <a:noFill/>
+        </p:spPr>
+        <p:txBody>
+          <a:bodyPr wrap="square" anchor="t" lIns="0" rIns="0" tIns="0" bIns="0">
+            <a:spAutoFit/>
+          </a:bodyPr>
+          <a:lstStyle/>
+          <a:p>
+            <a:pPr algn="ctr">
+              <a:lnSpc>
+                <a:spcPct val="100000"/>
+              </a:lnSpc>
+              <a:spcBef>
+                <a:spcPts val="0"/>
+              </a:spcBef>
+              <a:spcAft>
+                <a:spcPts val="0"/>
+              </a:spcAft>
+            </a:pPr>
+            <a:r>
+              <a:rPr sz="1150" b="0" i="0">
+                <a:solidFill>
+                  <a:srgbClr val="6B6682"/>
+                </a:solidFill>
+                <a:latin typeface="Segoe UI"/>
+              </a:rPr>
+              <a:t>Fuentes de</a:t>
+            </a:r>
+          </a:p>
+        </p:txBody>
+      </p:sp>
+      <p:sp>
+        <p:nvSpPr>
+          <p:cNvPr id="11" name="TextBox 10"/>
+          <p:cNvSpPr txBox="1"/>
+          <p:nvPr/>
+        </p:nvSpPr>
+        <p:spPr>
+          <a:xfrm>
+            <a:off x="640080" y="4636008"/>
+            <a:ext cx="1965960" cy="292608"/>
+          </a:xfrm>
+          <a:prstGeom prst="rect">
+            <a:avLst/>
+          </a:prstGeom>
+          <a:noFill/>
+        </p:spPr>
+        <p:txBody>
+          <a:bodyPr wrap="square" anchor="t" lIns="0" rIns="0" tIns="0" bIns="0">
+            <a:spAutoFit/>
+          </a:bodyPr>
+          <a:lstStyle/>
+          <a:p>
+            <a:pPr algn="ctr">
+              <a:lnSpc>
+                <a:spcPct val="100000"/>
+              </a:lnSpc>
+              <a:spcBef>
+                <a:spcPts val="0"/>
+              </a:spcBef>
+              <a:spcAft>
+                <a:spcPts val="0"/>
+              </a:spcAft>
+            </a:pPr>
+            <a:r>
+              <a:rPr sz="1150" b="0" i="0">
+                <a:solidFill>
+                  <a:srgbClr val="6B6682"/>
+                </a:solidFill>
+                <a:latin typeface="Segoe UI"/>
+              </a:rPr>
+              <a:t>conocimiento</a:t>
+            </a:r>
+          </a:p>
+        </p:txBody>
+      </p:sp>
+      <p:sp>
+        <p:nvSpPr>
+          <p:cNvPr id="12" name="TextBox 11"/>
+          <p:cNvSpPr txBox="1"/>
+          <p:nvPr/>
+        </p:nvSpPr>
+        <p:spPr>
+          <a:xfrm>
+            <a:off x="2560320" y="3063240"/>
+            <a:ext cx="347472" cy="457200"/>
+          </a:xfrm>
+          <a:prstGeom prst="rect">
+            <a:avLst/>
+          </a:prstGeom>
+          <a:noFill/>
+        </p:spPr>
+        <p:txBody>
+          <a:bodyPr wrap="square" anchor="ctr" lIns="0" rIns="0" tIns="0" bIns="0">
+            <a:spAutoFit/>
+          </a:bodyPr>
+          <a:lstStyle/>
+          <a:p>
+            <a:pPr algn="ctr">
+              <a:lnSpc>
+                <a:spcPct val="100000"/>
+              </a:lnSpc>
+              <a:spcBef>
+                <a:spcPts val="0"/>
+              </a:spcBef>
+              <a:spcAft>
+                <a:spcPts val="0"/>
+              </a:spcAft>
+            </a:pPr>
+            <a:r>
+              <a:rPr sz="2200" b="1" i="0">
+                <a:solidFill>
+                  <a:srgbClr val="8B5CF6"/>
+                </a:solidFill>
+                <a:latin typeface="Segoe UI"/>
+              </a:rPr>
+              <a:t>→</a:t>
+            </a:r>
+          </a:p>
+        </p:txBody>
+      </p:sp>
+      <p:sp>
+        <p:nvSpPr>
+          <p:cNvPr id="13" name="Rounded Rectangle 12"/>
+          <p:cNvSpPr/>
+          <p:nvPr/>
+        </p:nvSpPr>
+        <p:spPr>
+          <a:xfrm>
+            <a:off x="2862072" y="2468880"/>
+            <a:ext cx="1965960" cy="2468880"/>
+          </a:xfrm>
+          <a:prstGeom prst="roundRect">
+            <a:avLst/>
+          </a:prstGeom>
+          <a:solidFill>
+            <a:srgbClr val="FFFFFF"/>
+          </a:solidFill>
+          <a:ln>
+            <a:noFill/>
+          </a:ln>
+          <a:effectLst/>
+        </p:spPr>
+        <p:style>
+          <a:lnRef idx="1">
+            <a:schemeClr val="accent1"/>
+          </a:lnRef>
+          <a:fillRef idx="3">
+            <a:schemeClr val="accent1"/>
+          </a:fillRef>
+          <a:effectRef idx="2">
+            <a:schemeClr val="accent1"/>
+          </a:effectRef>
+          <a:fontRef idx="minor">
+            <a:schemeClr val="lt1"/>
+          </a:fontRef>
+        </p:style>
+        <p:txBody>
+          <a:bodyPr rtlCol="0" anchor="ctr"/>
+          <a:lstStyle/>
+          <a:p>
+            <a:pPr algn="ctr"/>
+          </a:p>
+        </p:txBody>
+      </p:sp>
+      <p:sp>
+        <p:nvSpPr>
+          <p:cNvPr id="14" name="Oval 13"/>
+          <p:cNvSpPr/>
+          <p:nvPr/>
+        </p:nvSpPr>
+        <p:spPr>
+          <a:xfrm>
+            <a:off x="3387852" y="2788920"/>
+            <a:ext cx="914400" cy="914400"/>
+          </a:xfrm>
+          <a:prstGeom prst="ellipse">
+            <a:avLst/>
+          </a:prstGeom>
+          <a:solidFill>
+            <a:srgbClr val="FB7185"/>
+          </a:solidFill>
+          <a:ln>
+            <a:noFill/>
+          </a:ln>
+          <a:effectLst/>
+        </p:spPr>
+        <p:style>
+          <a:lnRef idx="1">
+            <a:schemeClr val="accent1"/>
+          </a:lnRef>
+          <a:fillRef idx="3">
+            <a:schemeClr val="accent1"/>
+          </a:fillRef>
+          <a:effectRef idx="2">
+            <a:schemeClr val="accent1"/>
+          </a:effectRef>
+          <a:fontRef idx="minor">
+            <a:schemeClr val="lt1"/>
+          </a:fontRef>
+        </p:style>
+        <p:txBody>
+          <a:bodyPr rtlCol="0" anchor="ctr"/>
+          <a:lstStyle/>
+          <a:p>
+            <a:pPr algn="ctr"/>
+          </a:p>
+        </p:txBody>
+      </p:sp>
+      <p:sp>
+        <p:nvSpPr>
+          <p:cNvPr id="15" name="TextBox 14"/>
+          <p:cNvSpPr txBox="1"/>
+          <p:nvPr/>
+        </p:nvSpPr>
+        <p:spPr>
+          <a:xfrm>
+            <a:off x="3387852" y="2770632"/>
+            <a:ext cx="914400" cy="914400"/>
+          </a:xfrm>
+          <a:prstGeom prst="rect">
+            <a:avLst/>
+          </a:prstGeom>
+          <a:noFill/>
+        </p:spPr>
+        <p:txBody>
+          <a:bodyPr wrap="square" anchor="ctr" lIns="0" rIns="0" tIns="0" bIns="0">
+            <a:spAutoFit/>
+          </a:bodyPr>
+          <a:lstStyle/>
+          <a:p>
+            <a:pPr algn="ctr">
+              <a:lnSpc>
+                <a:spcPct val="100000"/>
+              </a:lnSpc>
+              <a:spcBef>
+                <a:spcPts val="0"/>
+              </a:spcBef>
+              <a:spcAft>
+                <a:spcPts val="0"/>
+              </a:spcAft>
+            </a:pPr>
+            <a:r>
+              <a:rPr sz="3400" b="1" i="0">
+                <a:solidFill>
+                  <a:srgbClr val="FFFFFF"/>
+                </a:solidFill>
+                <a:latin typeface="Segoe UI Emoji"/>
+              </a:rPr>
+              <a:t>✂️</a:t>
+            </a:r>
+          </a:p>
+        </p:txBody>
+      </p:sp>
+      <p:sp>
+        <p:nvSpPr>
+          <p:cNvPr id="16" name="TextBox 15"/>
+          <p:cNvSpPr txBox="1"/>
+          <p:nvPr/>
+        </p:nvSpPr>
+        <p:spPr>
+          <a:xfrm>
+            <a:off x="2862072" y="3886200"/>
+            <a:ext cx="1965960" cy="457200"/>
+          </a:xfrm>
+          <a:prstGeom prst="rect">
+            <a:avLst/>
+          </a:prstGeom>
+          <a:noFill/>
+        </p:spPr>
+        <p:txBody>
+          <a:bodyPr wrap="square" anchor="t" lIns="0" rIns="0" tIns="0" bIns="0">
+            <a:spAutoFit/>
+          </a:bodyPr>
+          <a:lstStyle/>
+          <a:p>
+            <a:pPr algn="ctr">
+              <a:lnSpc>
+                <a:spcPct val="100000"/>
+              </a:lnSpc>
+              <a:spcBef>
+                <a:spcPts val="0"/>
+              </a:spcBef>
+              <a:spcAft>
+                <a:spcPts val="0"/>
+              </a:spcAft>
+            </a:pPr>
+            <a:r>
+              <a:rPr sz="1550" b="1" i="0">
+                <a:solidFill>
+                  <a:srgbClr val="1E1B2E"/>
+                </a:solidFill>
+                <a:latin typeface="Segoe UI Semibold"/>
+              </a:rPr>
+              <a:t>Chunks</a:t>
+            </a:r>
+          </a:p>
+        </p:txBody>
+      </p:sp>
+      <p:sp>
+        <p:nvSpPr>
+          <p:cNvPr id="17" name="TextBox 16"/>
+          <p:cNvSpPr txBox="1"/>
+          <p:nvPr/>
+        </p:nvSpPr>
+        <p:spPr>
+          <a:xfrm>
+            <a:off x="2862072" y="4343400"/>
+            <a:ext cx="1965960" cy="292608"/>
+          </a:xfrm>
+          <a:prstGeom prst="rect">
+            <a:avLst/>
+          </a:prstGeom>
+          <a:noFill/>
+        </p:spPr>
+        <p:txBody>
+          <a:bodyPr wrap="square" anchor="t" lIns="0" rIns="0" tIns="0" bIns="0">
+            <a:spAutoFit/>
+          </a:bodyPr>
+          <a:lstStyle/>
+          <a:p>
+            <a:pPr algn="ctr">
+              <a:lnSpc>
+                <a:spcPct val="100000"/>
+              </a:lnSpc>
+              <a:spcBef>
+                <a:spcPts val="0"/>
+              </a:spcBef>
+              <a:spcAft>
+                <a:spcPts val="0"/>
+              </a:spcAft>
+            </a:pPr>
+            <a:r>
+              <a:rPr sz="1150" b="0" i="0">
+                <a:solidFill>
+                  <a:srgbClr val="6B6682"/>
+                </a:solidFill>
+                <a:latin typeface="Segoe UI"/>
+              </a:rPr>
+              <a:t>Fragmentos</a:t>
+            </a:r>
+          </a:p>
+        </p:txBody>
+      </p:sp>
+      <p:sp>
+        <p:nvSpPr>
+          <p:cNvPr id="18" name="TextBox 17"/>
+          <p:cNvSpPr txBox="1"/>
+          <p:nvPr/>
+        </p:nvSpPr>
+        <p:spPr>
+          <a:xfrm>
+            <a:off x="2862072" y="4636008"/>
+            <a:ext cx="1965960" cy="292608"/>
+          </a:xfrm>
+          <a:prstGeom prst="rect">
+            <a:avLst/>
+          </a:prstGeom>
+          <a:noFill/>
+        </p:spPr>
+        <p:txBody>
+          <a:bodyPr wrap="square" anchor="t" lIns="0" rIns="0" tIns="0" bIns="0">
+            <a:spAutoFit/>
+          </a:bodyPr>
+          <a:lstStyle/>
+          <a:p>
+            <a:pPr algn="ctr">
+              <a:lnSpc>
+                <a:spcPct val="100000"/>
+              </a:lnSpc>
+              <a:spcBef>
+                <a:spcPts val="0"/>
+              </a:spcBef>
+              <a:spcAft>
+                <a:spcPts val="0"/>
+              </a:spcAft>
+            </a:pPr>
+            <a:r>
+              <a:rPr sz="1150" b="0" i="0">
+                <a:solidFill>
+                  <a:srgbClr val="6B6682"/>
+                </a:solidFill>
+                <a:latin typeface="Segoe UI"/>
+              </a:rPr>
+              <a:t>manejables</a:t>
+            </a:r>
+          </a:p>
+        </p:txBody>
+      </p:sp>
+      <p:sp>
+        <p:nvSpPr>
+          <p:cNvPr id="19" name="TextBox 18"/>
+          <p:cNvSpPr txBox="1"/>
+          <p:nvPr/>
+        </p:nvSpPr>
+        <p:spPr>
+          <a:xfrm>
+            <a:off x="4782312" y="3063240"/>
+            <a:ext cx="347472" cy="457200"/>
+          </a:xfrm>
+          <a:prstGeom prst="rect">
+            <a:avLst/>
+          </a:prstGeom>
+          <a:noFill/>
+        </p:spPr>
+        <p:txBody>
+          <a:bodyPr wrap="square" anchor="ctr" lIns="0" rIns="0" tIns="0" bIns="0">
+            <a:spAutoFit/>
+          </a:bodyPr>
+          <a:lstStyle/>
+          <a:p>
+            <a:pPr algn="ctr">
+              <a:lnSpc>
+                <a:spcPct val="100000"/>
+              </a:lnSpc>
+              <a:spcBef>
+                <a:spcPts val="0"/>
+              </a:spcBef>
+              <a:spcAft>
+                <a:spcPts val="0"/>
+              </a:spcAft>
+            </a:pPr>
+            <a:r>
+              <a:rPr sz="2200" b="1" i="0">
+                <a:solidFill>
+                  <a:srgbClr val="8B5CF6"/>
+                </a:solidFill>
+                <a:latin typeface="Segoe UI"/>
+              </a:rPr>
+              <a:t>→</a:t>
+            </a:r>
+          </a:p>
+        </p:txBody>
+      </p:sp>
+      <p:sp>
+        <p:nvSpPr>
+          <p:cNvPr id="20" name="Rounded Rectangle 19"/>
+          <p:cNvSpPr/>
+          <p:nvPr/>
+        </p:nvSpPr>
+        <p:spPr>
+          <a:xfrm>
+            <a:off x="5084064" y="2468880"/>
+            <a:ext cx="1965960" cy="2468880"/>
+          </a:xfrm>
+          <a:prstGeom prst="roundRect">
+            <a:avLst/>
+          </a:prstGeom>
+          <a:solidFill>
+            <a:srgbClr val="FFFFFF"/>
+          </a:solidFill>
+          <a:ln>
+            <a:noFill/>
+          </a:ln>
+          <a:effectLst/>
+        </p:spPr>
+        <p:style>
+          <a:lnRef idx="1">
+            <a:schemeClr val="accent1"/>
+          </a:lnRef>
+          <a:fillRef idx="3">
+            <a:schemeClr val="accent1"/>
+          </a:fillRef>
+          <a:effectRef idx="2">
+            <a:schemeClr val="accent1"/>
+          </a:effectRef>
+          <a:fontRef idx="minor">
+            <a:schemeClr val="lt1"/>
+          </a:fontRef>
+        </p:style>
+        <p:txBody>
+          <a:bodyPr rtlCol="0" anchor="ctr"/>
+          <a:lstStyle/>
+          <a:p>
+            <a:pPr algn="ctr"/>
+          </a:p>
+        </p:txBody>
+      </p:sp>
+      <p:sp>
+        <p:nvSpPr>
+          <p:cNvPr id="21" name="Oval 20"/>
+          <p:cNvSpPr/>
+          <p:nvPr/>
+        </p:nvSpPr>
+        <p:spPr>
+          <a:xfrm>
+            <a:off x="5609844" y="2788920"/>
+            <a:ext cx="914400" cy="914400"/>
+          </a:xfrm>
+          <a:prstGeom prst="ellipse">
+            <a:avLst/>
+          </a:prstGeom>
+          <a:solidFill>
+            <a:srgbClr val="FBBF24"/>
+          </a:solidFill>
+          <a:ln>
+            <a:noFill/>
+          </a:ln>
+          <a:effectLst/>
+        </p:spPr>
+        <p:style>
+          <a:lnRef idx="1">
+            <a:schemeClr val="accent1"/>
+          </a:lnRef>
+          <a:fillRef idx="3">
+            <a:schemeClr val="accent1"/>
+          </a:fillRef>
+          <a:effectRef idx="2">
+            <a:schemeClr val="accent1"/>
+          </a:effectRef>
+          <a:fontRef idx="minor">
+            <a:schemeClr val="lt1"/>
+          </a:fontRef>
+        </p:style>
+        <p:txBody>
+          <a:bodyPr rtlCol="0" anchor="ctr"/>
+          <a:lstStyle/>
+          <a:p>
+            <a:pPr algn="ctr"/>
+          </a:p>
+        </p:txBody>
+      </p:sp>
+      <p:sp>
+        <p:nvSpPr>
+          <p:cNvPr id="22" name="TextBox 21"/>
+          <p:cNvSpPr txBox="1"/>
+          <p:nvPr/>
+        </p:nvSpPr>
+        <p:spPr>
+          <a:xfrm>
+            <a:off x="5609844" y="2770632"/>
+            <a:ext cx="914400" cy="914400"/>
+          </a:xfrm>
+          <a:prstGeom prst="rect">
+            <a:avLst/>
+          </a:prstGeom>
+          <a:noFill/>
+        </p:spPr>
+        <p:txBody>
+          <a:bodyPr wrap="square" anchor="ctr" lIns="0" rIns="0" tIns="0" bIns="0">
+            <a:spAutoFit/>
+          </a:bodyPr>
+          <a:lstStyle/>
+          <a:p>
+            <a:pPr algn="ctr">
+              <a:lnSpc>
+                <a:spcPct val="100000"/>
+              </a:lnSpc>
+              <a:spcBef>
+                <a:spcPts val="0"/>
+              </a:spcBef>
+              <a:spcAft>
+                <a:spcPts val="0"/>
+              </a:spcAft>
+            </a:pPr>
+            <a:r>
+              <a:rPr sz="3400" b="1" i="0">
+                <a:solidFill>
+                  <a:srgbClr val="FFFFFF"/>
+                </a:solidFill>
+                <a:latin typeface="Segoe UI Emoji"/>
+              </a:rPr>
+              <a:t>🔢</a:t>
+            </a:r>
+          </a:p>
+        </p:txBody>
+      </p:sp>
+      <p:sp>
+        <p:nvSpPr>
+          <p:cNvPr id="23" name="TextBox 22"/>
+          <p:cNvSpPr txBox="1"/>
+          <p:nvPr/>
+        </p:nvSpPr>
+        <p:spPr>
+          <a:xfrm>
+            <a:off x="5084064" y="3886200"/>
+            <a:ext cx="1965960" cy="457200"/>
+          </a:xfrm>
+          <a:prstGeom prst="rect">
+            <a:avLst/>
+          </a:prstGeom>
+          <a:noFill/>
+        </p:spPr>
+        <p:txBody>
+          <a:bodyPr wrap="square" anchor="t" lIns="0" rIns="0" tIns="0" bIns="0">
+            <a:spAutoFit/>
+          </a:bodyPr>
+          <a:lstStyle/>
+          <a:p>
+            <a:pPr algn="ctr">
+              <a:lnSpc>
+                <a:spcPct val="100000"/>
+              </a:lnSpc>
+              <a:spcBef>
+                <a:spcPts val="0"/>
+              </a:spcBef>
+              <a:spcAft>
+                <a:spcPts val="0"/>
+              </a:spcAft>
+            </a:pPr>
+            <a:r>
+              <a:rPr sz="1550" b="1" i="0">
+                <a:solidFill>
+                  <a:srgbClr val="1E1B2E"/>
+                </a:solidFill>
+                <a:latin typeface="Segoe UI Semibold"/>
+              </a:rPr>
+              <a:t>Embeddings</a:t>
+            </a:r>
+          </a:p>
+        </p:txBody>
+      </p:sp>
+      <p:sp>
+        <p:nvSpPr>
+          <p:cNvPr id="24" name="TextBox 23"/>
+          <p:cNvSpPr txBox="1"/>
+          <p:nvPr/>
+        </p:nvSpPr>
+        <p:spPr>
+          <a:xfrm>
+            <a:off x="5084064" y="4343400"/>
+            <a:ext cx="1965960" cy="292608"/>
+          </a:xfrm>
+          <a:prstGeom prst="rect">
+            <a:avLst/>
+          </a:prstGeom>
+          <a:noFill/>
+        </p:spPr>
+        <p:txBody>
+          <a:bodyPr wrap="square" anchor="t" lIns="0" rIns="0" tIns="0" bIns="0">
+            <a:spAutoFit/>
+          </a:bodyPr>
+          <a:lstStyle/>
+          <a:p>
+            <a:pPr algn="ctr">
+              <a:lnSpc>
+                <a:spcPct val="100000"/>
+              </a:lnSpc>
+              <a:spcBef>
+                <a:spcPts val="0"/>
+              </a:spcBef>
+              <a:spcAft>
+                <a:spcPts val="0"/>
+              </a:spcAft>
+            </a:pPr>
+            <a:r>
+              <a:rPr sz="1150" b="0" i="0">
+                <a:solidFill>
+                  <a:srgbClr val="6B6682"/>
+                </a:solidFill>
+                <a:latin typeface="Segoe UI"/>
+              </a:rPr>
+              <a:t>Vectores</a:t>
+            </a:r>
+          </a:p>
+        </p:txBody>
+      </p:sp>
+      <p:sp>
+        <p:nvSpPr>
+          <p:cNvPr id="25" name="TextBox 24"/>
+          <p:cNvSpPr txBox="1"/>
+          <p:nvPr/>
+        </p:nvSpPr>
+        <p:spPr>
+          <a:xfrm>
+            <a:off x="5084064" y="4636008"/>
+            <a:ext cx="1965960" cy="292608"/>
+          </a:xfrm>
+          <a:prstGeom prst="rect">
+            <a:avLst/>
+          </a:prstGeom>
+          <a:noFill/>
+        </p:spPr>
+        <p:txBody>
+          <a:bodyPr wrap="square" anchor="t" lIns="0" rIns="0" tIns="0" bIns="0">
+            <a:spAutoFit/>
+          </a:bodyPr>
+          <a:lstStyle/>
+          <a:p>
+            <a:pPr algn="ctr">
+              <a:lnSpc>
+                <a:spcPct val="100000"/>
+              </a:lnSpc>
+              <a:spcBef>
+                <a:spcPts val="0"/>
+              </a:spcBef>
+              <a:spcAft>
+                <a:spcPts val="0"/>
+              </a:spcAft>
+            </a:pPr>
+            <a:r>
+              <a:rPr sz="1150" b="0" i="0">
+                <a:solidFill>
+                  <a:srgbClr val="6B6682"/>
+                </a:solidFill>
+                <a:latin typeface="Segoe UI"/>
+              </a:rPr>
+              <a:t>numéricos</a:t>
+            </a:r>
+          </a:p>
+        </p:txBody>
+      </p:sp>
+      <p:sp>
+        <p:nvSpPr>
+          <p:cNvPr id="26" name="TextBox 25"/>
+          <p:cNvSpPr txBox="1"/>
+          <p:nvPr/>
+        </p:nvSpPr>
+        <p:spPr>
+          <a:xfrm>
+            <a:off x="7004303" y="3063240"/>
+            <a:ext cx="347472" cy="457200"/>
+          </a:xfrm>
+          <a:prstGeom prst="rect">
+            <a:avLst/>
+          </a:prstGeom>
+          <a:noFill/>
+        </p:spPr>
+        <p:txBody>
+          <a:bodyPr wrap="square" anchor="ctr" lIns="0" rIns="0" tIns="0" bIns="0">
+            <a:spAutoFit/>
+          </a:bodyPr>
+          <a:lstStyle/>
+          <a:p>
+            <a:pPr algn="ctr">
+              <a:lnSpc>
+                <a:spcPct val="100000"/>
+              </a:lnSpc>
+              <a:spcBef>
+                <a:spcPts val="0"/>
+              </a:spcBef>
+              <a:spcAft>
+                <a:spcPts val="0"/>
+              </a:spcAft>
+            </a:pPr>
+            <a:r>
+              <a:rPr sz="2200" b="1" i="0">
+                <a:solidFill>
+                  <a:srgbClr val="8B5CF6"/>
+                </a:solidFill>
+                <a:latin typeface="Segoe UI"/>
+              </a:rPr>
+              <a:t>→</a:t>
+            </a:r>
+          </a:p>
+        </p:txBody>
+      </p:sp>
+      <p:sp>
+        <p:nvSpPr>
+          <p:cNvPr id="27" name="Rounded Rectangle 26"/>
+          <p:cNvSpPr/>
+          <p:nvPr/>
+        </p:nvSpPr>
+        <p:spPr>
+          <a:xfrm>
+            <a:off x="7306055" y="2468880"/>
+            <a:ext cx="1965960" cy="2468880"/>
+          </a:xfrm>
+          <a:prstGeom prst="roundRect">
+            <a:avLst/>
+          </a:prstGeom>
+          <a:solidFill>
+            <a:srgbClr val="FFFFFF"/>
+          </a:solidFill>
+          <a:ln>
+            <a:noFill/>
+          </a:ln>
+          <a:effectLst/>
+        </p:spPr>
+        <p:style>
+          <a:lnRef idx="1">
+            <a:schemeClr val="accent1"/>
+          </a:lnRef>
+          <a:fillRef idx="3">
+            <a:schemeClr val="accent1"/>
+          </a:fillRef>
+          <a:effectRef idx="2">
+            <a:schemeClr val="accent1"/>
+          </a:effectRef>
+          <a:fontRef idx="minor">
+            <a:schemeClr val="lt1"/>
+          </a:fontRef>
+        </p:style>
+        <p:txBody>
+          <a:bodyPr rtlCol="0" anchor="ctr"/>
+          <a:lstStyle/>
+          <a:p>
+            <a:pPr algn="ctr"/>
+          </a:p>
+        </p:txBody>
+      </p:sp>
+      <p:sp>
+        <p:nvSpPr>
+          <p:cNvPr id="28" name="Oval 27"/>
+          <p:cNvSpPr/>
+          <p:nvPr/>
+        </p:nvSpPr>
+        <p:spPr>
+          <a:xfrm>
+            <a:off x="7831836" y="2788920"/>
+            <a:ext cx="914400" cy="914400"/>
+          </a:xfrm>
+          <a:prstGeom prst="ellipse">
             <a:avLst/>
           </a:prstGeom>
           <a:solidFill>
@@ -14638,372 +14796,239 @@
       </p:sp>
       <p:sp>
         <p:nvSpPr>
-          <p:cNvPr id="8" name="Oval 7"/>
+          <p:cNvPr id="29" name="TextBox 28"/>
+          <p:cNvSpPr txBox="1"/>
+          <p:nvPr/>
+        </p:nvSpPr>
+        <p:spPr>
+          <a:xfrm>
+            <a:off x="7831836" y="2770632"/>
+            <a:ext cx="914400" cy="914400"/>
+          </a:xfrm>
+          <a:prstGeom prst="rect">
+            <a:avLst/>
+          </a:prstGeom>
+          <a:noFill/>
+        </p:spPr>
+        <p:txBody>
+          <a:bodyPr wrap="square" anchor="ctr" lIns="0" rIns="0" tIns="0" bIns="0">
+            <a:spAutoFit/>
+          </a:bodyPr>
+          <a:lstStyle/>
+          <a:p>
+            <a:pPr algn="ctr">
+              <a:lnSpc>
+                <a:spcPct val="100000"/>
+              </a:lnSpc>
+              <a:spcBef>
+                <a:spcPts val="0"/>
+              </a:spcBef>
+              <a:spcAft>
+                <a:spcPts val="0"/>
+              </a:spcAft>
+            </a:pPr>
+            <a:r>
+              <a:rPr sz="3400" b="1" i="0">
+                <a:solidFill>
+                  <a:srgbClr val="FFFFFF"/>
+                </a:solidFill>
+                <a:latin typeface="Segoe UI Emoji"/>
+              </a:rPr>
+              <a:t>🗄️</a:t>
+            </a:r>
+          </a:p>
+        </p:txBody>
+      </p:sp>
+      <p:sp>
+        <p:nvSpPr>
+          <p:cNvPr id="30" name="TextBox 29"/>
+          <p:cNvSpPr txBox="1"/>
+          <p:nvPr/>
+        </p:nvSpPr>
+        <p:spPr>
+          <a:xfrm>
+            <a:off x="7306055" y="3886200"/>
+            <a:ext cx="1965960" cy="457200"/>
+          </a:xfrm>
+          <a:prstGeom prst="rect">
+            <a:avLst/>
+          </a:prstGeom>
+          <a:noFill/>
+        </p:spPr>
+        <p:txBody>
+          <a:bodyPr wrap="square" anchor="t" lIns="0" rIns="0" tIns="0" bIns="0">
+            <a:spAutoFit/>
+          </a:bodyPr>
+          <a:lstStyle/>
+          <a:p>
+            <a:pPr algn="ctr">
+              <a:lnSpc>
+                <a:spcPct val="100000"/>
+              </a:lnSpc>
+              <a:spcBef>
+                <a:spcPts val="0"/>
+              </a:spcBef>
+              <a:spcAft>
+                <a:spcPts val="0"/>
+              </a:spcAft>
+            </a:pPr>
+            <a:r>
+              <a:rPr sz="1550" b="1" i="0">
+                <a:solidFill>
+                  <a:srgbClr val="1E1B2E"/>
+                </a:solidFill>
+                <a:latin typeface="Segoe UI Semibold"/>
+              </a:rPr>
+              <a:t>Vector store</a:t>
+            </a:r>
+          </a:p>
+        </p:txBody>
+      </p:sp>
+      <p:sp>
+        <p:nvSpPr>
+          <p:cNvPr id="31" name="TextBox 30"/>
+          <p:cNvSpPr txBox="1"/>
+          <p:nvPr/>
+        </p:nvSpPr>
+        <p:spPr>
+          <a:xfrm>
+            <a:off x="7306055" y="4343400"/>
+            <a:ext cx="1965960" cy="292608"/>
+          </a:xfrm>
+          <a:prstGeom prst="rect">
+            <a:avLst/>
+          </a:prstGeom>
+          <a:noFill/>
+        </p:spPr>
+        <p:txBody>
+          <a:bodyPr wrap="square" anchor="t" lIns="0" rIns="0" tIns="0" bIns="0">
+            <a:spAutoFit/>
+          </a:bodyPr>
+          <a:lstStyle/>
+          <a:p>
+            <a:pPr algn="ctr">
+              <a:lnSpc>
+                <a:spcPct val="100000"/>
+              </a:lnSpc>
+              <a:spcBef>
+                <a:spcPts val="0"/>
+              </a:spcBef>
+              <a:spcAft>
+                <a:spcPts val="0"/>
+              </a:spcAft>
+            </a:pPr>
+            <a:r>
+              <a:rPr sz="1150" b="0" i="0">
+                <a:solidFill>
+                  <a:srgbClr val="6B6682"/>
+                </a:solidFill>
+                <a:latin typeface="Segoe UI"/>
+              </a:rPr>
+              <a:t>Búsqueda por</a:t>
+            </a:r>
+          </a:p>
+        </p:txBody>
+      </p:sp>
+      <p:sp>
+        <p:nvSpPr>
+          <p:cNvPr id="32" name="TextBox 31"/>
+          <p:cNvSpPr txBox="1"/>
+          <p:nvPr/>
+        </p:nvSpPr>
+        <p:spPr>
+          <a:xfrm>
+            <a:off x="7306055" y="4636008"/>
+            <a:ext cx="1965960" cy="292608"/>
+          </a:xfrm>
+          <a:prstGeom prst="rect">
+            <a:avLst/>
+          </a:prstGeom>
+          <a:noFill/>
+        </p:spPr>
+        <p:txBody>
+          <a:bodyPr wrap="square" anchor="t" lIns="0" rIns="0" tIns="0" bIns="0">
+            <a:spAutoFit/>
+          </a:bodyPr>
+          <a:lstStyle/>
+          <a:p>
+            <a:pPr algn="ctr">
+              <a:lnSpc>
+                <a:spcPct val="100000"/>
+              </a:lnSpc>
+              <a:spcBef>
+                <a:spcPts val="0"/>
+              </a:spcBef>
+              <a:spcAft>
+                <a:spcPts val="0"/>
+              </a:spcAft>
+            </a:pPr>
+            <a:r>
+              <a:rPr sz="1150" b="0" i="0">
+                <a:solidFill>
+                  <a:srgbClr val="6B6682"/>
+                </a:solidFill>
+                <a:latin typeface="Segoe UI"/>
+              </a:rPr>
+              <a:t>similitud</a:t>
+            </a:r>
+          </a:p>
+        </p:txBody>
+      </p:sp>
+      <p:sp>
+        <p:nvSpPr>
+          <p:cNvPr id="33" name="TextBox 32"/>
+          <p:cNvSpPr txBox="1"/>
+          <p:nvPr/>
+        </p:nvSpPr>
+        <p:spPr>
+          <a:xfrm>
+            <a:off x="9226295" y="3063240"/>
+            <a:ext cx="347472" cy="457200"/>
+          </a:xfrm>
+          <a:prstGeom prst="rect">
+            <a:avLst/>
+          </a:prstGeom>
+          <a:noFill/>
+        </p:spPr>
+        <p:txBody>
+          <a:bodyPr wrap="square" anchor="ctr" lIns="0" rIns="0" tIns="0" bIns="0">
+            <a:spAutoFit/>
+          </a:bodyPr>
+          <a:lstStyle/>
+          <a:p>
+            <a:pPr algn="ctr">
+              <a:lnSpc>
+                <a:spcPct val="100000"/>
+              </a:lnSpc>
+              <a:spcBef>
+                <a:spcPts val="0"/>
+              </a:spcBef>
+              <a:spcAft>
+                <a:spcPts val="0"/>
+              </a:spcAft>
+            </a:pPr>
+            <a:r>
+              <a:rPr sz="2200" b="1" i="0">
+                <a:solidFill>
+                  <a:srgbClr val="8B5CF6"/>
+                </a:solidFill>
+                <a:latin typeface="Segoe UI"/>
+              </a:rPr>
+              <a:t>→</a:t>
+            </a:r>
+          </a:p>
+        </p:txBody>
+      </p:sp>
+      <p:sp>
+        <p:nvSpPr>
+          <p:cNvPr id="34" name="Rounded Rectangle 33"/>
           <p:cNvSpPr/>
           <p:nvPr/>
         </p:nvSpPr>
         <p:spPr>
           <a:xfrm>
-            <a:off x="1965960" y="1965960"/>
-            <a:ext cx="1005840" cy="1005840"/>
-          </a:xfrm>
-          <a:prstGeom prst="ellipse">
-            <a:avLst/>
-          </a:prstGeom>
-          <a:solidFill>
-            <a:srgbClr val="22D3EE"/>
-          </a:solidFill>
-          <a:ln>
-            <a:noFill/>
-          </a:ln>
-          <a:effectLst/>
-        </p:spPr>
-        <p:style>
-          <a:lnRef idx="1">
-            <a:schemeClr val="accent1"/>
-          </a:lnRef>
-          <a:fillRef idx="3">
-            <a:schemeClr val="accent1"/>
-          </a:fillRef>
-          <a:effectRef idx="2">
-            <a:schemeClr val="accent1"/>
-          </a:effectRef>
-          <a:fontRef idx="minor">
-            <a:schemeClr val="lt1"/>
-          </a:fontRef>
-        </p:style>
-        <p:txBody>
-          <a:bodyPr rtlCol="0" anchor="ctr"/>
-          <a:lstStyle/>
-          <a:p>
-            <a:pPr algn="ctr"/>
-          </a:p>
-        </p:txBody>
-      </p:sp>
-      <p:sp>
-        <p:nvSpPr>
-          <p:cNvPr id="9" name="TextBox 8"/>
-          <p:cNvSpPr txBox="1"/>
-          <p:nvPr/>
-        </p:nvSpPr>
-        <p:spPr>
-          <a:xfrm>
-            <a:off x="1965960" y="1947672"/>
-            <a:ext cx="1005840" cy="1005840"/>
-          </a:xfrm>
-          <a:prstGeom prst="rect">
-            <a:avLst/>
-          </a:prstGeom>
-          <a:noFill/>
-        </p:spPr>
-        <p:txBody>
-          <a:bodyPr wrap="square" anchor="ctr" lIns="0" rIns="0" tIns="0" bIns="0">
-            <a:spAutoFit/>
-          </a:bodyPr>
-          <a:lstStyle/>
-          <a:p>
-            <a:pPr algn="ctr">
-              <a:lnSpc>
-                <a:spcPct val="100000"/>
-              </a:lnSpc>
-              <a:spcBef>
-                <a:spcPts val="0"/>
-              </a:spcBef>
-              <a:spcAft>
-                <a:spcPts val="0"/>
-              </a:spcAft>
-            </a:pPr>
-            <a:r>
-              <a:rPr sz="3400" b="1" i="0">
-                <a:solidFill>
-                  <a:srgbClr val="FFFFFF"/>
-                </a:solidFill>
-                <a:latin typeface="Segoe UI Emoji"/>
-              </a:rPr>
-              <a:t>•</a:t>
-            </a:r>
-          </a:p>
-        </p:txBody>
-      </p:sp>
-      <p:sp>
-        <p:nvSpPr>
-          <p:cNvPr id="10" name="TextBox 9"/>
-          <p:cNvSpPr txBox="1"/>
-          <p:nvPr/>
-        </p:nvSpPr>
-        <p:spPr>
-          <a:xfrm>
-            <a:off x="777240" y="3108960"/>
-            <a:ext cx="3383280" cy="457200"/>
-          </a:xfrm>
-          <a:prstGeom prst="rect">
-            <a:avLst/>
-          </a:prstGeom>
-          <a:noFill/>
-        </p:spPr>
-        <p:txBody>
-          <a:bodyPr wrap="square" anchor="t" lIns="0" rIns="0" tIns="0" bIns="0">
-            <a:spAutoFit/>
-          </a:bodyPr>
-          <a:lstStyle/>
-          <a:p>
-            <a:pPr algn="ctr">
-              <a:lnSpc>
-                <a:spcPct val="100000"/>
-              </a:lnSpc>
-              <a:spcBef>
-                <a:spcPts val="0"/>
-              </a:spcBef>
-              <a:spcAft>
-                <a:spcPts val="0"/>
-              </a:spcAft>
-            </a:pPr>
-            <a:r>
-              <a:rPr sz="1800" b="1" i="0">
-                <a:solidFill>
-                  <a:srgbClr val="1E1B2E"/>
-                </a:solidFill>
-                <a:latin typeface="Segoe UI Semibold"/>
-              </a:rPr>
-              <a:t>Producto punto</a:t>
-            </a:r>
-          </a:p>
-        </p:txBody>
-      </p:sp>
-      <p:sp>
-        <p:nvSpPr>
-          <p:cNvPr id="11" name="Rounded Rectangle 10"/>
-          <p:cNvSpPr/>
-          <p:nvPr/>
-        </p:nvSpPr>
-        <p:spPr>
-          <a:xfrm>
-            <a:off x="1051560" y="3657600"/>
-            <a:ext cx="2834640" cy="777240"/>
-          </a:xfrm>
-          <a:prstGeom prst="roundRect">
-            <a:avLst/>
-          </a:prstGeom>
-          <a:solidFill>
-            <a:srgbClr val="ECE9F9"/>
-          </a:solidFill>
-          <a:ln>
-            <a:noFill/>
-          </a:ln>
-          <a:effectLst/>
-        </p:spPr>
-        <p:style>
-          <a:lnRef idx="1">
-            <a:schemeClr val="accent1"/>
-          </a:lnRef>
-          <a:fillRef idx="3">
-            <a:schemeClr val="accent1"/>
-          </a:fillRef>
-          <a:effectRef idx="2">
-            <a:schemeClr val="accent1"/>
-          </a:effectRef>
-          <a:fontRef idx="minor">
-            <a:schemeClr val="lt1"/>
-          </a:fontRef>
-        </p:style>
-        <p:txBody>
-          <a:bodyPr rtlCol="0" anchor="ctr"/>
-          <a:lstStyle/>
-          <a:p>
-            <a:pPr algn="ctr"/>
-          </a:p>
-        </p:txBody>
-      </p:sp>
-      <p:sp>
-        <p:nvSpPr>
-          <p:cNvPr id="12" name="TextBox 11"/>
-          <p:cNvSpPr txBox="1"/>
-          <p:nvPr/>
-        </p:nvSpPr>
-        <p:spPr>
-          <a:xfrm>
-            <a:off x="1051560" y="3657600"/>
-            <a:ext cx="2834640" cy="777240"/>
-          </a:xfrm>
-          <a:prstGeom prst="rect">
-            <a:avLst/>
-          </a:prstGeom>
-          <a:noFill/>
-        </p:spPr>
-        <p:txBody>
-          <a:bodyPr wrap="square" anchor="ctr" lIns="0" rIns="0" tIns="0" bIns="0">
-            <a:spAutoFit/>
-          </a:bodyPr>
-          <a:lstStyle/>
-          <a:p>
-            <a:pPr algn="ctr">
-              <a:lnSpc>
-                <a:spcPct val="100000"/>
-              </a:lnSpc>
-              <a:spcBef>
-                <a:spcPts val="0"/>
-              </a:spcBef>
-              <a:spcAft>
-                <a:spcPts val="0"/>
-              </a:spcAft>
-            </a:pPr>
-            <a:r>
-              <a:rPr sz="1650" b="1" i="0">
-                <a:solidFill>
-                  <a:srgbClr val="1A164B"/>
-                </a:solidFill>
-                <a:latin typeface="Cambria Math"/>
-              </a:rPr>
-              <a:t>a · b = Σ aᵢ bᵢ</a:t>
-            </a:r>
-          </a:p>
-        </p:txBody>
-      </p:sp>
-      <p:sp>
-        <p:nvSpPr>
-          <p:cNvPr id="13" name="TextBox 12"/>
-          <p:cNvSpPr txBox="1"/>
-          <p:nvPr/>
-        </p:nvSpPr>
-        <p:spPr>
-          <a:xfrm>
-            <a:off x="1005840" y="4663440"/>
-            <a:ext cx="2926080" cy="365760"/>
-          </a:xfrm>
-          <a:prstGeom prst="rect">
-            <a:avLst/>
-          </a:prstGeom>
-          <a:noFill/>
-        </p:spPr>
-        <p:txBody>
-          <a:bodyPr wrap="square" anchor="t" lIns="0" rIns="0" tIns="0" bIns="0">
-            <a:spAutoFit/>
-          </a:bodyPr>
-          <a:lstStyle/>
-          <a:p>
-            <a:pPr algn="ctr">
-              <a:lnSpc>
-                <a:spcPct val="100000"/>
-              </a:lnSpc>
-              <a:spcBef>
-                <a:spcPts val="0"/>
-              </a:spcBef>
-              <a:spcAft>
-                <a:spcPts val="0"/>
-              </a:spcAft>
-            </a:pPr>
-            <a:r>
-              <a:rPr sz="1250" b="0" i="0">
-                <a:solidFill>
-                  <a:srgbClr val="6B6682"/>
-                </a:solidFill>
-                <a:latin typeface="Segoe UI"/>
-              </a:rPr>
-              <a:t>Multiplica y suma componente</a:t>
-            </a:r>
-          </a:p>
-        </p:txBody>
-      </p:sp>
-      <p:sp>
-        <p:nvSpPr>
-          <p:cNvPr id="14" name="TextBox 13"/>
-          <p:cNvSpPr txBox="1"/>
-          <p:nvPr/>
-        </p:nvSpPr>
-        <p:spPr>
-          <a:xfrm>
-            <a:off x="1005840" y="5047488"/>
-            <a:ext cx="2926080" cy="365760"/>
-          </a:xfrm>
-          <a:prstGeom prst="rect">
-            <a:avLst/>
-          </a:prstGeom>
-          <a:noFill/>
-        </p:spPr>
-        <p:txBody>
-          <a:bodyPr wrap="square" anchor="t" lIns="0" rIns="0" tIns="0" bIns="0">
-            <a:spAutoFit/>
-          </a:bodyPr>
-          <a:lstStyle/>
-          <a:p>
-            <a:pPr algn="ctr">
-              <a:lnSpc>
-                <a:spcPct val="100000"/>
-              </a:lnSpc>
-              <a:spcBef>
-                <a:spcPts val="0"/>
-              </a:spcBef>
-              <a:spcAft>
-                <a:spcPts val="0"/>
-              </a:spcAft>
-            </a:pPr>
-            <a:r>
-              <a:rPr sz="1250" b="0" i="0">
-                <a:solidFill>
-                  <a:srgbClr val="6B6682"/>
-                </a:solidFill>
-                <a:latin typeface="Segoe UI"/>
-              </a:rPr>
-              <a:t>a componente.</a:t>
-            </a:r>
-          </a:p>
-        </p:txBody>
-      </p:sp>
-      <p:sp>
-        <p:nvSpPr>
-          <p:cNvPr id="15" name="TextBox 14"/>
-          <p:cNvSpPr txBox="1"/>
-          <p:nvPr/>
-        </p:nvSpPr>
-        <p:spPr>
-          <a:xfrm>
-            <a:off x="1005840" y="5431536"/>
-            <a:ext cx="2926080" cy="365760"/>
-          </a:xfrm>
-          <a:prstGeom prst="rect">
-            <a:avLst/>
-          </a:prstGeom>
-          <a:noFill/>
-        </p:spPr>
-        <p:txBody>
-          <a:bodyPr wrap="square" anchor="t" lIns="0" rIns="0" tIns="0" bIns="0">
-            <a:spAutoFit/>
-          </a:bodyPr>
-          <a:lstStyle/>
-          <a:p>
-            <a:pPr algn="ctr">
-              <a:lnSpc>
-                <a:spcPct val="100000"/>
-              </a:lnSpc>
-              <a:spcBef>
-                <a:spcPts val="0"/>
-              </a:spcBef>
-              <a:spcAft>
-                <a:spcPts val="0"/>
-              </a:spcAft>
-            </a:pPr>
-            <a:r>
-              <a:rPr sz="1250" b="0" i="0">
-                <a:solidFill>
-                  <a:srgbClr val="6B6682"/>
-                </a:solidFill>
-                <a:latin typeface="Segoe UI"/>
-              </a:rPr>
-              <a:t>Mayor = más alineados.</a:t>
-            </a:r>
-          </a:p>
-        </p:txBody>
-      </p:sp>
-      <p:sp>
-        <p:nvSpPr>
-          <p:cNvPr id="16" name="Rounded Rectangle 15"/>
-          <p:cNvSpPr/>
-          <p:nvPr/>
-        </p:nvSpPr>
-        <p:spPr>
-          <a:xfrm>
-            <a:off x="4663440" y="1600200"/>
-            <a:ext cx="3383280" cy="4480560"/>
+            <a:off x="9528047" y="2468880"/>
+            <a:ext cx="1965960" cy="2468880"/>
           </a:xfrm>
           <a:prstGeom prst="roundRect">
             <a:avLst/>
@@ -15040,20 +15065,20 @@
       </p:sp>
       <p:sp>
         <p:nvSpPr>
-          <p:cNvPr id="17" name="Rectangle 16"/>
+          <p:cNvPr id="35" name="Oval 34"/>
           <p:cNvSpPr/>
           <p:nvPr/>
         </p:nvSpPr>
         <p:spPr>
           <a:xfrm>
-            <a:off x="4663440" y="1600200"/>
-            <a:ext cx="3383280" cy="164592"/>
-          </a:xfrm>
-          <a:prstGeom prst="rect">
+            <a:off x="10053827" y="2788920"/>
+            <a:ext cx="914400" cy="914400"/>
+          </a:xfrm>
+          <a:prstGeom prst="ellipse">
             <a:avLst/>
           </a:prstGeom>
           <a:solidFill>
-            <a:srgbClr val="6D28D9"/>
+            <a:srgbClr val="8B5CF6"/>
           </a:solidFill>
           <a:ln>
             <a:noFill/>
@@ -15084,58 +15109,14 @@
       </p:sp>
       <p:sp>
         <p:nvSpPr>
-          <p:cNvPr id="18" name="Oval 17"/>
-          <p:cNvSpPr/>
-          <p:nvPr/>
-        </p:nvSpPr>
-        <p:spPr>
-          <a:xfrm>
-            <a:off x="5852159" y="1965960"/>
-            <a:ext cx="1005840" cy="1005840"/>
-          </a:xfrm>
-          <a:prstGeom prst="ellipse">
-            <a:avLst/>
-          </a:prstGeom>
-          <a:solidFill>
-            <a:srgbClr val="6D28D9"/>
-          </a:solidFill>
-          <a:ln>
-            <a:noFill/>
-          </a:ln>
-          <a:effectLst/>
-        </p:spPr>
-        <p:style>
-          <a:lnRef idx="1">
-            <a:schemeClr val="accent1"/>
-          </a:lnRef>
-          <a:fillRef idx="3">
-            <a:schemeClr val="accent1"/>
-          </a:fillRef>
-          <a:effectRef idx="2">
-            <a:schemeClr val="accent1"/>
-          </a:effectRef>
-          <a:fontRef idx="minor">
-            <a:schemeClr val="lt1"/>
-          </a:fontRef>
-        </p:style>
-        <p:txBody>
-          <a:bodyPr rtlCol="0" anchor="ctr"/>
-          <a:lstStyle/>
-          <a:p>
-            <a:pPr algn="ctr"/>
-          </a:p>
-        </p:txBody>
-      </p:sp>
-      <p:sp>
-        <p:nvSpPr>
-          <p:cNvPr id="19" name="TextBox 18"/>
-          <p:cNvSpPr txBox="1"/>
-          <p:nvPr/>
-        </p:nvSpPr>
-        <p:spPr>
-          <a:xfrm>
-            <a:off x="5852159" y="1947672"/>
-            <a:ext cx="1005840" cy="1005840"/>
+          <p:cNvPr id="36" name="TextBox 35"/>
+          <p:cNvSpPr txBox="1"/>
+          <p:nvPr/>
+        </p:nvSpPr>
+        <p:spPr>
+          <a:xfrm>
+            <a:off x="10053827" y="2770632"/>
+            <a:ext cx="914400" cy="914400"/>
           </a:xfrm>
           <a:prstGeom prst="rect">
             <a:avLst/>
@@ -15166,21 +15147,21 @@
                 </a:solidFill>
                 <a:latin typeface="Segoe UI Emoji"/>
               </a:rPr>
-              <a:t>📏</a:t>
-            </a:r>
-          </a:p>
-        </p:txBody>
-      </p:sp>
-      <p:sp>
-        <p:nvSpPr>
-          <p:cNvPr id="20" name="TextBox 19"/>
-          <p:cNvSpPr txBox="1"/>
-          <p:nvPr/>
-        </p:nvSpPr>
-        <p:spPr>
-          <a:xfrm>
-            <a:off x="4663440" y="3108960"/>
-            <a:ext cx="3383280" cy="457200"/>
+              <a:t>🤖</a:t>
+            </a:r>
+          </a:p>
+        </p:txBody>
+      </p:sp>
+      <p:sp>
+        <p:nvSpPr>
+          <p:cNvPr id="37" name="TextBox 36"/>
+          <p:cNvSpPr txBox="1"/>
+          <p:nvPr/>
+        </p:nvSpPr>
+        <p:spPr>
+          <a:xfrm>
+            <a:off x="9528047" y="3886200"/>
+            <a:ext cx="1965960" cy="457200"/>
           </a:xfrm>
           <a:prstGeom prst="rect">
             <a:avLst/>
@@ -15205,79 +15186,35 @@
               </a:spcAft>
             </a:pPr>
             <a:r>
-              <a:rPr sz="1800" b="1" i="0">
+              <a:rPr sz="1550" b="1" i="0">
                 <a:solidFill>
                   <a:srgbClr val="1E1B2E"/>
                 </a:solidFill>
                 <a:latin typeface="Segoe UI Semibold"/>
               </a:rPr>
-              <a:t>Distancia euclidiana</a:t>
-            </a:r>
-          </a:p>
-        </p:txBody>
-      </p:sp>
-      <p:sp>
-        <p:nvSpPr>
-          <p:cNvPr id="21" name="Rounded Rectangle 20"/>
-          <p:cNvSpPr/>
-          <p:nvPr/>
-        </p:nvSpPr>
-        <p:spPr>
-          <a:xfrm>
-            <a:off x="4937759" y="3657600"/>
-            <a:ext cx="2834640" cy="777240"/>
-          </a:xfrm>
-          <a:prstGeom prst="roundRect">
-            <a:avLst/>
-          </a:prstGeom>
-          <a:solidFill>
-            <a:srgbClr val="ECE9F9"/>
-          </a:solidFill>
-          <a:ln>
-            <a:noFill/>
-          </a:ln>
-          <a:effectLst/>
-        </p:spPr>
-        <p:style>
-          <a:lnRef idx="1">
-            <a:schemeClr val="accent1"/>
-          </a:lnRef>
-          <a:fillRef idx="3">
-            <a:schemeClr val="accent1"/>
-          </a:fillRef>
-          <a:effectRef idx="2">
-            <a:schemeClr val="accent1"/>
-          </a:effectRef>
-          <a:fontRef idx="minor">
-            <a:schemeClr val="lt1"/>
-          </a:fontRef>
-        </p:style>
-        <p:txBody>
-          <a:bodyPr rtlCol="0" anchor="ctr"/>
-          <a:lstStyle/>
-          <a:p>
-            <a:pPr algn="ctr"/>
-          </a:p>
-        </p:txBody>
-      </p:sp>
-      <p:sp>
-        <p:nvSpPr>
-          <p:cNvPr id="22" name="TextBox 21"/>
-          <p:cNvSpPr txBox="1"/>
-          <p:nvPr/>
-        </p:nvSpPr>
-        <p:spPr>
-          <a:xfrm>
-            <a:off x="4937759" y="3657600"/>
-            <a:ext cx="2834640" cy="777240"/>
-          </a:xfrm>
-          <a:prstGeom prst="rect">
-            <a:avLst/>
-          </a:prstGeom>
-          <a:noFill/>
-        </p:spPr>
-        <p:txBody>
-          <a:bodyPr wrap="square" anchor="ctr" lIns="0" rIns="0" tIns="0" bIns="0">
+              <a:t>LLM + contexto</a:t>
+            </a:r>
+          </a:p>
+        </p:txBody>
+      </p:sp>
+      <p:sp>
+        <p:nvSpPr>
+          <p:cNvPr id="38" name="TextBox 37"/>
+          <p:cNvSpPr txBox="1"/>
+          <p:nvPr/>
+        </p:nvSpPr>
+        <p:spPr>
+          <a:xfrm>
+            <a:off x="9528047" y="4343400"/>
+            <a:ext cx="1965960" cy="292608"/>
+          </a:xfrm>
+          <a:prstGeom prst="rect">
+            <a:avLst/>
+          </a:prstGeom>
+          <a:noFill/>
+        </p:spPr>
+        <p:txBody>
+          <a:bodyPr wrap="square" anchor="t" lIns="0" rIns="0" tIns="0" bIns="0">
             <a:spAutoFit/>
           </a:bodyPr>
           <a:lstStyle/>
@@ -15294,27 +15231,27 @@
               </a:spcAft>
             </a:pPr>
             <a:r>
-              <a:rPr sz="1650" b="1" i="0">
-                <a:solidFill>
-                  <a:srgbClr val="1A164B"/>
-                </a:solidFill>
-                <a:latin typeface="Cambria Math"/>
-              </a:rPr>
-              <a:t>d(a,b) = √ Σ (aᵢ − bᵢ)²</a:t>
-            </a:r>
-          </a:p>
-        </p:txBody>
-      </p:sp>
-      <p:sp>
-        <p:nvSpPr>
-          <p:cNvPr id="23" name="TextBox 22"/>
-          <p:cNvSpPr txBox="1"/>
-          <p:nvPr/>
-        </p:nvSpPr>
-        <p:spPr>
-          <a:xfrm>
-            <a:off x="4892040" y="4663440"/>
-            <a:ext cx="2926080" cy="365760"/>
+              <a:rPr sz="1150" b="0" i="0">
+                <a:solidFill>
+                  <a:srgbClr val="6B6682"/>
+                </a:solidFill>
+                <a:latin typeface="Segoe UI"/>
+              </a:rPr>
+              <a:t>Respuesta</a:t>
+            </a:r>
+          </a:p>
+        </p:txBody>
+      </p:sp>
+      <p:sp>
+        <p:nvSpPr>
+          <p:cNvPr id="39" name="TextBox 38"/>
+          <p:cNvSpPr txBox="1"/>
+          <p:nvPr/>
+        </p:nvSpPr>
+        <p:spPr>
+          <a:xfrm>
+            <a:off x="9528047" y="4636008"/>
+            <a:ext cx="1965960" cy="292608"/>
           </a:xfrm>
           <a:prstGeom prst="rect">
             <a:avLst/>
@@ -15339,601 +15276,20 @@
               </a:spcAft>
             </a:pPr>
             <a:r>
-              <a:rPr sz="1250" b="0" i="0">
+              <a:rPr sz="1150" b="0" i="0">
                 <a:solidFill>
                   <a:srgbClr val="6B6682"/>
                 </a:solidFill>
                 <a:latin typeface="Segoe UI"/>
               </a:rPr>
-              <a:t>Distancia en línea recta.</a:t>
-            </a:r>
-          </a:p>
-        </p:txBody>
-      </p:sp>
-      <p:sp>
-        <p:nvSpPr>
-          <p:cNvPr id="24" name="TextBox 23"/>
-          <p:cNvSpPr txBox="1"/>
-          <p:nvPr/>
-        </p:nvSpPr>
-        <p:spPr>
-          <a:xfrm>
-            <a:off x="4892040" y="5047488"/>
-            <a:ext cx="2926080" cy="365760"/>
-          </a:xfrm>
-          <a:prstGeom prst="rect">
-            <a:avLst/>
-          </a:prstGeom>
-          <a:noFill/>
-        </p:spPr>
-        <p:txBody>
-          <a:bodyPr wrap="square" anchor="t" lIns="0" rIns="0" tIns="0" bIns="0">
-            <a:spAutoFit/>
-          </a:bodyPr>
-          <a:lstStyle/>
-          <a:p>
-            <a:pPr algn="ctr">
-              <a:lnSpc>
-                <a:spcPct val="100000"/>
-              </a:lnSpc>
-              <a:spcBef>
-                <a:spcPts val="0"/>
-              </a:spcBef>
-              <a:spcAft>
-                <a:spcPts val="0"/>
-              </a:spcAft>
-            </a:pPr>
-            <a:r>
-              <a:rPr sz="1250" b="0" i="0">
-                <a:solidFill>
-                  <a:srgbClr val="6B6682"/>
-                </a:solidFill>
-                <a:latin typeface="Segoe UI"/>
-              </a:rPr>
-              <a:t>Menor = más cercanos.</a:t>
-            </a:r>
-          </a:p>
-        </p:txBody>
-      </p:sp>
-      <p:sp>
-        <p:nvSpPr>
-          <p:cNvPr id="25" name="TextBox 24"/>
-          <p:cNvSpPr txBox="1"/>
-          <p:nvPr/>
-        </p:nvSpPr>
-        <p:spPr>
-          <a:xfrm>
-            <a:off x="4892040" y="5431536"/>
-            <a:ext cx="2926080" cy="365760"/>
-          </a:xfrm>
-          <a:prstGeom prst="rect">
-            <a:avLst/>
-          </a:prstGeom>
-          <a:noFill/>
-        </p:spPr>
-        <p:txBody>
-          <a:bodyPr wrap="square" anchor="t" lIns="0" rIns="0" tIns="0" bIns="0">
-            <a:spAutoFit/>
-          </a:bodyPr>
-          <a:lstStyle/>
-          <a:p>
-            <a:pPr algn="ctr">
-              <a:lnSpc>
-                <a:spcPct val="100000"/>
-              </a:lnSpc>
-              <a:spcBef>
-                <a:spcPts val="0"/>
-              </a:spcBef>
-              <a:spcAft>
-                <a:spcPts val="0"/>
-              </a:spcAft>
-            </a:pPr>
-            <a:r>
-              <a:rPr sz="1250" b="0" i="0">
-                <a:solidFill>
-                  <a:srgbClr val="6B6682"/>
-                </a:solidFill>
-                <a:latin typeface="Segoe UI"/>
-              </a:rPr>
-              <a:t>FAISS la usa por defecto (L2).</a:t>
-            </a:r>
-          </a:p>
-        </p:txBody>
-      </p:sp>
-      <p:sp>
-        <p:nvSpPr>
-          <p:cNvPr id="26" name="Rounded Rectangle 25"/>
-          <p:cNvSpPr/>
-          <p:nvPr/>
-        </p:nvSpPr>
-        <p:spPr>
-          <a:xfrm>
-            <a:off x="8549640" y="1600200"/>
-            <a:ext cx="3383280" cy="4480560"/>
-          </a:xfrm>
-          <a:prstGeom prst="roundRect">
-            <a:avLst/>
-          </a:prstGeom>
-          <a:solidFill>
-            <a:srgbClr val="FFFFFF"/>
-          </a:solidFill>
-          <a:ln>
-            <a:noFill/>
-          </a:ln>
-          <a:effectLst/>
-        </p:spPr>
-        <p:style>
-          <a:lnRef idx="1">
-            <a:schemeClr val="accent1"/>
-          </a:lnRef>
-          <a:fillRef idx="3">
-            <a:schemeClr val="accent1"/>
-          </a:fillRef>
-          <a:effectRef idx="2">
-            <a:schemeClr val="accent1"/>
-          </a:effectRef>
-          <a:fontRef idx="minor">
-            <a:schemeClr val="lt1"/>
-          </a:fontRef>
-        </p:style>
-        <p:txBody>
-          <a:bodyPr rtlCol="0" anchor="ctr"/>
-          <a:lstStyle/>
-          <a:p>
-            <a:pPr algn="ctr"/>
-          </a:p>
-        </p:txBody>
-      </p:sp>
-      <p:sp>
-        <p:nvSpPr>
-          <p:cNvPr id="27" name="Rectangle 26"/>
-          <p:cNvSpPr/>
-          <p:nvPr/>
-        </p:nvSpPr>
-        <p:spPr>
-          <a:xfrm>
-            <a:off x="8549640" y="1600200"/>
-            <a:ext cx="3383280" cy="164592"/>
-          </a:xfrm>
-          <a:prstGeom prst="rect">
-            <a:avLst/>
-          </a:prstGeom>
-          <a:solidFill>
-            <a:srgbClr val="FB7185"/>
-          </a:solidFill>
-          <a:ln>
-            <a:noFill/>
-          </a:ln>
-          <a:effectLst/>
-        </p:spPr>
-        <p:style>
-          <a:lnRef idx="1">
-            <a:schemeClr val="accent1"/>
-          </a:lnRef>
-          <a:fillRef idx="3">
-            <a:schemeClr val="accent1"/>
-          </a:fillRef>
-          <a:effectRef idx="2">
-            <a:schemeClr val="accent1"/>
-          </a:effectRef>
-          <a:fontRef idx="minor">
-            <a:schemeClr val="lt1"/>
-          </a:fontRef>
-        </p:style>
-        <p:txBody>
-          <a:bodyPr rtlCol="0" anchor="ctr"/>
-          <a:lstStyle/>
-          <a:p>
-            <a:pPr algn="ctr"/>
-          </a:p>
-        </p:txBody>
-      </p:sp>
-      <p:sp>
-        <p:nvSpPr>
-          <p:cNvPr id="28" name="Oval 27"/>
-          <p:cNvSpPr/>
-          <p:nvPr/>
-        </p:nvSpPr>
-        <p:spPr>
-          <a:xfrm>
-            <a:off x="9738359" y="1965960"/>
-            <a:ext cx="1005840" cy="1005840"/>
-          </a:xfrm>
-          <a:prstGeom prst="ellipse">
-            <a:avLst/>
-          </a:prstGeom>
-          <a:solidFill>
-            <a:srgbClr val="FB7185"/>
-          </a:solidFill>
-          <a:ln>
-            <a:noFill/>
-          </a:ln>
-          <a:effectLst/>
-        </p:spPr>
-        <p:style>
-          <a:lnRef idx="1">
-            <a:schemeClr val="accent1"/>
-          </a:lnRef>
-          <a:fillRef idx="3">
-            <a:schemeClr val="accent1"/>
-          </a:fillRef>
-          <a:effectRef idx="2">
-            <a:schemeClr val="accent1"/>
-          </a:effectRef>
-          <a:fontRef idx="minor">
-            <a:schemeClr val="lt1"/>
-          </a:fontRef>
-        </p:style>
-        <p:txBody>
-          <a:bodyPr rtlCol="0" anchor="ctr"/>
-          <a:lstStyle/>
-          <a:p>
-            <a:pPr algn="ctr"/>
-          </a:p>
-        </p:txBody>
-      </p:sp>
-      <p:sp>
-        <p:nvSpPr>
-          <p:cNvPr id="29" name="TextBox 28"/>
-          <p:cNvSpPr txBox="1"/>
-          <p:nvPr/>
-        </p:nvSpPr>
-        <p:spPr>
-          <a:xfrm>
-            <a:off x="9738359" y="1947672"/>
-            <a:ext cx="1005840" cy="1005840"/>
-          </a:xfrm>
-          <a:prstGeom prst="rect">
-            <a:avLst/>
-          </a:prstGeom>
-          <a:noFill/>
-        </p:spPr>
-        <p:txBody>
-          <a:bodyPr wrap="square" anchor="ctr" lIns="0" rIns="0" tIns="0" bIns="0">
-            <a:spAutoFit/>
-          </a:bodyPr>
-          <a:lstStyle/>
-          <a:p>
-            <a:pPr algn="ctr">
-              <a:lnSpc>
-                <a:spcPct val="100000"/>
-              </a:lnSpc>
-              <a:spcBef>
-                <a:spcPts val="0"/>
-              </a:spcBef>
-              <a:spcAft>
-                <a:spcPts val="0"/>
-              </a:spcAft>
-            </a:pPr>
-            <a:r>
-              <a:rPr sz="3400" b="1" i="0">
-                <a:solidFill>
-                  <a:srgbClr val="FFFFFF"/>
-                </a:solidFill>
-                <a:latin typeface="Segoe UI Emoji"/>
-              </a:rPr>
-              <a:t>∠</a:t>
-            </a:r>
-          </a:p>
-        </p:txBody>
-      </p:sp>
-      <p:sp>
-        <p:nvSpPr>
-          <p:cNvPr id="30" name="TextBox 29"/>
-          <p:cNvSpPr txBox="1"/>
-          <p:nvPr/>
-        </p:nvSpPr>
-        <p:spPr>
-          <a:xfrm>
-            <a:off x="8549640" y="3108960"/>
-            <a:ext cx="3383280" cy="457200"/>
-          </a:xfrm>
-          <a:prstGeom prst="rect">
-            <a:avLst/>
-          </a:prstGeom>
-          <a:noFill/>
-        </p:spPr>
-        <p:txBody>
-          <a:bodyPr wrap="square" anchor="t" lIns="0" rIns="0" tIns="0" bIns="0">
-            <a:spAutoFit/>
-          </a:bodyPr>
-          <a:lstStyle/>
-          <a:p>
-            <a:pPr algn="ctr">
-              <a:lnSpc>
-                <a:spcPct val="100000"/>
-              </a:lnSpc>
-              <a:spcBef>
-                <a:spcPts val="0"/>
-              </a:spcBef>
-              <a:spcAft>
-                <a:spcPts val="0"/>
-              </a:spcAft>
-            </a:pPr>
-            <a:r>
-              <a:rPr sz="1800" b="1" i="0">
-                <a:solidFill>
-                  <a:srgbClr val="1E1B2E"/>
-                </a:solidFill>
-                <a:latin typeface="Segoe UI Semibold"/>
-              </a:rPr>
-              <a:t>Similitud coseno</a:t>
-            </a:r>
-          </a:p>
-        </p:txBody>
-      </p:sp>
-      <p:sp>
-        <p:nvSpPr>
-          <p:cNvPr id="31" name="Rounded Rectangle 30"/>
-          <p:cNvSpPr/>
-          <p:nvPr/>
-        </p:nvSpPr>
-        <p:spPr>
-          <a:xfrm>
-            <a:off x="8823960" y="3657600"/>
-            <a:ext cx="2834640" cy="777240"/>
-          </a:xfrm>
-          <a:prstGeom prst="roundRect">
-            <a:avLst/>
-          </a:prstGeom>
-          <a:solidFill>
-            <a:srgbClr val="ECE9F9"/>
-          </a:solidFill>
-          <a:ln>
-            <a:noFill/>
-          </a:ln>
-          <a:effectLst/>
-        </p:spPr>
-        <p:style>
-          <a:lnRef idx="1">
-            <a:schemeClr val="accent1"/>
-          </a:lnRef>
-          <a:fillRef idx="3">
-            <a:schemeClr val="accent1"/>
-          </a:fillRef>
-          <a:effectRef idx="2">
-            <a:schemeClr val="accent1"/>
-          </a:effectRef>
-          <a:fontRef idx="minor">
-            <a:schemeClr val="lt1"/>
-          </a:fontRef>
-        </p:style>
-        <p:txBody>
-          <a:bodyPr rtlCol="0" anchor="ctr"/>
-          <a:lstStyle/>
-          <a:p>
-            <a:pPr algn="ctr"/>
-          </a:p>
-        </p:txBody>
-      </p:sp>
-      <p:sp>
-        <p:nvSpPr>
-          <p:cNvPr id="32" name="TextBox 31"/>
-          <p:cNvSpPr txBox="1"/>
-          <p:nvPr/>
-        </p:nvSpPr>
-        <p:spPr>
-          <a:xfrm>
-            <a:off x="8823960" y="3657600"/>
-            <a:ext cx="2834640" cy="777240"/>
-          </a:xfrm>
-          <a:prstGeom prst="rect">
-            <a:avLst/>
-          </a:prstGeom>
-          <a:noFill/>
-        </p:spPr>
-        <p:txBody>
-          <a:bodyPr wrap="square" anchor="ctr" lIns="0" rIns="0" tIns="0" bIns="0">
-            <a:spAutoFit/>
-          </a:bodyPr>
-          <a:lstStyle/>
-          <a:p>
-            <a:pPr algn="ctr">
-              <a:lnSpc>
-                <a:spcPct val="100000"/>
-              </a:lnSpc>
-              <a:spcBef>
-                <a:spcPts val="0"/>
-              </a:spcBef>
-              <a:spcAft>
-                <a:spcPts val="0"/>
-              </a:spcAft>
-            </a:pPr>
-            <a:r>
-              <a:rPr sz="1650" b="1" i="0">
-                <a:solidFill>
-                  <a:srgbClr val="1A164B"/>
-                </a:solidFill>
-                <a:latin typeface="Cambria Math"/>
-              </a:rPr>
-              <a:t>cos θ = (a · b) / (‖a‖ ‖b‖)</a:t>
-            </a:r>
-          </a:p>
-        </p:txBody>
-      </p:sp>
-      <p:sp>
-        <p:nvSpPr>
-          <p:cNvPr id="33" name="TextBox 32"/>
-          <p:cNvSpPr txBox="1"/>
-          <p:nvPr/>
-        </p:nvSpPr>
-        <p:spPr>
-          <a:xfrm>
-            <a:off x="8778240" y="4663440"/>
-            <a:ext cx="2926080" cy="365760"/>
-          </a:xfrm>
-          <a:prstGeom prst="rect">
-            <a:avLst/>
-          </a:prstGeom>
-          <a:noFill/>
-        </p:spPr>
-        <p:txBody>
-          <a:bodyPr wrap="square" anchor="t" lIns="0" rIns="0" tIns="0" bIns="0">
-            <a:spAutoFit/>
-          </a:bodyPr>
-          <a:lstStyle/>
-          <a:p>
-            <a:pPr algn="ctr">
-              <a:lnSpc>
-                <a:spcPct val="100000"/>
-              </a:lnSpc>
-              <a:spcBef>
-                <a:spcPts val="0"/>
-              </a:spcBef>
-              <a:spcAft>
-                <a:spcPts val="0"/>
-              </a:spcAft>
-            </a:pPr>
-            <a:r>
-              <a:rPr sz="1250" b="0" i="0">
-                <a:solidFill>
-                  <a:srgbClr val="6B6682"/>
-                </a:solidFill>
-                <a:latin typeface="Segoe UI"/>
-              </a:rPr>
-              <a:t>Mide el ángulo; ignora la</a:t>
-            </a:r>
-          </a:p>
-        </p:txBody>
-      </p:sp>
-      <p:sp>
-        <p:nvSpPr>
-          <p:cNvPr id="34" name="TextBox 33"/>
-          <p:cNvSpPr txBox="1"/>
-          <p:nvPr/>
-        </p:nvSpPr>
-        <p:spPr>
-          <a:xfrm>
-            <a:off x="8778240" y="5047488"/>
-            <a:ext cx="2926080" cy="365760"/>
-          </a:xfrm>
-          <a:prstGeom prst="rect">
-            <a:avLst/>
-          </a:prstGeom>
-          <a:noFill/>
-        </p:spPr>
-        <p:txBody>
-          <a:bodyPr wrap="square" anchor="t" lIns="0" rIns="0" tIns="0" bIns="0">
-            <a:spAutoFit/>
-          </a:bodyPr>
-          <a:lstStyle/>
-          <a:p>
-            <a:pPr algn="ctr">
-              <a:lnSpc>
-                <a:spcPct val="100000"/>
-              </a:lnSpc>
-              <a:spcBef>
-                <a:spcPts val="0"/>
-              </a:spcBef>
-              <a:spcAft>
-                <a:spcPts val="0"/>
-              </a:spcAft>
-            </a:pPr>
-            <a:r>
-              <a:rPr sz="1250" b="0" i="0">
-                <a:solidFill>
-                  <a:srgbClr val="6B6682"/>
-                </a:solidFill>
-                <a:latin typeface="Segoe UI"/>
-              </a:rPr>
-              <a:t>magnitud del vector.</a:t>
-            </a:r>
-          </a:p>
-        </p:txBody>
-      </p:sp>
-      <p:sp>
-        <p:nvSpPr>
-          <p:cNvPr id="35" name="TextBox 34"/>
-          <p:cNvSpPr txBox="1"/>
-          <p:nvPr/>
-        </p:nvSpPr>
-        <p:spPr>
-          <a:xfrm>
-            <a:off x="8778240" y="5431536"/>
-            <a:ext cx="2926080" cy="365760"/>
-          </a:xfrm>
-          <a:prstGeom prst="rect">
-            <a:avLst/>
-          </a:prstGeom>
-          <a:noFill/>
-        </p:spPr>
-        <p:txBody>
-          <a:bodyPr wrap="square" anchor="t" lIns="0" rIns="0" tIns="0" bIns="0">
-            <a:spAutoFit/>
-          </a:bodyPr>
-          <a:lstStyle/>
-          <a:p>
-            <a:pPr algn="ctr">
-              <a:lnSpc>
-                <a:spcPct val="100000"/>
-              </a:lnSpc>
-              <a:spcBef>
-                <a:spcPts val="0"/>
-              </a:spcBef>
-              <a:spcAft>
-                <a:spcPts val="0"/>
-              </a:spcAft>
-            </a:pPr>
-            <a:r>
-              <a:rPr sz="1250" b="0" i="0">
-                <a:solidFill>
-                  <a:srgbClr val="6B6682"/>
-                </a:solidFill>
-                <a:latin typeface="Segoe UI"/>
-              </a:rPr>
-              <a:t>1 = iguales · 0 = sin relación.</a:t>
-            </a:r>
-          </a:p>
-        </p:txBody>
-      </p:sp>
-      <p:sp>
-        <p:nvSpPr>
-          <p:cNvPr id="36" name="TextBox 35"/>
-          <p:cNvSpPr txBox="1"/>
-          <p:nvPr/>
-        </p:nvSpPr>
-        <p:spPr>
-          <a:xfrm>
-            <a:off x="777240" y="6217920"/>
-            <a:ext cx="10881360" cy="365760"/>
-          </a:xfrm>
-          <a:prstGeom prst="rect">
-            <a:avLst/>
-          </a:prstGeom>
-          <a:noFill/>
-        </p:spPr>
-        <p:txBody>
-          <a:bodyPr wrap="square" anchor="t" lIns="0" rIns="0" tIns="0" bIns="0">
-            <a:spAutoFit/>
-          </a:bodyPr>
-          <a:lstStyle/>
-          <a:p>
-            <a:pPr algn="ctr">
-              <a:lnSpc>
-                <a:spcPct val="100000"/>
-              </a:lnSpc>
-              <a:spcBef>
-                <a:spcPts val="0"/>
-              </a:spcBef>
-              <a:spcAft>
-                <a:spcPts val="0"/>
-              </a:spcAft>
-            </a:pPr>
-            <a:r>
-              <a:rPr sz="1150" b="0" i="1">
-                <a:solidFill>
-                  <a:srgbClr val="6B6682"/>
-                </a:solidFill>
-                <a:latin typeface="Segoe UI"/>
-              </a:rPr>
-              <a:t>a, b = embeddings · ‖a‖ = magnitud (norma) del vector · Σ = suma de todas las componentes</a:t>
-            </a:r>
-          </a:p>
-        </p:txBody>
-      </p:sp>
-      <p:sp>
-        <p:nvSpPr>
-          <p:cNvPr id="37" name="TextBox 36"/>
+              <a:t>fundamentada</a:t>
+            </a:r>
+          </a:p>
+        </p:txBody>
+      </p:sp>
+      <p:sp>
+        <p:nvSpPr>
+          <p:cNvPr id="40" name="TextBox 39"/>
           <p:cNvSpPr txBox="1"/>
           <p:nvPr/>
         </p:nvSpPr>
@@ -15978,7 +15334,7 @@
       </p:sp>
       <p:sp>
         <p:nvSpPr>
-          <p:cNvPr id="38" name="TextBox 37"/>
+          <p:cNvPr id="41" name="TextBox 40"/>
           <p:cNvSpPr txBox="1"/>
           <p:nvPr/>
         </p:nvSpPr>
@@ -16106,7 +15462,7 @@
             <a:avLst/>
           </a:prstGeom>
           <a:solidFill>
-            <a:srgbClr val="FBBF24"/>
+            <a:srgbClr val="22D3EE"/>
           </a:solidFill>
           <a:ln>
             <a:noFill/>
@@ -16169,13 +15525,13 @@
               </a:spcAft>
             </a:pPr>
             <a:r>
-              <a:rPr sz="3000" b="1" i="0">
+              <a:rPr sz="3200" b="1" i="0">
                 <a:solidFill>
                   <a:srgbClr val="FFFFFF"/>
                 </a:solidFill>
                 <a:latin typeface="Segoe UI Semibold"/>
               </a:rPr>
-              <a:t>Búsqueda por palabras clave: TF-IDF y BM25</a:t>
+              <a:t>¿Cómo se mide la similitud?</a:t>
             </a:r>
           </a:p>
         </p:txBody>
@@ -16220,7 +15576,7 @@
                 </a:solidFill>
                 <a:latin typeface="Segoe UI"/>
               </a:rPr>
-              <a:t>Recuperación léxica (por términos exactos) · complementa a los embeddings</a:t>
+              <a:t>Comparar dos embeddings (vectores) para encontrar el más parecido</a:t>
             </a:r>
           </a:p>
         </p:txBody>
@@ -16233,8 +15589,8 @@
         </p:nvSpPr>
         <p:spPr>
           <a:xfrm>
-            <a:off x="640080" y="1554480"/>
-            <a:ext cx="10927080" cy="1874519"/>
+            <a:off x="777240" y="1600200"/>
+            <a:ext cx="3383280" cy="4480560"/>
           </a:xfrm>
           <a:prstGeom prst="roundRect">
             <a:avLst/>
@@ -16277,14 +15633,14 @@
         </p:nvSpPr>
         <p:spPr>
           <a:xfrm>
-            <a:off x="640080" y="1554480"/>
-            <a:ext cx="137160" cy="1874519"/>
+            <a:off x="777240" y="1600200"/>
+            <a:ext cx="3383280" cy="164592"/>
           </a:xfrm>
           <a:prstGeom prst="rect">
             <a:avLst/>
           </a:prstGeom>
           <a:solidFill>
-            <a:srgbClr val="FBBF24"/>
+            <a:srgbClr val="22D3EE"/>
           </a:solidFill>
           <a:ln>
             <a:noFill/>
@@ -16321,14 +15677,14 @@
         </p:nvSpPr>
         <p:spPr>
           <a:xfrm>
-            <a:off x="1005840" y="1965960"/>
-            <a:ext cx="960120" cy="960120"/>
+            <a:off x="1965960" y="1965960"/>
+            <a:ext cx="1005840" cy="1005840"/>
           </a:xfrm>
           <a:prstGeom prst="ellipse">
             <a:avLst/>
           </a:prstGeom>
           <a:solidFill>
-            <a:srgbClr val="FBBF24"/>
+            <a:srgbClr val="22D3EE"/>
           </a:solidFill>
           <a:ln>
             <a:noFill/>
@@ -16365,8 +15721,8 @@
         </p:nvSpPr>
         <p:spPr>
           <a:xfrm>
-            <a:off x="1005840" y="1947672"/>
-            <a:ext cx="960120" cy="960120"/>
+            <a:off x="1965960" y="1947672"/>
+            <a:ext cx="1005840" cy="1005840"/>
           </a:xfrm>
           <a:prstGeom prst="rect">
             <a:avLst/>
@@ -16391,13 +15747,13 @@
               </a:spcAft>
             </a:pPr>
             <a:r>
-              <a:rPr sz="3200" b="1" i="0">
+              <a:rPr sz="3400" b="1" i="0">
                 <a:solidFill>
                   <a:srgbClr val="FFFFFF"/>
                 </a:solidFill>
                 <a:latin typeface="Segoe UI Emoji"/>
               </a:rPr>
-              <a:t>🔑</a:t>
+              <a:t>•</a:t>
             </a:r>
           </a:p>
         </p:txBody>
@@ -16410,8 +15766,8 @@
         </p:nvSpPr>
         <p:spPr>
           <a:xfrm>
-            <a:off x="2240280" y="1737360"/>
-            <a:ext cx="3657600" cy="411480"/>
+            <a:off x="777240" y="3108960"/>
+            <a:ext cx="3383280" cy="457200"/>
           </a:xfrm>
           <a:prstGeom prst="rect">
             <a:avLst/>
@@ -16424,129 +15780,39 @@
           </a:bodyPr>
           <a:lstStyle/>
           <a:p>
-            <a:pPr algn="l">
-              <a:lnSpc>
-                <a:spcPct val="100000"/>
-              </a:lnSpc>
-              <a:spcBef>
-                <a:spcPts val="0"/>
-              </a:spcBef>
-              <a:spcAft>
-                <a:spcPts val="0"/>
-              </a:spcAft>
-            </a:pPr>
-            <a:r>
-              <a:rPr sz="2100" b="1" i="0">
+            <a:pPr algn="ctr">
+              <a:lnSpc>
+                <a:spcPct val="100000"/>
+              </a:lnSpc>
+              <a:spcBef>
+                <a:spcPts val="0"/>
+              </a:spcBef>
+              <a:spcAft>
+                <a:spcPts val="0"/>
+              </a:spcAft>
+            </a:pPr>
+            <a:r>
+              <a:rPr sz="1800" b="1" i="0">
                 <a:solidFill>
                   <a:srgbClr val="1E1B2E"/>
                 </a:solidFill>
                 <a:latin typeface="Segoe UI Semibold"/>
               </a:rPr>
-              <a:t>TF-IDF</a:t>
-            </a:r>
-          </a:p>
-        </p:txBody>
-      </p:sp>
-      <p:sp>
-        <p:nvSpPr>
-          <p:cNvPr id="11" name="TextBox 10"/>
-          <p:cNvSpPr txBox="1"/>
-          <p:nvPr/>
-        </p:nvSpPr>
-        <p:spPr>
-          <a:xfrm>
-            <a:off x="2240280" y="2157984"/>
-            <a:ext cx="3657600" cy="320040"/>
-          </a:xfrm>
-          <a:prstGeom prst="rect">
-            <a:avLst/>
-          </a:prstGeom>
-          <a:noFill/>
-        </p:spPr>
-        <p:txBody>
-          <a:bodyPr wrap="square" anchor="t" lIns="0" rIns="0" tIns="0" bIns="0">
-            <a:spAutoFit/>
-          </a:bodyPr>
-          <a:lstStyle/>
-          <a:p>
-            <a:pPr algn="l">
-              <a:lnSpc>
-                <a:spcPct val="100000"/>
-              </a:lnSpc>
-              <a:spcBef>
-                <a:spcPts val="0"/>
-              </a:spcBef>
-              <a:spcAft>
-                <a:spcPts val="0"/>
-              </a:spcAft>
-            </a:pPr>
-            <a:r>
-              <a:rPr sz="1150" b="0" i="1">
-                <a:solidFill>
-                  <a:srgbClr val="6B6682"/>
-                </a:solidFill>
-                <a:latin typeface="Segoe UI"/>
-              </a:rPr>
-              <a:t>Term Frequency – Inverse Document Frequency</a:t>
-            </a:r>
-          </a:p>
-        </p:txBody>
-      </p:sp>
-      <p:sp>
-        <p:nvSpPr>
-          <p:cNvPr id="12" name="TextBox 11"/>
-          <p:cNvSpPr txBox="1"/>
-          <p:nvPr/>
-        </p:nvSpPr>
-        <p:spPr>
-          <a:xfrm>
-            <a:off x="2240280" y="2560320"/>
-            <a:ext cx="3657600" cy="731520"/>
-          </a:xfrm>
-          <a:prstGeom prst="rect">
-            <a:avLst/>
-          </a:prstGeom>
-          <a:noFill/>
-        </p:spPr>
-        <p:txBody>
-          <a:bodyPr wrap="square" anchor="t" lIns="0" rIns="0" tIns="0" bIns="0">
-            <a:spAutoFit/>
-          </a:bodyPr>
-          <a:lstStyle/>
-          <a:p>
-            <a:pPr algn="l">
-              <a:lnSpc>
-                <a:spcPct val="105000"/>
-              </a:lnSpc>
-              <a:spcBef>
-                <a:spcPts val="0"/>
-              </a:spcBef>
-              <a:spcAft>
-                <a:spcPts val="0"/>
-              </a:spcAft>
-            </a:pPr>
-            <a:r>
-              <a:rPr sz="1250" b="0" i="0">
-                <a:solidFill>
-                  <a:srgbClr val="6B6682"/>
-                </a:solidFill>
-                <a:latin typeface="Segoe UI"/>
-              </a:rPr>
-              <a:t>Pesa un término por su frecuencia en el documento (tf) y su rareza en la colección (idf). Las palabras raras pesan más.</a:t>
-            </a:r>
-          </a:p>
-        </p:txBody>
-      </p:sp>
-      <p:sp>
-        <p:nvSpPr>
-          <p:cNvPr id="13" name="Rounded Rectangle 12"/>
+              <a:t>Producto punto</a:t>
+            </a:r>
+          </a:p>
+        </p:txBody>
+      </p:sp>
+      <p:sp>
+        <p:nvSpPr>
+          <p:cNvPr id="11" name="Rounded Rectangle 10"/>
           <p:cNvSpPr/>
           <p:nvPr/>
         </p:nvSpPr>
         <p:spPr>
           <a:xfrm>
-            <a:off x="6309360" y="1783080"/>
-            <a:ext cx="5029200" cy="1417320"/>
+            <a:off x="1051560" y="3657600"/>
+            <a:ext cx="2834640" cy="777240"/>
           </a:xfrm>
           <a:prstGeom prst="roundRect">
             <a:avLst/>
@@ -16583,81 +15849,194 @@
       </p:sp>
       <p:sp>
         <p:nvSpPr>
+          <p:cNvPr id="12" name="TextBox 11"/>
+          <p:cNvSpPr txBox="1"/>
+          <p:nvPr/>
+        </p:nvSpPr>
+        <p:spPr>
+          <a:xfrm>
+            <a:off x="1051560" y="3657600"/>
+            <a:ext cx="2834640" cy="777240"/>
+          </a:xfrm>
+          <a:prstGeom prst="rect">
+            <a:avLst/>
+          </a:prstGeom>
+          <a:noFill/>
+        </p:spPr>
+        <p:txBody>
+          <a:bodyPr wrap="square" anchor="ctr" lIns="0" rIns="0" tIns="0" bIns="0">
+            <a:spAutoFit/>
+          </a:bodyPr>
+          <a:lstStyle/>
+          <a:p>
+            <a:pPr algn="ctr">
+              <a:lnSpc>
+                <a:spcPct val="100000"/>
+              </a:lnSpc>
+              <a:spcBef>
+                <a:spcPts val="0"/>
+              </a:spcBef>
+              <a:spcAft>
+                <a:spcPts val="0"/>
+              </a:spcAft>
+            </a:pPr>
+            <a:r>
+              <a:rPr sz="1650" b="1" i="0">
+                <a:solidFill>
+                  <a:srgbClr val="1A164B"/>
+                </a:solidFill>
+                <a:latin typeface="Cambria Math"/>
+              </a:rPr>
+              <a:t>a · b = Σ aᵢ bᵢ</a:t>
+            </a:r>
+          </a:p>
+        </p:txBody>
+      </p:sp>
+      <p:sp>
+        <p:nvSpPr>
+          <p:cNvPr id="13" name="TextBox 12"/>
+          <p:cNvSpPr txBox="1"/>
+          <p:nvPr/>
+        </p:nvSpPr>
+        <p:spPr>
+          <a:xfrm>
+            <a:off x="1005840" y="4663440"/>
+            <a:ext cx="2926080" cy="365760"/>
+          </a:xfrm>
+          <a:prstGeom prst="rect">
+            <a:avLst/>
+          </a:prstGeom>
+          <a:noFill/>
+        </p:spPr>
+        <p:txBody>
+          <a:bodyPr wrap="square" anchor="t" lIns="0" rIns="0" tIns="0" bIns="0">
+            <a:spAutoFit/>
+          </a:bodyPr>
+          <a:lstStyle/>
+          <a:p>
+            <a:pPr algn="ctr">
+              <a:lnSpc>
+                <a:spcPct val="100000"/>
+              </a:lnSpc>
+              <a:spcBef>
+                <a:spcPts val="0"/>
+              </a:spcBef>
+              <a:spcAft>
+                <a:spcPts val="0"/>
+              </a:spcAft>
+            </a:pPr>
+            <a:r>
+              <a:rPr sz="1250" b="0" i="0">
+                <a:solidFill>
+                  <a:srgbClr val="6B6682"/>
+                </a:solidFill>
+                <a:latin typeface="Segoe UI"/>
+              </a:rPr>
+              <a:t>Multiplica y suma componente</a:t>
+            </a:r>
+          </a:p>
+        </p:txBody>
+      </p:sp>
+      <p:sp>
+        <p:nvSpPr>
           <p:cNvPr id="14" name="TextBox 13"/>
           <p:cNvSpPr txBox="1"/>
           <p:nvPr/>
         </p:nvSpPr>
         <p:spPr>
           <a:xfrm>
-            <a:off x="6309360" y="1783080"/>
-            <a:ext cx="5029200" cy="1417320"/>
-          </a:xfrm>
-          <a:prstGeom prst="rect">
-            <a:avLst/>
-          </a:prstGeom>
-          <a:noFill/>
-        </p:spPr>
-        <p:txBody>
-          <a:bodyPr wrap="square" anchor="ctr" lIns="0" rIns="0" tIns="0" bIns="0">
+            <a:off x="1005840" y="5047488"/>
+            <a:ext cx="2926080" cy="365760"/>
+          </a:xfrm>
+          <a:prstGeom prst="rect">
+            <a:avLst/>
+          </a:prstGeom>
+          <a:noFill/>
+        </p:spPr>
+        <p:txBody>
+          <a:bodyPr wrap="square" anchor="t" lIns="0" rIns="0" tIns="0" bIns="0">
             <a:spAutoFit/>
           </a:bodyPr>
           <a:lstStyle/>
           <a:p>
             <a:pPr algn="ctr">
               <a:lnSpc>
-                <a:spcPct val="130000"/>
-              </a:lnSpc>
-              <a:spcBef>
-                <a:spcPts val="0"/>
-              </a:spcBef>
-              <a:spcAft>
-                <a:spcPts val="400"/>
-              </a:spcAft>
-            </a:pPr>
-            <a:r>
-              <a:rPr sz="1600" b="1" i="0">
-                <a:solidFill>
-                  <a:srgbClr val="1A164B"/>
-                </a:solidFill>
-                <a:latin typeface="Cambria Math"/>
-              </a:rPr>
-              <a:t>tf-idf(t, d) = tf(t, d) × idf(t)</a:t>
-            </a:r>
-          </a:p>
+                <a:spcPct val="100000"/>
+              </a:lnSpc>
+              <a:spcBef>
+                <a:spcPts val="0"/>
+              </a:spcBef>
+              <a:spcAft>
+                <a:spcPts val="0"/>
+              </a:spcAft>
+            </a:pPr>
+            <a:r>
+              <a:rPr sz="1250" b="0" i="0">
+                <a:solidFill>
+                  <a:srgbClr val="6B6682"/>
+                </a:solidFill>
+                <a:latin typeface="Segoe UI"/>
+              </a:rPr>
+              <a:t>a componente.</a:t>
+            </a:r>
+          </a:p>
+        </p:txBody>
+      </p:sp>
+      <p:sp>
+        <p:nvSpPr>
+          <p:cNvPr id="15" name="TextBox 14"/>
+          <p:cNvSpPr txBox="1"/>
+          <p:nvPr/>
+        </p:nvSpPr>
+        <p:spPr>
+          <a:xfrm>
+            <a:off x="1005840" y="5431536"/>
+            <a:ext cx="2926080" cy="365760"/>
+          </a:xfrm>
+          <a:prstGeom prst="rect">
+            <a:avLst/>
+          </a:prstGeom>
+          <a:noFill/>
+        </p:spPr>
+        <p:txBody>
+          <a:bodyPr wrap="square" anchor="t" lIns="0" rIns="0" tIns="0" bIns="0">
+            <a:spAutoFit/>
+          </a:bodyPr>
+          <a:lstStyle/>
           <a:p>
             <a:pPr algn="ctr">
               <a:lnSpc>
-                <a:spcPct val="130000"/>
-              </a:lnSpc>
-              <a:spcBef>
-                <a:spcPts val="0"/>
-              </a:spcBef>
-              <a:spcAft>
-                <a:spcPts val="400"/>
-              </a:spcAft>
-            </a:pPr>
-            <a:r>
-              <a:rPr sz="1600" b="1" i="0">
-                <a:solidFill>
-                  <a:srgbClr val="1A164B"/>
-                </a:solidFill>
-                <a:latin typeface="Cambria Math"/>
-              </a:rPr>
-              <a:t>idf(t) = log( N / df(t) )</a:t>
-            </a:r>
-          </a:p>
-        </p:txBody>
-      </p:sp>
-      <p:sp>
-        <p:nvSpPr>
-          <p:cNvPr id="15" name="Rounded Rectangle 14"/>
+                <a:spcPct val="100000"/>
+              </a:lnSpc>
+              <a:spcBef>
+                <a:spcPts val="0"/>
+              </a:spcBef>
+              <a:spcAft>
+                <a:spcPts val="0"/>
+              </a:spcAft>
+            </a:pPr>
+            <a:r>
+              <a:rPr sz="1250" b="0" i="0">
+                <a:solidFill>
+                  <a:srgbClr val="6B6682"/>
+                </a:solidFill>
+                <a:latin typeface="Segoe UI"/>
+              </a:rPr>
+              <a:t>Mayor = más alineados.</a:t>
+            </a:r>
+          </a:p>
+        </p:txBody>
+      </p:sp>
+      <p:sp>
+        <p:nvSpPr>
+          <p:cNvPr id="16" name="Rounded Rectangle 15"/>
           <p:cNvSpPr/>
           <p:nvPr/>
         </p:nvSpPr>
         <p:spPr>
           <a:xfrm>
-            <a:off x="640080" y="3611880"/>
-            <a:ext cx="10927080" cy="2148840"/>
+            <a:off x="4663440" y="1600200"/>
+            <a:ext cx="3383280" cy="4480560"/>
           </a:xfrm>
           <a:prstGeom prst="roundRect">
             <a:avLst/>
@@ -16694,20 +16073,20 @@
       </p:sp>
       <p:sp>
         <p:nvSpPr>
-          <p:cNvPr id="16" name="Rectangle 15"/>
+          <p:cNvPr id="17" name="Rectangle 16"/>
           <p:cNvSpPr/>
           <p:nvPr/>
         </p:nvSpPr>
         <p:spPr>
           <a:xfrm>
-            <a:off x="640080" y="3611880"/>
-            <a:ext cx="137160" cy="2148840"/>
+            <a:off x="4663440" y="1600200"/>
+            <a:ext cx="3383280" cy="164592"/>
           </a:xfrm>
           <a:prstGeom prst="rect">
             <a:avLst/>
           </a:prstGeom>
           <a:solidFill>
-            <a:srgbClr val="8B5CF6"/>
+            <a:srgbClr val="6D28D9"/>
           </a:solidFill>
           <a:ln>
             <a:noFill/>
@@ -16738,20 +16117,20 @@
       </p:sp>
       <p:sp>
         <p:nvSpPr>
-          <p:cNvPr id="17" name="Oval 16"/>
+          <p:cNvPr id="18" name="Oval 17"/>
           <p:cNvSpPr/>
           <p:nvPr/>
         </p:nvSpPr>
         <p:spPr>
           <a:xfrm>
-            <a:off x="1005840" y="4160520"/>
-            <a:ext cx="960120" cy="960120"/>
+            <a:off x="5852159" y="1965960"/>
+            <a:ext cx="1005840" cy="1005840"/>
           </a:xfrm>
           <a:prstGeom prst="ellipse">
             <a:avLst/>
           </a:prstGeom>
           <a:solidFill>
-            <a:srgbClr val="8B5CF6"/>
+            <a:srgbClr val="6D28D9"/>
           </a:solidFill>
           <a:ln>
             <a:noFill/>
@@ -16782,14 +16161,14 @@
       </p:sp>
       <p:sp>
         <p:nvSpPr>
-          <p:cNvPr id="18" name="TextBox 17"/>
-          <p:cNvSpPr txBox="1"/>
-          <p:nvPr/>
-        </p:nvSpPr>
-        <p:spPr>
-          <a:xfrm>
-            <a:off x="1005840" y="4142232"/>
-            <a:ext cx="960120" cy="960120"/>
+          <p:cNvPr id="19" name="TextBox 18"/>
+          <p:cNvSpPr txBox="1"/>
+          <p:nvPr/>
+        </p:nvSpPr>
+        <p:spPr>
+          <a:xfrm>
+            <a:off x="5852159" y="1947672"/>
+            <a:ext cx="1005840" cy="1005840"/>
           </a:xfrm>
           <a:prstGeom prst="rect">
             <a:avLst/>
@@ -16814,27 +16193,27 @@
               </a:spcAft>
             </a:pPr>
             <a:r>
-              <a:rPr sz="3200" b="1" i="0">
+              <a:rPr sz="3400" b="1" i="0">
                 <a:solidFill>
                   <a:srgbClr val="FFFFFF"/>
                 </a:solidFill>
                 <a:latin typeface="Segoe UI Emoji"/>
               </a:rPr>
-              <a:t>📈</a:t>
-            </a:r>
-          </a:p>
-        </p:txBody>
-      </p:sp>
-      <p:sp>
-        <p:nvSpPr>
-          <p:cNvPr id="19" name="TextBox 18"/>
-          <p:cNvSpPr txBox="1"/>
-          <p:nvPr/>
-        </p:nvSpPr>
-        <p:spPr>
-          <a:xfrm>
-            <a:off x="2240280" y="3794760"/>
-            <a:ext cx="3749039" cy="411480"/>
+              <a:t>📏</a:t>
+            </a:r>
+          </a:p>
+        </p:txBody>
+      </p:sp>
+      <p:sp>
+        <p:nvSpPr>
+          <p:cNvPr id="20" name="TextBox 19"/>
+          <p:cNvSpPr txBox="1"/>
+          <p:nvPr/>
+        </p:nvSpPr>
+        <p:spPr>
+          <a:xfrm>
+            <a:off x="4663440" y="3108960"/>
+            <a:ext cx="3383280" cy="457200"/>
           </a:xfrm>
           <a:prstGeom prst="rect">
             <a:avLst/>
@@ -16847,129 +16226,39 @@
           </a:bodyPr>
           <a:lstStyle/>
           <a:p>
-            <a:pPr algn="l">
-              <a:lnSpc>
-                <a:spcPct val="100000"/>
-              </a:lnSpc>
-              <a:spcBef>
-                <a:spcPts val="0"/>
-              </a:spcBef>
-              <a:spcAft>
-                <a:spcPts val="0"/>
-              </a:spcAft>
-            </a:pPr>
-            <a:r>
-              <a:rPr sz="2100" b="1" i="0">
+            <a:pPr algn="ctr">
+              <a:lnSpc>
+                <a:spcPct val="100000"/>
+              </a:lnSpc>
+              <a:spcBef>
+                <a:spcPts val="0"/>
+              </a:spcBef>
+              <a:spcAft>
+                <a:spcPts val="0"/>
+              </a:spcAft>
+            </a:pPr>
+            <a:r>
+              <a:rPr sz="1800" b="1" i="0">
                 <a:solidFill>
                   <a:srgbClr val="1E1B2E"/>
                 </a:solidFill>
                 <a:latin typeface="Segoe UI Semibold"/>
               </a:rPr>
-              <a:t>BM25</a:t>
-            </a:r>
-          </a:p>
-        </p:txBody>
-      </p:sp>
-      <p:sp>
-        <p:nvSpPr>
-          <p:cNvPr id="20" name="TextBox 19"/>
-          <p:cNvSpPr txBox="1"/>
-          <p:nvPr/>
-        </p:nvSpPr>
-        <p:spPr>
-          <a:xfrm>
-            <a:off x="2240280" y="4215384"/>
-            <a:ext cx="3749039" cy="320040"/>
-          </a:xfrm>
-          <a:prstGeom prst="rect">
-            <a:avLst/>
-          </a:prstGeom>
-          <a:noFill/>
-        </p:spPr>
-        <p:txBody>
-          <a:bodyPr wrap="square" anchor="t" lIns="0" rIns="0" tIns="0" bIns="0">
-            <a:spAutoFit/>
-          </a:bodyPr>
-          <a:lstStyle/>
-          <a:p>
-            <a:pPr algn="l">
-              <a:lnSpc>
-                <a:spcPct val="100000"/>
-              </a:lnSpc>
-              <a:spcBef>
-                <a:spcPts val="0"/>
-              </a:spcBef>
-              <a:spcAft>
-                <a:spcPts val="0"/>
-              </a:spcAft>
-            </a:pPr>
-            <a:r>
-              <a:rPr sz="1150" b="0" i="1">
-                <a:solidFill>
-                  <a:srgbClr val="6B6682"/>
-                </a:solidFill>
-                <a:latin typeface="Segoe UI"/>
-              </a:rPr>
-              <a:t>Best Matching 25 · estándar en buscadores</a:t>
-            </a:r>
-          </a:p>
-        </p:txBody>
-      </p:sp>
-      <p:sp>
-        <p:nvSpPr>
-          <p:cNvPr id="21" name="TextBox 20"/>
-          <p:cNvSpPr txBox="1"/>
-          <p:nvPr/>
-        </p:nvSpPr>
-        <p:spPr>
-          <a:xfrm>
-            <a:off x="2240280" y="4617720"/>
-            <a:ext cx="3749039" cy="1005840"/>
-          </a:xfrm>
-          <a:prstGeom prst="rect">
-            <a:avLst/>
-          </a:prstGeom>
-          <a:noFill/>
-        </p:spPr>
-        <p:txBody>
-          <a:bodyPr wrap="square" anchor="t" lIns="0" rIns="0" tIns="0" bIns="0">
-            <a:spAutoFit/>
-          </a:bodyPr>
-          <a:lstStyle/>
-          <a:p>
-            <a:pPr algn="l">
-              <a:lnSpc>
-                <a:spcPct val="105000"/>
-              </a:lnSpc>
-              <a:spcBef>
-                <a:spcPts val="0"/>
-              </a:spcBef>
-              <a:spcAft>
-                <a:spcPts val="0"/>
-              </a:spcAft>
-            </a:pPr>
-            <a:r>
-              <a:rPr sz="1250" b="0" i="0">
-                <a:solidFill>
-                  <a:srgbClr val="6B6682"/>
-                </a:solidFill>
-                <a:latin typeface="Segoe UI"/>
-              </a:rPr>
-              <a:t>Evolución de TF-IDF: satura la frecuencia (k₁) y normaliza por la longitud del documento (b). Muy usado en motores de búsqueda.</a:t>
-            </a:r>
-          </a:p>
-        </p:txBody>
-      </p:sp>
-      <p:sp>
-        <p:nvSpPr>
-          <p:cNvPr id="22" name="Rounded Rectangle 21"/>
+              <a:t>Distancia euclidiana</a:t>
+            </a:r>
+          </a:p>
+        </p:txBody>
+      </p:sp>
+      <p:sp>
+        <p:nvSpPr>
+          <p:cNvPr id="21" name="Rounded Rectangle 20"/>
           <p:cNvSpPr/>
           <p:nvPr/>
         </p:nvSpPr>
         <p:spPr>
           <a:xfrm>
-            <a:off x="6309360" y="3840480"/>
-            <a:ext cx="5029200" cy="1691640"/>
+            <a:off x="4937759" y="3657600"/>
+            <a:ext cx="2834640" cy="777240"/>
           </a:xfrm>
           <a:prstGeom prst="roundRect">
             <a:avLst/>
@@ -17006,14 +16295,326 @@
       </p:sp>
       <p:sp>
         <p:nvSpPr>
+          <p:cNvPr id="22" name="TextBox 21"/>
+          <p:cNvSpPr txBox="1"/>
+          <p:nvPr/>
+        </p:nvSpPr>
+        <p:spPr>
+          <a:xfrm>
+            <a:off x="4937759" y="3657600"/>
+            <a:ext cx="2834640" cy="777240"/>
+          </a:xfrm>
+          <a:prstGeom prst="rect">
+            <a:avLst/>
+          </a:prstGeom>
+          <a:noFill/>
+        </p:spPr>
+        <p:txBody>
+          <a:bodyPr wrap="square" anchor="ctr" lIns="0" rIns="0" tIns="0" bIns="0">
+            <a:spAutoFit/>
+          </a:bodyPr>
+          <a:lstStyle/>
+          <a:p>
+            <a:pPr algn="ctr">
+              <a:lnSpc>
+                <a:spcPct val="100000"/>
+              </a:lnSpc>
+              <a:spcBef>
+                <a:spcPts val="0"/>
+              </a:spcBef>
+              <a:spcAft>
+                <a:spcPts val="0"/>
+              </a:spcAft>
+            </a:pPr>
+            <a:r>
+              <a:rPr sz="1650" b="1" i="0">
+                <a:solidFill>
+                  <a:srgbClr val="1A164B"/>
+                </a:solidFill>
+                <a:latin typeface="Cambria Math"/>
+              </a:rPr>
+              <a:t>d(a,b) = √ Σ (aᵢ − bᵢ)²</a:t>
+            </a:r>
+          </a:p>
+        </p:txBody>
+      </p:sp>
+      <p:sp>
+        <p:nvSpPr>
           <p:cNvPr id="23" name="TextBox 22"/>
           <p:cNvSpPr txBox="1"/>
           <p:nvPr/>
         </p:nvSpPr>
         <p:spPr>
           <a:xfrm>
-            <a:off x="6355080" y="3840480"/>
-            <a:ext cx="4937760" cy="1691640"/>
+            <a:off x="4892040" y="4663440"/>
+            <a:ext cx="2926080" cy="365760"/>
+          </a:xfrm>
+          <a:prstGeom prst="rect">
+            <a:avLst/>
+          </a:prstGeom>
+          <a:noFill/>
+        </p:spPr>
+        <p:txBody>
+          <a:bodyPr wrap="square" anchor="t" lIns="0" rIns="0" tIns="0" bIns="0">
+            <a:spAutoFit/>
+          </a:bodyPr>
+          <a:lstStyle/>
+          <a:p>
+            <a:pPr algn="ctr">
+              <a:lnSpc>
+                <a:spcPct val="100000"/>
+              </a:lnSpc>
+              <a:spcBef>
+                <a:spcPts val="0"/>
+              </a:spcBef>
+              <a:spcAft>
+                <a:spcPts val="0"/>
+              </a:spcAft>
+            </a:pPr>
+            <a:r>
+              <a:rPr sz="1250" b="0" i="0">
+                <a:solidFill>
+                  <a:srgbClr val="6B6682"/>
+                </a:solidFill>
+                <a:latin typeface="Segoe UI"/>
+              </a:rPr>
+              <a:t>Distancia en línea recta.</a:t>
+            </a:r>
+          </a:p>
+        </p:txBody>
+      </p:sp>
+      <p:sp>
+        <p:nvSpPr>
+          <p:cNvPr id="24" name="TextBox 23"/>
+          <p:cNvSpPr txBox="1"/>
+          <p:nvPr/>
+        </p:nvSpPr>
+        <p:spPr>
+          <a:xfrm>
+            <a:off x="4892040" y="5047488"/>
+            <a:ext cx="2926080" cy="365760"/>
+          </a:xfrm>
+          <a:prstGeom prst="rect">
+            <a:avLst/>
+          </a:prstGeom>
+          <a:noFill/>
+        </p:spPr>
+        <p:txBody>
+          <a:bodyPr wrap="square" anchor="t" lIns="0" rIns="0" tIns="0" bIns="0">
+            <a:spAutoFit/>
+          </a:bodyPr>
+          <a:lstStyle/>
+          <a:p>
+            <a:pPr algn="ctr">
+              <a:lnSpc>
+                <a:spcPct val="100000"/>
+              </a:lnSpc>
+              <a:spcBef>
+                <a:spcPts val="0"/>
+              </a:spcBef>
+              <a:spcAft>
+                <a:spcPts val="0"/>
+              </a:spcAft>
+            </a:pPr>
+            <a:r>
+              <a:rPr sz="1250" b="0" i="0">
+                <a:solidFill>
+                  <a:srgbClr val="6B6682"/>
+                </a:solidFill>
+                <a:latin typeface="Segoe UI"/>
+              </a:rPr>
+              <a:t>Menor = más cercanos.</a:t>
+            </a:r>
+          </a:p>
+        </p:txBody>
+      </p:sp>
+      <p:sp>
+        <p:nvSpPr>
+          <p:cNvPr id="25" name="TextBox 24"/>
+          <p:cNvSpPr txBox="1"/>
+          <p:nvPr/>
+        </p:nvSpPr>
+        <p:spPr>
+          <a:xfrm>
+            <a:off x="4892040" y="5431536"/>
+            <a:ext cx="2926080" cy="365760"/>
+          </a:xfrm>
+          <a:prstGeom prst="rect">
+            <a:avLst/>
+          </a:prstGeom>
+          <a:noFill/>
+        </p:spPr>
+        <p:txBody>
+          <a:bodyPr wrap="square" anchor="t" lIns="0" rIns="0" tIns="0" bIns="0">
+            <a:spAutoFit/>
+          </a:bodyPr>
+          <a:lstStyle/>
+          <a:p>
+            <a:pPr algn="ctr">
+              <a:lnSpc>
+                <a:spcPct val="100000"/>
+              </a:lnSpc>
+              <a:spcBef>
+                <a:spcPts val="0"/>
+              </a:spcBef>
+              <a:spcAft>
+                <a:spcPts val="0"/>
+              </a:spcAft>
+            </a:pPr>
+            <a:r>
+              <a:rPr sz="1250" b="0" i="0">
+                <a:solidFill>
+                  <a:srgbClr val="6B6682"/>
+                </a:solidFill>
+                <a:latin typeface="Segoe UI"/>
+              </a:rPr>
+              <a:t>FAISS la usa por defecto (L2).</a:t>
+            </a:r>
+          </a:p>
+        </p:txBody>
+      </p:sp>
+      <p:sp>
+        <p:nvSpPr>
+          <p:cNvPr id="26" name="Rounded Rectangle 25"/>
+          <p:cNvSpPr/>
+          <p:nvPr/>
+        </p:nvSpPr>
+        <p:spPr>
+          <a:xfrm>
+            <a:off x="8549640" y="1600200"/>
+            <a:ext cx="3383280" cy="4480560"/>
+          </a:xfrm>
+          <a:prstGeom prst="roundRect">
+            <a:avLst/>
+          </a:prstGeom>
+          <a:solidFill>
+            <a:srgbClr val="FFFFFF"/>
+          </a:solidFill>
+          <a:ln>
+            <a:noFill/>
+          </a:ln>
+          <a:effectLst/>
+        </p:spPr>
+        <p:style>
+          <a:lnRef idx="1">
+            <a:schemeClr val="accent1"/>
+          </a:lnRef>
+          <a:fillRef idx="3">
+            <a:schemeClr val="accent1"/>
+          </a:fillRef>
+          <a:effectRef idx="2">
+            <a:schemeClr val="accent1"/>
+          </a:effectRef>
+          <a:fontRef idx="minor">
+            <a:schemeClr val="lt1"/>
+          </a:fontRef>
+        </p:style>
+        <p:txBody>
+          <a:bodyPr rtlCol="0" anchor="ctr"/>
+          <a:lstStyle/>
+          <a:p>
+            <a:pPr algn="ctr"/>
+          </a:p>
+        </p:txBody>
+      </p:sp>
+      <p:sp>
+        <p:nvSpPr>
+          <p:cNvPr id="27" name="Rectangle 26"/>
+          <p:cNvSpPr/>
+          <p:nvPr/>
+        </p:nvSpPr>
+        <p:spPr>
+          <a:xfrm>
+            <a:off x="8549640" y="1600200"/>
+            <a:ext cx="3383280" cy="164592"/>
+          </a:xfrm>
+          <a:prstGeom prst="rect">
+            <a:avLst/>
+          </a:prstGeom>
+          <a:solidFill>
+            <a:srgbClr val="FB7185"/>
+          </a:solidFill>
+          <a:ln>
+            <a:noFill/>
+          </a:ln>
+          <a:effectLst/>
+        </p:spPr>
+        <p:style>
+          <a:lnRef idx="1">
+            <a:schemeClr val="accent1"/>
+          </a:lnRef>
+          <a:fillRef idx="3">
+            <a:schemeClr val="accent1"/>
+          </a:fillRef>
+          <a:effectRef idx="2">
+            <a:schemeClr val="accent1"/>
+          </a:effectRef>
+          <a:fontRef idx="minor">
+            <a:schemeClr val="lt1"/>
+          </a:fontRef>
+        </p:style>
+        <p:txBody>
+          <a:bodyPr rtlCol="0" anchor="ctr"/>
+          <a:lstStyle/>
+          <a:p>
+            <a:pPr algn="ctr"/>
+          </a:p>
+        </p:txBody>
+      </p:sp>
+      <p:sp>
+        <p:nvSpPr>
+          <p:cNvPr id="28" name="Oval 27"/>
+          <p:cNvSpPr/>
+          <p:nvPr/>
+        </p:nvSpPr>
+        <p:spPr>
+          <a:xfrm>
+            <a:off x="9738359" y="1965960"/>
+            <a:ext cx="1005840" cy="1005840"/>
+          </a:xfrm>
+          <a:prstGeom prst="ellipse">
+            <a:avLst/>
+          </a:prstGeom>
+          <a:solidFill>
+            <a:srgbClr val="FB7185"/>
+          </a:solidFill>
+          <a:ln>
+            <a:noFill/>
+          </a:ln>
+          <a:effectLst/>
+        </p:spPr>
+        <p:style>
+          <a:lnRef idx="1">
+            <a:schemeClr val="accent1"/>
+          </a:lnRef>
+          <a:fillRef idx="3">
+            <a:schemeClr val="accent1"/>
+          </a:fillRef>
+          <a:effectRef idx="2">
+            <a:schemeClr val="accent1"/>
+          </a:effectRef>
+          <a:fontRef idx="minor">
+            <a:schemeClr val="lt1"/>
+          </a:fontRef>
+        </p:style>
+        <p:txBody>
+          <a:bodyPr rtlCol="0" anchor="ctr"/>
+          <a:lstStyle/>
+          <a:p>
+            <a:pPr algn="ctr"/>
+          </a:p>
+        </p:txBody>
+      </p:sp>
+      <p:sp>
+        <p:nvSpPr>
+          <p:cNvPr id="29" name="TextBox 28"/>
+          <p:cNvSpPr txBox="1"/>
+          <p:nvPr/>
+        </p:nvSpPr>
+        <p:spPr>
+          <a:xfrm>
+            <a:off x="9738359" y="1947672"/>
+            <a:ext cx="1005840" cy="1005840"/>
           </a:xfrm>
           <a:prstGeom prst="rect">
             <a:avLst/>
@@ -17028,103 +16629,306 @@
           <a:p>
             <a:pPr algn="ctr">
               <a:lnSpc>
-                <a:spcPct val="105000"/>
-              </a:lnSpc>
-              <a:spcBef>
-                <a:spcPts val="0"/>
-              </a:spcBef>
-              <a:spcAft>
-                <a:spcPts val="200"/>
-              </a:spcAft>
-            </a:pPr>
-            <a:r>
-              <a:rPr sz="1500" b="1" i="0">
+                <a:spcPct val="100000"/>
+              </a:lnSpc>
+              <a:spcBef>
+                <a:spcPts val="0"/>
+              </a:spcBef>
+              <a:spcAft>
+                <a:spcPts val="0"/>
+              </a:spcAft>
+            </a:pPr>
+            <a:r>
+              <a:rPr sz="3400" b="1" i="0">
+                <a:solidFill>
+                  <a:srgbClr val="FFFFFF"/>
+                </a:solidFill>
+                <a:latin typeface="Segoe UI Emoji"/>
+              </a:rPr>
+              <a:t>∠</a:t>
+            </a:r>
+          </a:p>
+        </p:txBody>
+      </p:sp>
+      <p:sp>
+        <p:nvSpPr>
+          <p:cNvPr id="30" name="TextBox 29"/>
+          <p:cNvSpPr txBox="1"/>
+          <p:nvPr/>
+        </p:nvSpPr>
+        <p:spPr>
+          <a:xfrm>
+            <a:off x="8549640" y="3108960"/>
+            <a:ext cx="3383280" cy="457200"/>
+          </a:xfrm>
+          <a:prstGeom prst="rect">
+            <a:avLst/>
+          </a:prstGeom>
+          <a:noFill/>
+        </p:spPr>
+        <p:txBody>
+          <a:bodyPr wrap="square" anchor="t" lIns="0" rIns="0" tIns="0" bIns="0">
+            <a:spAutoFit/>
+          </a:bodyPr>
+          <a:lstStyle/>
+          <a:p>
+            <a:pPr algn="ctr">
+              <a:lnSpc>
+                <a:spcPct val="100000"/>
+              </a:lnSpc>
+              <a:spcBef>
+                <a:spcPts val="0"/>
+              </a:spcBef>
+              <a:spcAft>
+                <a:spcPts val="0"/>
+              </a:spcAft>
+            </a:pPr>
+            <a:r>
+              <a:rPr sz="1800" b="1" i="0">
+                <a:solidFill>
+                  <a:srgbClr val="1E1B2E"/>
+                </a:solidFill>
+                <a:latin typeface="Segoe UI Semibold"/>
+              </a:rPr>
+              <a:t>Similitud coseno</a:t>
+            </a:r>
+          </a:p>
+        </p:txBody>
+      </p:sp>
+      <p:sp>
+        <p:nvSpPr>
+          <p:cNvPr id="31" name="Rounded Rectangle 30"/>
+          <p:cNvSpPr/>
+          <p:nvPr/>
+        </p:nvSpPr>
+        <p:spPr>
+          <a:xfrm>
+            <a:off x="8823960" y="3657600"/>
+            <a:ext cx="2834640" cy="777240"/>
+          </a:xfrm>
+          <a:prstGeom prst="roundRect">
+            <a:avLst/>
+          </a:prstGeom>
+          <a:solidFill>
+            <a:srgbClr val="ECE9F9"/>
+          </a:solidFill>
+          <a:ln>
+            <a:noFill/>
+          </a:ln>
+          <a:effectLst/>
+        </p:spPr>
+        <p:style>
+          <a:lnRef idx="1">
+            <a:schemeClr val="accent1"/>
+          </a:lnRef>
+          <a:fillRef idx="3">
+            <a:schemeClr val="accent1"/>
+          </a:fillRef>
+          <a:effectRef idx="2">
+            <a:schemeClr val="accent1"/>
+          </a:effectRef>
+          <a:fontRef idx="minor">
+            <a:schemeClr val="lt1"/>
+          </a:fontRef>
+        </p:style>
+        <p:txBody>
+          <a:bodyPr rtlCol="0" anchor="ctr"/>
+          <a:lstStyle/>
+          <a:p>
+            <a:pPr algn="ctr"/>
+          </a:p>
+        </p:txBody>
+      </p:sp>
+      <p:sp>
+        <p:nvSpPr>
+          <p:cNvPr id="32" name="TextBox 31"/>
+          <p:cNvSpPr txBox="1"/>
+          <p:nvPr/>
+        </p:nvSpPr>
+        <p:spPr>
+          <a:xfrm>
+            <a:off x="8823960" y="3657600"/>
+            <a:ext cx="2834640" cy="777240"/>
+          </a:xfrm>
+          <a:prstGeom prst="rect">
+            <a:avLst/>
+          </a:prstGeom>
+          <a:noFill/>
+        </p:spPr>
+        <p:txBody>
+          <a:bodyPr wrap="square" anchor="ctr" lIns="0" rIns="0" tIns="0" bIns="0">
+            <a:spAutoFit/>
+          </a:bodyPr>
+          <a:lstStyle/>
+          <a:p>
+            <a:pPr algn="ctr">
+              <a:lnSpc>
+                <a:spcPct val="100000"/>
+              </a:lnSpc>
+              <a:spcBef>
+                <a:spcPts val="0"/>
+              </a:spcBef>
+              <a:spcAft>
+                <a:spcPts val="0"/>
+              </a:spcAft>
+            </a:pPr>
+            <a:r>
+              <a:rPr sz="1650" b="1" i="0">
                 <a:solidFill>
                   <a:srgbClr val="1A164B"/>
                 </a:solidFill>
                 <a:latin typeface="Cambria Math"/>
               </a:rPr>
-              <a:t>score(D, Q) = Σₜ IDF(t) ·</a:t>
-            </a:r>
-          </a:p>
+              <a:t>cos θ = (a · b) / (‖a‖ ‖b‖)</a:t>
+            </a:r>
+          </a:p>
+        </p:txBody>
+      </p:sp>
+      <p:sp>
+        <p:nvSpPr>
+          <p:cNvPr id="33" name="TextBox 32"/>
+          <p:cNvSpPr txBox="1"/>
+          <p:nvPr/>
+        </p:nvSpPr>
+        <p:spPr>
+          <a:xfrm>
+            <a:off x="8778240" y="4663440"/>
+            <a:ext cx="2926080" cy="365760"/>
+          </a:xfrm>
+          <a:prstGeom prst="rect">
+            <a:avLst/>
+          </a:prstGeom>
+          <a:noFill/>
+        </p:spPr>
+        <p:txBody>
+          <a:bodyPr wrap="square" anchor="t" lIns="0" rIns="0" tIns="0" bIns="0">
+            <a:spAutoFit/>
+          </a:bodyPr>
+          <a:lstStyle/>
           <a:p>
             <a:pPr algn="ctr">
               <a:lnSpc>
-                <a:spcPct val="105000"/>
-              </a:lnSpc>
-              <a:spcBef>
-                <a:spcPts val="0"/>
-              </a:spcBef>
-              <a:spcAft>
-                <a:spcPts val="200"/>
-              </a:spcAft>
-            </a:pPr>
-            <a:r>
-              <a:rPr sz="1450" b="1" i="0">
-                <a:solidFill>
-                  <a:srgbClr val="1A164B"/>
-                </a:solidFill>
-                <a:latin typeface="Cambria Math"/>
-              </a:rPr>
-              <a:t>tf · (k₁ + 1)</a:t>
-            </a:r>
-          </a:p>
+                <a:spcPct val="100000"/>
+              </a:lnSpc>
+              <a:spcBef>
+                <a:spcPts val="0"/>
+              </a:spcBef>
+              <a:spcAft>
+                <a:spcPts val="0"/>
+              </a:spcAft>
+            </a:pPr>
+            <a:r>
+              <a:rPr sz="1250" b="0" i="0">
+                <a:solidFill>
+                  <a:srgbClr val="6B6682"/>
+                </a:solidFill>
+                <a:latin typeface="Segoe UI"/>
+              </a:rPr>
+              <a:t>Mide el ángulo; ignora la</a:t>
+            </a:r>
+          </a:p>
+        </p:txBody>
+      </p:sp>
+      <p:sp>
+        <p:nvSpPr>
+          <p:cNvPr id="34" name="TextBox 33"/>
+          <p:cNvSpPr txBox="1"/>
+          <p:nvPr/>
+        </p:nvSpPr>
+        <p:spPr>
+          <a:xfrm>
+            <a:off x="8778240" y="5047488"/>
+            <a:ext cx="2926080" cy="365760"/>
+          </a:xfrm>
+          <a:prstGeom prst="rect">
+            <a:avLst/>
+          </a:prstGeom>
+          <a:noFill/>
+        </p:spPr>
+        <p:txBody>
+          <a:bodyPr wrap="square" anchor="t" lIns="0" rIns="0" tIns="0" bIns="0">
+            <a:spAutoFit/>
+          </a:bodyPr>
+          <a:lstStyle/>
           <a:p>
             <a:pPr algn="ctr">
               <a:lnSpc>
-                <a:spcPct val="105000"/>
-              </a:lnSpc>
-              <a:spcBef>
-                <a:spcPts val="0"/>
-              </a:spcBef>
-              <a:spcAft>
-                <a:spcPts val="200"/>
-              </a:spcAft>
-            </a:pPr>
-            <a:r>
-              <a:rPr sz="1200" b="0" i="0">
+                <a:spcPct val="100000"/>
+              </a:lnSpc>
+              <a:spcBef>
+                <a:spcPts val="0"/>
+              </a:spcBef>
+              <a:spcAft>
+                <a:spcPts val="0"/>
+              </a:spcAft>
+            </a:pPr>
+            <a:r>
+              <a:rPr sz="1250" b="0" i="0">
                 <a:solidFill>
                   <a:srgbClr val="6B6682"/>
                 </a:solidFill>
-                <a:latin typeface="Cambria Math"/>
-              </a:rPr>
-              <a:t>─────────────────────</a:t>
-            </a:r>
-          </a:p>
+                <a:latin typeface="Segoe UI"/>
+              </a:rPr>
+              <a:t>magnitud del vector.</a:t>
+            </a:r>
+          </a:p>
+        </p:txBody>
+      </p:sp>
+      <p:sp>
+        <p:nvSpPr>
+          <p:cNvPr id="35" name="TextBox 34"/>
+          <p:cNvSpPr txBox="1"/>
+          <p:nvPr/>
+        </p:nvSpPr>
+        <p:spPr>
+          <a:xfrm>
+            <a:off x="8778240" y="5431536"/>
+            <a:ext cx="2926080" cy="365760"/>
+          </a:xfrm>
+          <a:prstGeom prst="rect">
+            <a:avLst/>
+          </a:prstGeom>
+          <a:noFill/>
+        </p:spPr>
+        <p:txBody>
+          <a:bodyPr wrap="square" anchor="t" lIns="0" rIns="0" tIns="0" bIns="0">
+            <a:spAutoFit/>
+          </a:bodyPr>
+          <a:lstStyle/>
           <a:p>
             <a:pPr algn="ctr">
               <a:lnSpc>
-                <a:spcPct val="105000"/>
-              </a:lnSpc>
-              <a:spcBef>
-                <a:spcPts val="0"/>
-              </a:spcBef>
-              <a:spcAft>
-                <a:spcPts val="200"/>
-              </a:spcAft>
-            </a:pPr>
-            <a:r>
-              <a:rPr sz="1450" b="1" i="0">
-                <a:solidFill>
-                  <a:srgbClr val="1A164B"/>
-                </a:solidFill>
-                <a:latin typeface="Cambria Math"/>
-              </a:rPr>
-              <a:t>tf + k₁·(1 − b + b·|D|/avgdl)</a:t>
-            </a:r>
-          </a:p>
-        </p:txBody>
-      </p:sp>
-      <p:sp>
-        <p:nvSpPr>
-          <p:cNvPr id="24" name="TextBox 23"/>
-          <p:cNvSpPr txBox="1"/>
-          <p:nvPr/>
-        </p:nvSpPr>
-        <p:spPr>
-          <a:xfrm>
-            <a:off x="640080" y="5870448"/>
-            <a:ext cx="10927080" cy="365760"/>
+                <a:spcPct val="100000"/>
+              </a:lnSpc>
+              <a:spcBef>
+                <a:spcPts val="0"/>
+              </a:spcBef>
+              <a:spcAft>
+                <a:spcPts val="0"/>
+              </a:spcAft>
+            </a:pPr>
+            <a:r>
+              <a:rPr sz="1250" b="0" i="0">
+                <a:solidFill>
+                  <a:srgbClr val="6B6682"/>
+                </a:solidFill>
+                <a:latin typeface="Segoe UI"/>
+              </a:rPr>
+              <a:t>1 = iguales · 0 = sin relación.</a:t>
+            </a:r>
+          </a:p>
+        </p:txBody>
+      </p:sp>
+      <p:sp>
+        <p:nvSpPr>
+          <p:cNvPr id="36" name="TextBox 35"/>
+          <p:cNvSpPr txBox="1"/>
+          <p:nvPr/>
+        </p:nvSpPr>
+        <p:spPr>
+          <a:xfrm>
+            <a:off x="777240" y="6217920"/>
+            <a:ext cx="10881360" cy="365760"/>
           </a:xfrm>
           <a:prstGeom prst="rect">
             <a:avLst/>
@@ -17149,20 +16953,20 @@
               </a:spcAft>
             </a:pPr>
             <a:r>
-              <a:rPr sz="1050" b="0" i="1">
+              <a:rPr sz="1150" b="0" i="1">
                 <a:solidFill>
                   <a:srgbClr val="6B6682"/>
                 </a:solidFill>
                 <a:latin typeface="Segoe UI"/>
               </a:rPr>
-              <a:t>t = término · N = nº de documentos · df = documentos que contienen t · tf = frecuencia del término · |D| = longitud · avgdl = longitud media · k₁≈1.2–2, b≈0.75</a:t>
-            </a:r>
-          </a:p>
-        </p:txBody>
-      </p:sp>
-      <p:sp>
-        <p:nvSpPr>
-          <p:cNvPr id="25" name="TextBox 24"/>
+              <a:t>a, b = embeddings · ‖a‖ = magnitud (norma) del vector · Σ = suma de todas las componentes</a:t>
+            </a:r>
+          </a:p>
+        </p:txBody>
+      </p:sp>
+      <p:sp>
+        <p:nvSpPr>
+          <p:cNvPr id="37" name="TextBox 36"/>
           <p:cNvSpPr txBox="1"/>
           <p:nvPr/>
         </p:nvSpPr>
@@ -17207,7 +17011,7 @@
       </p:sp>
       <p:sp>
         <p:nvSpPr>
-          <p:cNvPr id="26" name="TextBox 25"/>
+          <p:cNvPr id="38" name="TextBox 37"/>
           <p:cNvSpPr txBox="1"/>
           <p:nvPr/>
         </p:nvSpPr>
@@ -19160,6 +18964,1235 @@
     <p:bg>
       <p:bgPr>
         <a:solidFill>
+          <a:srgbClr val="F6F5FB"/>
+        </a:solidFill>
+        <a:effectLst/>
+      </p:bgPr>
+    </p:bg>
+    <p:spTree>
+      <p:nvGrpSpPr>
+        <p:cNvPr id="1" name=""/>
+        <p:cNvGrpSpPr/>
+        <p:nvPr/>
+      </p:nvGrpSpPr>
+      <p:grpSpPr/>
+      <p:sp>
+        <p:nvSpPr>
+          <p:cNvPr id="2" name="Rectangle 1"/>
+          <p:cNvSpPr/>
+          <p:nvPr/>
+        </p:nvSpPr>
+        <p:spPr>
+          <a:xfrm>
+            <a:off x="0" y="0"/>
+            <a:ext cx="12191695" cy="1234440"/>
+          </a:xfrm>
+          <a:prstGeom prst="rect">
+            <a:avLst/>
+          </a:prstGeom>
+          <a:solidFill>
+            <a:srgbClr val="1A164B"/>
+          </a:solidFill>
+          <a:ln>
+            <a:noFill/>
+          </a:ln>
+          <a:effectLst/>
+        </p:spPr>
+        <p:style>
+          <a:lnRef idx="1">
+            <a:schemeClr val="accent1"/>
+          </a:lnRef>
+          <a:fillRef idx="3">
+            <a:schemeClr val="accent1"/>
+          </a:fillRef>
+          <a:effectRef idx="2">
+            <a:schemeClr val="accent1"/>
+          </a:effectRef>
+          <a:fontRef idx="minor">
+            <a:schemeClr val="lt1"/>
+          </a:fontRef>
+        </p:style>
+        <p:txBody>
+          <a:bodyPr rtlCol="0" anchor="ctr"/>
+          <a:lstStyle/>
+          <a:p>
+            <a:pPr algn="ctr"/>
+          </a:p>
+        </p:txBody>
+      </p:sp>
+      <p:sp>
+        <p:nvSpPr>
+          <p:cNvPr id="3" name="Rectangle 2"/>
+          <p:cNvSpPr/>
+          <p:nvPr/>
+        </p:nvSpPr>
+        <p:spPr>
+          <a:xfrm>
+            <a:off x="548640" y="365760"/>
+            <a:ext cx="128016" cy="502920"/>
+          </a:xfrm>
+          <a:prstGeom prst="rect">
+            <a:avLst/>
+          </a:prstGeom>
+          <a:solidFill>
+            <a:srgbClr val="FBBF24"/>
+          </a:solidFill>
+          <a:ln>
+            <a:noFill/>
+          </a:ln>
+          <a:effectLst/>
+        </p:spPr>
+        <p:style>
+          <a:lnRef idx="1">
+            <a:schemeClr val="accent1"/>
+          </a:lnRef>
+          <a:fillRef idx="3">
+            <a:schemeClr val="accent1"/>
+          </a:fillRef>
+          <a:effectRef idx="2">
+            <a:schemeClr val="accent1"/>
+          </a:effectRef>
+          <a:fontRef idx="minor">
+            <a:schemeClr val="lt1"/>
+          </a:fontRef>
+        </p:style>
+        <p:txBody>
+          <a:bodyPr rtlCol="0" anchor="ctr"/>
+          <a:lstStyle/>
+          <a:p>
+            <a:pPr algn="ctr"/>
+          </a:p>
+        </p:txBody>
+      </p:sp>
+      <p:sp>
+        <p:nvSpPr>
+          <p:cNvPr id="4" name="TextBox 3"/>
+          <p:cNvSpPr txBox="1"/>
+          <p:nvPr/>
+        </p:nvSpPr>
+        <p:spPr>
+          <a:xfrm>
+            <a:off x="777240" y="274320"/>
+            <a:ext cx="10972800" cy="731520"/>
+          </a:xfrm>
+          <a:prstGeom prst="rect">
+            <a:avLst/>
+          </a:prstGeom>
+          <a:noFill/>
+        </p:spPr>
+        <p:txBody>
+          <a:bodyPr wrap="square" anchor="t" lIns="0" rIns="0" tIns="0" bIns="0">
+            <a:spAutoFit/>
+          </a:bodyPr>
+          <a:lstStyle/>
+          <a:p>
+            <a:pPr algn="l">
+              <a:lnSpc>
+                <a:spcPct val="100000"/>
+              </a:lnSpc>
+              <a:spcBef>
+                <a:spcPts val="0"/>
+              </a:spcBef>
+              <a:spcAft>
+                <a:spcPts val="0"/>
+              </a:spcAft>
+            </a:pPr>
+            <a:r>
+              <a:rPr sz="3000" b="1" i="0">
+                <a:solidFill>
+                  <a:srgbClr val="FFFFFF"/>
+                </a:solidFill>
+                <a:latin typeface="Segoe UI Semibold"/>
+              </a:rPr>
+              <a:t>Búsqueda por palabras clave: TF-IDF y BM25</a:t>
+            </a:r>
+          </a:p>
+        </p:txBody>
+      </p:sp>
+      <p:sp>
+        <p:nvSpPr>
+          <p:cNvPr id="5" name="TextBox 4"/>
+          <p:cNvSpPr txBox="1"/>
+          <p:nvPr/>
+        </p:nvSpPr>
+        <p:spPr>
+          <a:xfrm>
+            <a:off x="822960" y="850392"/>
+            <a:ext cx="10972800" cy="365760"/>
+          </a:xfrm>
+          <a:prstGeom prst="rect">
+            <a:avLst/>
+          </a:prstGeom>
+          <a:noFill/>
+        </p:spPr>
+        <p:txBody>
+          <a:bodyPr wrap="square" anchor="t" lIns="0" rIns="0" tIns="0" bIns="0">
+            <a:spAutoFit/>
+          </a:bodyPr>
+          <a:lstStyle/>
+          <a:p>
+            <a:pPr algn="l">
+              <a:lnSpc>
+                <a:spcPct val="100000"/>
+              </a:lnSpc>
+              <a:spcBef>
+                <a:spcPts val="0"/>
+              </a:spcBef>
+              <a:spcAft>
+                <a:spcPts val="0"/>
+              </a:spcAft>
+            </a:pPr>
+            <a:r>
+              <a:rPr sz="1400" b="0" i="0">
+                <a:solidFill>
+                  <a:srgbClr val="B9B3E6"/>
+                </a:solidFill>
+                <a:latin typeface="Segoe UI"/>
+              </a:rPr>
+              <a:t>Recuperación léxica (por términos exactos) · complementa a los embeddings</a:t>
+            </a:r>
+          </a:p>
+        </p:txBody>
+      </p:sp>
+      <p:sp>
+        <p:nvSpPr>
+          <p:cNvPr id="6" name="Rounded Rectangle 5"/>
+          <p:cNvSpPr/>
+          <p:nvPr/>
+        </p:nvSpPr>
+        <p:spPr>
+          <a:xfrm>
+            <a:off x="640080" y="1554480"/>
+            <a:ext cx="10927080" cy="1874519"/>
+          </a:xfrm>
+          <a:prstGeom prst="roundRect">
+            <a:avLst/>
+          </a:prstGeom>
+          <a:solidFill>
+            <a:srgbClr val="FFFFFF"/>
+          </a:solidFill>
+          <a:ln>
+            <a:noFill/>
+          </a:ln>
+          <a:effectLst/>
+        </p:spPr>
+        <p:style>
+          <a:lnRef idx="1">
+            <a:schemeClr val="accent1"/>
+          </a:lnRef>
+          <a:fillRef idx="3">
+            <a:schemeClr val="accent1"/>
+          </a:fillRef>
+          <a:effectRef idx="2">
+            <a:schemeClr val="accent1"/>
+          </a:effectRef>
+          <a:fontRef idx="minor">
+            <a:schemeClr val="lt1"/>
+          </a:fontRef>
+        </p:style>
+        <p:txBody>
+          <a:bodyPr rtlCol="0" anchor="ctr"/>
+          <a:lstStyle/>
+          <a:p>
+            <a:pPr algn="ctr"/>
+          </a:p>
+        </p:txBody>
+      </p:sp>
+      <p:sp>
+        <p:nvSpPr>
+          <p:cNvPr id="7" name="Rectangle 6"/>
+          <p:cNvSpPr/>
+          <p:nvPr/>
+        </p:nvSpPr>
+        <p:spPr>
+          <a:xfrm>
+            <a:off x="640080" y="1554480"/>
+            <a:ext cx="137160" cy="1874519"/>
+          </a:xfrm>
+          <a:prstGeom prst="rect">
+            <a:avLst/>
+          </a:prstGeom>
+          <a:solidFill>
+            <a:srgbClr val="FBBF24"/>
+          </a:solidFill>
+          <a:ln>
+            <a:noFill/>
+          </a:ln>
+          <a:effectLst/>
+        </p:spPr>
+        <p:style>
+          <a:lnRef idx="1">
+            <a:schemeClr val="accent1"/>
+          </a:lnRef>
+          <a:fillRef idx="3">
+            <a:schemeClr val="accent1"/>
+          </a:fillRef>
+          <a:effectRef idx="2">
+            <a:schemeClr val="accent1"/>
+          </a:effectRef>
+          <a:fontRef idx="minor">
+            <a:schemeClr val="lt1"/>
+          </a:fontRef>
+        </p:style>
+        <p:txBody>
+          <a:bodyPr rtlCol="0" anchor="ctr"/>
+          <a:lstStyle/>
+          <a:p>
+            <a:pPr algn="ctr"/>
+          </a:p>
+        </p:txBody>
+      </p:sp>
+      <p:sp>
+        <p:nvSpPr>
+          <p:cNvPr id="8" name="Oval 7"/>
+          <p:cNvSpPr/>
+          <p:nvPr/>
+        </p:nvSpPr>
+        <p:spPr>
+          <a:xfrm>
+            <a:off x="1005840" y="1965960"/>
+            <a:ext cx="960120" cy="960120"/>
+          </a:xfrm>
+          <a:prstGeom prst="ellipse">
+            <a:avLst/>
+          </a:prstGeom>
+          <a:solidFill>
+            <a:srgbClr val="FBBF24"/>
+          </a:solidFill>
+          <a:ln>
+            <a:noFill/>
+          </a:ln>
+          <a:effectLst/>
+        </p:spPr>
+        <p:style>
+          <a:lnRef idx="1">
+            <a:schemeClr val="accent1"/>
+          </a:lnRef>
+          <a:fillRef idx="3">
+            <a:schemeClr val="accent1"/>
+          </a:fillRef>
+          <a:effectRef idx="2">
+            <a:schemeClr val="accent1"/>
+          </a:effectRef>
+          <a:fontRef idx="minor">
+            <a:schemeClr val="lt1"/>
+          </a:fontRef>
+        </p:style>
+        <p:txBody>
+          <a:bodyPr rtlCol="0" anchor="ctr"/>
+          <a:lstStyle/>
+          <a:p>
+            <a:pPr algn="ctr"/>
+          </a:p>
+        </p:txBody>
+      </p:sp>
+      <p:sp>
+        <p:nvSpPr>
+          <p:cNvPr id="9" name="TextBox 8"/>
+          <p:cNvSpPr txBox="1"/>
+          <p:nvPr/>
+        </p:nvSpPr>
+        <p:spPr>
+          <a:xfrm>
+            <a:off x="1005840" y="1947672"/>
+            <a:ext cx="960120" cy="960120"/>
+          </a:xfrm>
+          <a:prstGeom prst="rect">
+            <a:avLst/>
+          </a:prstGeom>
+          <a:noFill/>
+        </p:spPr>
+        <p:txBody>
+          <a:bodyPr wrap="square" anchor="ctr" lIns="0" rIns="0" tIns="0" bIns="0">
+            <a:spAutoFit/>
+          </a:bodyPr>
+          <a:lstStyle/>
+          <a:p>
+            <a:pPr algn="ctr">
+              <a:lnSpc>
+                <a:spcPct val="100000"/>
+              </a:lnSpc>
+              <a:spcBef>
+                <a:spcPts val="0"/>
+              </a:spcBef>
+              <a:spcAft>
+                <a:spcPts val="0"/>
+              </a:spcAft>
+            </a:pPr>
+            <a:r>
+              <a:rPr sz="3200" b="1" i="0">
+                <a:solidFill>
+                  <a:srgbClr val="FFFFFF"/>
+                </a:solidFill>
+                <a:latin typeface="Segoe UI Emoji"/>
+              </a:rPr>
+              <a:t>🔑</a:t>
+            </a:r>
+          </a:p>
+        </p:txBody>
+      </p:sp>
+      <p:sp>
+        <p:nvSpPr>
+          <p:cNvPr id="10" name="TextBox 9"/>
+          <p:cNvSpPr txBox="1"/>
+          <p:nvPr/>
+        </p:nvSpPr>
+        <p:spPr>
+          <a:xfrm>
+            <a:off x="2240280" y="1737360"/>
+            <a:ext cx="3657600" cy="411480"/>
+          </a:xfrm>
+          <a:prstGeom prst="rect">
+            <a:avLst/>
+          </a:prstGeom>
+          <a:noFill/>
+        </p:spPr>
+        <p:txBody>
+          <a:bodyPr wrap="square" anchor="t" lIns="0" rIns="0" tIns="0" bIns="0">
+            <a:spAutoFit/>
+          </a:bodyPr>
+          <a:lstStyle/>
+          <a:p>
+            <a:pPr algn="l">
+              <a:lnSpc>
+                <a:spcPct val="100000"/>
+              </a:lnSpc>
+              <a:spcBef>
+                <a:spcPts val="0"/>
+              </a:spcBef>
+              <a:spcAft>
+                <a:spcPts val="0"/>
+              </a:spcAft>
+            </a:pPr>
+            <a:r>
+              <a:rPr sz="2100" b="1" i="0">
+                <a:solidFill>
+                  <a:srgbClr val="1E1B2E"/>
+                </a:solidFill>
+                <a:latin typeface="Segoe UI Semibold"/>
+              </a:rPr>
+              <a:t>TF-IDF</a:t>
+            </a:r>
+          </a:p>
+        </p:txBody>
+      </p:sp>
+      <p:sp>
+        <p:nvSpPr>
+          <p:cNvPr id="11" name="TextBox 10"/>
+          <p:cNvSpPr txBox="1"/>
+          <p:nvPr/>
+        </p:nvSpPr>
+        <p:spPr>
+          <a:xfrm>
+            <a:off x="2240280" y="2157984"/>
+            <a:ext cx="3657600" cy="320040"/>
+          </a:xfrm>
+          <a:prstGeom prst="rect">
+            <a:avLst/>
+          </a:prstGeom>
+          <a:noFill/>
+        </p:spPr>
+        <p:txBody>
+          <a:bodyPr wrap="square" anchor="t" lIns="0" rIns="0" tIns="0" bIns="0">
+            <a:spAutoFit/>
+          </a:bodyPr>
+          <a:lstStyle/>
+          <a:p>
+            <a:pPr algn="l">
+              <a:lnSpc>
+                <a:spcPct val="100000"/>
+              </a:lnSpc>
+              <a:spcBef>
+                <a:spcPts val="0"/>
+              </a:spcBef>
+              <a:spcAft>
+                <a:spcPts val="0"/>
+              </a:spcAft>
+            </a:pPr>
+            <a:r>
+              <a:rPr sz="1150" b="0" i="1">
+                <a:solidFill>
+                  <a:srgbClr val="6B6682"/>
+                </a:solidFill>
+                <a:latin typeface="Segoe UI"/>
+              </a:rPr>
+              <a:t>Term Frequency – Inverse Document Frequency</a:t>
+            </a:r>
+          </a:p>
+        </p:txBody>
+      </p:sp>
+      <p:sp>
+        <p:nvSpPr>
+          <p:cNvPr id="12" name="TextBox 11"/>
+          <p:cNvSpPr txBox="1"/>
+          <p:nvPr/>
+        </p:nvSpPr>
+        <p:spPr>
+          <a:xfrm>
+            <a:off x="2240280" y="2560320"/>
+            <a:ext cx="3657600" cy="731520"/>
+          </a:xfrm>
+          <a:prstGeom prst="rect">
+            <a:avLst/>
+          </a:prstGeom>
+          <a:noFill/>
+        </p:spPr>
+        <p:txBody>
+          <a:bodyPr wrap="square" anchor="t" lIns="0" rIns="0" tIns="0" bIns="0">
+            <a:spAutoFit/>
+          </a:bodyPr>
+          <a:lstStyle/>
+          <a:p>
+            <a:pPr algn="l">
+              <a:lnSpc>
+                <a:spcPct val="105000"/>
+              </a:lnSpc>
+              <a:spcBef>
+                <a:spcPts val="0"/>
+              </a:spcBef>
+              <a:spcAft>
+                <a:spcPts val="0"/>
+              </a:spcAft>
+            </a:pPr>
+            <a:r>
+              <a:rPr sz="1250" b="0" i="0">
+                <a:solidFill>
+                  <a:srgbClr val="6B6682"/>
+                </a:solidFill>
+                <a:latin typeface="Segoe UI"/>
+              </a:rPr>
+              <a:t>Pesa un término por su frecuencia en el documento (tf) y su rareza en la colección (idf). Las palabras raras pesan más.</a:t>
+            </a:r>
+          </a:p>
+        </p:txBody>
+      </p:sp>
+      <p:sp>
+        <p:nvSpPr>
+          <p:cNvPr id="13" name="Rounded Rectangle 12"/>
+          <p:cNvSpPr/>
+          <p:nvPr/>
+        </p:nvSpPr>
+        <p:spPr>
+          <a:xfrm>
+            <a:off x="6309360" y="1783080"/>
+            <a:ext cx="5029200" cy="1417320"/>
+          </a:xfrm>
+          <a:prstGeom prst="roundRect">
+            <a:avLst/>
+          </a:prstGeom>
+          <a:solidFill>
+            <a:srgbClr val="ECE9F9"/>
+          </a:solidFill>
+          <a:ln>
+            <a:noFill/>
+          </a:ln>
+          <a:effectLst/>
+        </p:spPr>
+        <p:style>
+          <a:lnRef idx="1">
+            <a:schemeClr val="accent1"/>
+          </a:lnRef>
+          <a:fillRef idx="3">
+            <a:schemeClr val="accent1"/>
+          </a:fillRef>
+          <a:effectRef idx="2">
+            <a:schemeClr val="accent1"/>
+          </a:effectRef>
+          <a:fontRef idx="minor">
+            <a:schemeClr val="lt1"/>
+          </a:fontRef>
+        </p:style>
+        <p:txBody>
+          <a:bodyPr rtlCol="0" anchor="ctr"/>
+          <a:lstStyle/>
+          <a:p>
+            <a:pPr algn="ctr"/>
+          </a:p>
+        </p:txBody>
+      </p:sp>
+      <p:sp>
+        <p:nvSpPr>
+          <p:cNvPr id="14" name="TextBox 13"/>
+          <p:cNvSpPr txBox="1"/>
+          <p:nvPr/>
+        </p:nvSpPr>
+        <p:spPr>
+          <a:xfrm>
+            <a:off x="6309360" y="1783080"/>
+            <a:ext cx="5029200" cy="1417320"/>
+          </a:xfrm>
+          <a:prstGeom prst="rect">
+            <a:avLst/>
+          </a:prstGeom>
+          <a:noFill/>
+        </p:spPr>
+        <p:txBody>
+          <a:bodyPr wrap="square" anchor="ctr" lIns="0" rIns="0" tIns="0" bIns="0">
+            <a:spAutoFit/>
+          </a:bodyPr>
+          <a:lstStyle/>
+          <a:p>
+            <a:pPr algn="ctr">
+              <a:lnSpc>
+                <a:spcPct val="130000"/>
+              </a:lnSpc>
+              <a:spcBef>
+                <a:spcPts val="0"/>
+              </a:spcBef>
+              <a:spcAft>
+                <a:spcPts val="400"/>
+              </a:spcAft>
+            </a:pPr>
+            <a:r>
+              <a:rPr sz="1600" b="1" i="0">
+                <a:solidFill>
+                  <a:srgbClr val="1A164B"/>
+                </a:solidFill>
+                <a:latin typeface="Cambria Math"/>
+              </a:rPr>
+              <a:t>tf-idf(t, d) = tf(t, d) × idf(t)</a:t>
+            </a:r>
+          </a:p>
+          <a:p>
+            <a:pPr algn="ctr">
+              <a:lnSpc>
+                <a:spcPct val="130000"/>
+              </a:lnSpc>
+              <a:spcBef>
+                <a:spcPts val="0"/>
+              </a:spcBef>
+              <a:spcAft>
+                <a:spcPts val="400"/>
+              </a:spcAft>
+            </a:pPr>
+            <a:r>
+              <a:rPr sz="1600" b="1" i="0">
+                <a:solidFill>
+                  <a:srgbClr val="1A164B"/>
+                </a:solidFill>
+                <a:latin typeface="Cambria Math"/>
+              </a:rPr>
+              <a:t>idf(t) = log( N / df(t) )</a:t>
+            </a:r>
+          </a:p>
+        </p:txBody>
+      </p:sp>
+      <p:sp>
+        <p:nvSpPr>
+          <p:cNvPr id="15" name="Rounded Rectangle 14"/>
+          <p:cNvSpPr/>
+          <p:nvPr/>
+        </p:nvSpPr>
+        <p:spPr>
+          <a:xfrm>
+            <a:off x="640080" y="3611880"/>
+            <a:ext cx="10927080" cy="2148840"/>
+          </a:xfrm>
+          <a:prstGeom prst="roundRect">
+            <a:avLst/>
+          </a:prstGeom>
+          <a:solidFill>
+            <a:srgbClr val="FFFFFF"/>
+          </a:solidFill>
+          <a:ln>
+            <a:noFill/>
+          </a:ln>
+          <a:effectLst/>
+        </p:spPr>
+        <p:style>
+          <a:lnRef idx="1">
+            <a:schemeClr val="accent1"/>
+          </a:lnRef>
+          <a:fillRef idx="3">
+            <a:schemeClr val="accent1"/>
+          </a:fillRef>
+          <a:effectRef idx="2">
+            <a:schemeClr val="accent1"/>
+          </a:effectRef>
+          <a:fontRef idx="minor">
+            <a:schemeClr val="lt1"/>
+          </a:fontRef>
+        </p:style>
+        <p:txBody>
+          <a:bodyPr rtlCol="0" anchor="ctr"/>
+          <a:lstStyle/>
+          <a:p>
+            <a:pPr algn="ctr"/>
+          </a:p>
+        </p:txBody>
+      </p:sp>
+      <p:sp>
+        <p:nvSpPr>
+          <p:cNvPr id="16" name="Rectangle 15"/>
+          <p:cNvSpPr/>
+          <p:nvPr/>
+        </p:nvSpPr>
+        <p:spPr>
+          <a:xfrm>
+            <a:off x="640080" y="3611880"/>
+            <a:ext cx="137160" cy="2148840"/>
+          </a:xfrm>
+          <a:prstGeom prst="rect">
+            <a:avLst/>
+          </a:prstGeom>
+          <a:solidFill>
+            <a:srgbClr val="8B5CF6"/>
+          </a:solidFill>
+          <a:ln>
+            <a:noFill/>
+          </a:ln>
+          <a:effectLst/>
+        </p:spPr>
+        <p:style>
+          <a:lnRef idx="1">
+            <a:schemeClr val="accent1"/>
+          </a:lnRef>
+          <a:fillRef idx="3">
+            <a:schemeClr val="accent1"/>
+          </a:fillRef>
+          <a:effectRef idx="2">
+            <a:schemeClr val="accent1"/>
+          </a:effectRef>
+          <a:fontRef idx="minor">
+            <a:schemeClr val="lt1"/>
+          </a:fontRef>
+        </p:style>
+        <p:txBody>
+          <a:bodyPr rtlCol="0" anchor="ctr"/>
+          <a:lstStyle/>
+          <a:p>
+            <a:pPr algn="ctr"/>
+          </a:p>
+        </p:txBody>
+      </p:sp>
+      <p:sp>
+        <p:nvSpPr>
+          <p:cNvPr id="17" name="Oval 16"/>
+          <p:cNvSpPr/>
+          <p:nvPr/>
+        </p:nvSpPr>
+        <p:spPr>
+          <a:xfrm>
+            <a:off x="1005840" y="4160520"/>
+            <a:ext cx="960120" cy="960120"/>
+          </a:xfrm>
+          <a:prstGeom prst="ellipse">
+            <a:avLst/>
+          </a:prstGeom>
+          <a:solidFill>
+            <a:srgbClr val="8B5CF6"/>
+          </a:solidFill>
+          <a:ln>
+            <a:noFill/>
+          </a:ln>
+          <a:effectLst/>
+        </p:spPr>
+        <p:style>
+          <a:lnRef idx="1">
+            <a:schemeClr val="accent1"/>
+          </a:lnRef>
+          <a:fillRef idx="3">
+            <a:schemeClr val="accent1"/>
+          </a:fillRef>
+          <a:effectRef idx="2">
+            <a:schemeClr val="accent1"/>
+          </a:effectRef>
+          <a:fontRef idx="minor">
+            <a:schemeClr val="lt1"/>
+          </a:fontRef>
+        </p:style>
+        <p:txBody>
+          <a:bodyPr rtlCol="0" anchor="ctr"/>
+          <a:lstStyle/>
+          <a:p>
+            <a:pPr algn="ctr"/>
+          </a:p>
+        </p:txBody>
+      </p:sp>
+      <p:sp>
+        <p:nvSpPr>
+          <p:cNvPr id="18" name="TextBox 17"/>
+          <p:cNvSpPr txBox="1"/>
+          <p:nvPr/>
+        </p:nvSpPr>
+        <p:spPr>
+          <a:xfrm>
+            <a:off x="1005840" y="4142232"/>
+            <a:ext cx="960120" cy="960120"/>
+          </a:xfrm>
+          <a:prstGeom prst="rect">
+            <a:avLst/>
+          </a:prstGeom>
+          <a:noFill/>
+        </p:spPr>
+        <p:txBody>
+          <a:bodyPr wrap="square" anchor="ctr" lIns="0" rIns="0" tIns="0" bIns="0">
+            <a:spAutoFit/>
+          </a:bodyPr>
+          <a:lstStyle/>
+          <a:p>
+            <a:pPr algn="ctr">
+              <a:lnSpc>
+                <a:spcPct val="100000"/>
+              </a:lnSpc>
+              <a:spcBef>
+                <a:spcPts val="0"/>
+              </a:spcBef>
+              <a:spcAft>
+                <a:spcPts val="0"/>
+              </a:spcAft>
+            </a:pPr>
+            <a:r>
+              <a:rPr sz="3200" b="1" i="0">
+                <a:solidFill>
+                  <a:srgbClr val="FFFFFF"/>
+                </a:solidFill>
+                <a:latin typeface="Segoe UI Emoji"/>
+              </a:rPr>
+              <a:t>📈</a:t>
+            </a:r>
+          </a:p>
+        </p:txBody>
+      </p:sp>
+      <p:sp>
+        <p:nvSpPr>
+          <p:cNvPr id="19" name="TextBox 18"/>
+          <p:cNvSpPr txBox="1"/>
+          <p:nvPr/>
+        </p:nvSpPr>
+        <p:spPr>
+          <a:xfrm>
+            <a:off x="2240280" y="3794760"/>
+            <a:ext cx="3749039" cy="411480"/>
+          </a:xfrm>
+          <a:prstGeom prst="rect">
+            <a:avLst/>
+          </a:prstGeom>
+          <a:noFill/>
+        </p:spPr>
+        <p:txBody>
+          <a:bodyPr wrap="square" anchor="t" lIns="0" rIns="0" tIns="0" bIns="0">
+            <a:spAutoFit/>
+          </a:bodyPr>
+          <a:lstStyle/>
+          <a:p>
+            <a:pPr algn="l">
+              <a:lnSpc>
+                <a:spcPct val="100000"/>
+              </a:lnSpc>
+              <a:spcBef>
+                <a:spcPts val="0"/>
+              </a:spcBef>
+              <a:spcAft>
+                <a:spcPts val="0"/>
+              </a:spcAft>
+            </a:pPr>
+            <a:r>
+              <a:rPr sz="2100" b="1" i="0">
+                <a:solidFill>
+                  <a:srgbClr val="1E1B2E"/>
+                </a:solidFill>
+                <a:latin typeface="Segoe UI Semibold"/>
+              </a:rPr>
+              <a:t>BM25</a:t>
+            </a:r>
+          </a:p>
+        </p:txBody>
+      </p:sp>
+      <p:sp>
+        <p:nvSpPr>
+          <p:cNvPr id="20" name="TextBox 19"/>
+          <p:cNvSpPr txBox="1"/>
+          <p:nvPr/>
+        </p:nvSpPr>
+        <p:spPr>
+          <a:xfrm>
+            <a:off x="2240280" y="4215384"/>
+            <a:ext cx="3749039" cy="320040"/>
+          </a:xfrm>
+          <a:prstGeom prst="rect">
+            <a:avLst/>
+          </a:prstGeom>
+          <a:noFill/>
+        </p:spPr>
+        <p:txBody>
+          <a:bodyPr wrap="square" anchor="t" lIns="0" rIns="0" tIns="0" bIns="0">
+            <a:spAutoFit/>
+          </a:bodyPr>
+          <a:lstStyle/>
+          <a:p>
+            <a:pPr algn="l">
+              <a:lnSpc>
+                <a:spcPct val="100000"/>
+              </a:lnSpc>
+              <a:spcBef>
+                <a:spcPts val="0"/>
+              </a:spcBef>
+              <a:spcAft>
+                <a:spcPts val="0"/>
+              </a:spcAft>
+            </a:pPr>
+            <a:r>
+              <a:rPr sz="1150" b="0" i="1">
+                <a:solidFill>
+                  <a:srgbClr val="6B6682"/>
+                </a:solidFill>
+                <a:latin typeface="Segoe UI"/>
+              </a:rPr>
+              <a:t>Best Matching 25 · estándar en buscadores</a:t>
+            </a:r>
+          </a:p>
+        </p:txBody>
+      </p:sp>
+      <p:sp>
+        <p:nvSpPr>
+          <p:cNvPr id="21" name="TextBox 20"/>
+          <p:cNvSpPr txBox="1"/>
+          <p:nvPr/>
+        </p:nvSpPr>
+        <p:spPr>
+          <a:xfrm>
+            <a:off x="2240280" y="4617720"/>
+            <a:ext cx="3749039" cy="1005840"/>
+          </a:xfrm>
+          <a:prstGeom prst="rect">
+            <a:avLst/>
+          </a:prstGeom>
+          <a:noFill/>
+        </p:spPr>
+        <p:txBody>
+          <a:bodyPr wrap="square" anchor="t" lIns="0" rIns="0" tIns="0" bIns="0">
+            <a:spAutoFit/>
+          </a:bodyPr>
+          <a:lstStyle/>
+          <a:p>
+            <a:pPr algn="l">
+              <a:lnSpc>
+                <a:spcPct val="105000"/>
+              </a:lnSpc>
+              <a:spcBef>
+                <a:spcPts val="0"/>
+              </a:spcBef>
+              <a:spcAft>
+                <a:spcPts val="0"/>
+              </a:spcAft>
+            </a:pPr>
+            <a:r>
+              <a:rPr sz="1250" b="0" i="0">
+                <a:solidFill>
+                  <a:srgbClr val="6B6682"/>
+                </a:solidFill>
+                <a:latin typeface="Segoe UI"/>
+              </a:rPr>
+              <a:t>Evolución de TF-IDF: satura la frecuencia (k₁) y normaliza por la longitud del documento (b). Muy usado en motores de búsqueda.</a:t>
+            </a:r>
+          </a:p>
+        </p:txBody>
+      </p:sp>
+      <p:sp>
+        <p:nvSpPr>
+          <p:cNvPr id="22" name="Rounded Rectangle 21"/>
+          <p:cNvSpPr/>
+          <p:nvPr/>
+        </p:nvSpPr>
+        <p:spPr>
+          <a:xfrm>
+            <a:off x="6309360" y="3840480"/>
+            <a:ext cx="5029200" cy="1691640"/>
+          </a:xfrm>
+          <a:prstGeom prst="roundRect">
+            <a:avLst/>
+          </a:prstGeom>
+          <a:solidFill>
+            <a:srgbClr val="ECE9F9"/>
+          </a:solidFill>
+          <a:ln>
+            <a:noFill/>
+          </a:ln>
+          <a:effectLst/>
+        </p:spPr>
+        <p:style>
+          <a:lnRef idx="1">
+            <a:schemeClr val="accent1"/>
+          </a:lnRef>
+          <a:fillRef idx="3">
+            <a:schemeClr val="accent1"/>
+          </a:fillRef>
+          <a:effectRef idx="2">
+            <a:schemeClr val="accent1"/>
+          </a:effectRef>
+          <a:fontRef idx="minor">
+            <a:schemeClr val="lt1"/>
+          </a:fontRef>
+        </p:style>
+        <p:txBody>
+          <a:bodyPr rtlCol="0" anchor="ctr"/>
+          <a:lstStyle/>
+          <a:p>
+            <a:pPr algn="ctr"/>
+          </a:p>
+        </p:txBody>
+      </p:sp>
+      <p:sp>
+        <p:nvSpPr>
+          <p:cNvPr id="23" name="TextBox 22"/>
+          <p:cNvSpPr txBox="1"/>
+          <p:nvPr/>
+        </p:nvSpPr>
+        <p:spPr>
+          <a:xfrm>
+            <a:off x="6355080" y="3840480"/>
+            <a:ext cx="4937760" cy="1691640"/>
+          </a:xfrm>
+          <a:prstGeom prst="rect">
+            <a:avLst/>
+          </a:prstGeom>
+          <a:noFill/>
+        </p:spPr>
+        <p:txBody>
+          <a:bodyPr wrap="square" anchor="ctr" lIns="0" rIns="0" tIns="0" bIns="0">
+            <a:spAutoFit/>
+          </a:bodyPr>
+          <a:lstStyle/>
+          <a:p>
+            <a:pPr algn="ctr">
+              <a:lnSpc>
+                <a:spcPct val="105000"/>
+              </a:lnSpc>
+              <a:spcBef>
+                <a:spcPts val="0"/>
+              </a:spcBef>
+              <a:spcAft>
+                <a:spcPts val="200"/>
+              </a:spcAft>
+            </a:pPr>
+            <a:r>
+              <a:rPr sz="1500" b="1" i="0">
+                <a:solidFill>
+                  <a:srgbClr val="1A164B"/>
+                </a:solidFill>
+                <a:latin typeface="Cambria Math"/>
+              </a:rPr>
+              <a:t>score(D, Q) = Σₜ IDF(t) ·</a:t>
+            </a:r>
+          </a:p>
+          <a:p>
+            <a:pPr algn="ctr">
+              <a:lnSpc>
+                <a:spcPct val="105000"/>
+              </a:lnSpc>
+              <a:spcBef>
+                <a:spcPts val="0"/>
+              </a:spcBef>
+              <a:spcAft>
+                <a:spcPts val="200"/>
+              </a:spcAft>
+            </a:pPr>
+            <a:r>
+              <a:rPr sz="1450" b="1" i="0">
+                <a:solidFill>
+                  <a:srgbClr val="1A164B"/>
+                </a:solidFill>
+                <a:latin typeface="Cambria Math"/>
+              </a:rPr>
+              <a:t>tf · (k₁ + 1)</a:t>
+            </a:r>
+          </a:p>
+          <a:p>
+            <a:pPr algn="ctr">
+              <a:lnSpc>
+                <a:spcPct val="105000"/>
+              </a:lnSpc>
+              <a:spcBef>
+                <a:spcPts val="0"/>
+              </a:spcBef>
+              <a:spcAft>
+                <a:spcPts val="200"/>
+              </a:spcAft>
+            </a:pPr>
+            <a:r>
+              <a:rPr sz="1200" b="0" i="0">
+                <a:solidFill>
+                  <a:srgbClr val="6B6682"/>
+                </a:solidFill>
+                <a:latin typeface="Cambria Math"/>
+              </a:rPr>
+              <a:t>─────────────────────</a:t>
+            </a:r>
+          </a:p>
+          <a:p>
+            <a:pPr algn="ctr">
+              <a:lnSpc>
+                <a:spcPct val="105000"/>
+              </a:lnSpc>
+              <a:spcBef>
+                <a:spcPts val="0"/>
+              </a:spcBef>
+              <a:spcAft>
+                <a:spcPts val="200"/>
+              </a:spcAft>
+            </a:pPr>
+            <a:r>
+              <a:rPr sz="1450" b="1" i="0">
+                <a:solidFill>
+                  <a:srgbClr val="1A164B"/>
+                </a:solidFill>
+                <a:latin typeface="Cambria Math"/>
+              </a:rPr>
+              <a:t>tf + k₁·(1 − b + b·|D|/avgdl)</a:t>
+            </a:r>
+          </a:p>
+        </p:txBody>
+      </p:sp>
+      <p:sp>
+        <p:nvSpPr>
+          <p:cNvPr id="24" name="TextBox 23"/>
+          <p:cNvSpPr txBox="1"/>
+          <p:nvPr/>
+        </p:nvSpPr>
+        <p:spPr>
+          <a:xfrm>
+            <a:off x="640080" y="5870448"/>
+            <a:ext cx="10927080" cy="365760"/>
+          </a:xfrm>
+          <a:prstGeom prst="rect">
+            <a:avLst/>
+          </a:prstGeom>
+          <a:noFill/>
+        </p:spPr>
+        <p:txBody>
+          <a:bodyPr wrap="square" anchor="t" lIns="0" rIns="0" tIns="0" bIns="0">
+            <a:spAutoFit/>
+          </a:bodyPr>
+          <a:lstStyle/>
+          <a:p>
+            <a:pPr algn="ctr">
+              <a:lnSpc>
+                <a:spcPct val="100000"/>
+              </a:lnSpc>
+              <a:spcBef>
+                <a:spcPts val="0"/>
+              </a:spcBef>
+              <a:spcAft>
+                <a:spcPts val="0"/>
+              </a:spcAft>
+            </a:pPr>
+            <a:r>
+              <a:rPr sz="1050" b="0" i="1">
+                <a:solidFill>
+                  <a:srgbClr val="6B6682"/>
+                </a:solidFill>
+                <a:latin typeface="Segoe UI"/>
+              </a:rPr>
+              <a:t>t = término · N = nº de documentos · df = documentos que contienen t · tf = frecuencia del término · |D| = longitud · avgdl = longitud media · k₁≈1.2–2, b≈0.75</a:t>
+            </a:r>
+          </a:p>
+        </p:txBody>
+      </p:sp>
+      <p:sp>
+        <p:nvSpPr>
+          <p:cNvPr id="25" name="TextBox 24"/>
+          <p:cNvSpPr txBox="1"/>
+          <p:nvPr/>
+        </p:nvSpPr>
+        <p:spPr>
+          <a:xfrm>
+            <a:off x="548640" y="6400800"/>
+            <a:ext cx="5486400" cy="274320"/>
+          </a:xfrm>
+          <a:prstGeom prst="rect">
+            <a:avLst/>
+          </a:prstGeom>
+          <a:noFill/>
+        </p:spPr>
+        <p:txBody>
+          <a:bodyPr wrap="square" anchor="t" lIns="0" rIns="0" tIns="0" bIns="0">
+            <a:spAutoFit/>
+          </a:bodyPr>
+          <a:lstStyle/>
+          <a:p>
+            <a:pPr algn="l">
+              <a:lnSpc>
+                <a:spcPct val="100000"/>
+              </a:lnSpc>
+              <a:spcBef>
+                <a:spcPts val="0"/>
+              </a:spcBef>
+              <a:spcAft>
+                <a:spcPts val="0"/>
+              </a:spcAft>
+            </a:pPr>
+            <a:r>
+              <a:rPr sz="1000" b="0" i="0">
+                <a:solidFill>
+                  <a:srgbClr val="6B6682"/>
+                </a:solidFill>
+                <a:latin typeface="Segoe UI"/>
+              </a:rPr>
+              <a:t>Taller de Agentes de IA  ·  Microsoft</a:t>
+            </a:r>
+          </a:p>
+        </p:txBody>
+      </p:sp>
+      <p:sp>
+        <p:nvSpPr>
+          <p:cNvPr id="26" name="TextBox 25"/>
+          <p:cNvSpPr txBox="1"/>
+          <p:nvPr/>
+        </p:nvSpPr>
+        <p:spPr>
+          <a:xfrm>
+            <a:off x="11277295" y="6400800"/>
+            <a:ext cx="548640" cy="274320"/>
+          </a:xfrm>
+          <a:prstGeom prst="rect">
+            <a:avLst/>
+          </a:prstGeom>
+          <a:noFill/>
+        </p:spPr>
+        <p:txBody>
+          <a:bodyPr wrap="square" anchor="t" lIns="0" rIns="0" tIns="0" bIns="0">
+            <a:spAutoFit/>
+          </a:bodyPr>
+          <a:lstStyle/>
+          <a:p>
+            <a:pPr algn="r">
+              <a:lnSpc>
+                <a:spcPct val="100000"/>
+              </a:lnSpc>
+              <a:spcBef>
+                <a:spcPts val="0"/>
+              </a:spcBef>
+              <a:spcAft>
+                <a:spcPts val="0"/>
+              </a:spcAft>
+            </a:pPr>
+            <a:r>
+              <a:rPr sz="1100" b="0" i="0">
+                <a:solidFill>
+                  <a:srgbClr val="6B6682"/>
+                </a:solidFill>
+                <a:latin typeface="Segoe UI"/>
+              </a:rPr>
+              <a:t>20</a:t>
+            </a:r>
+          </a:p>
+        </p:txBody>
+      </p:sp>
+    </p:spTree>
+  </p:cSld>
+  <p:clrMapOvr>
+    <a:masterClrMapping/>
+  </p:clrMapOvr>
+</p:sld>
+</file>
+
+<file path=ppt/slides/slide21.xml><?xml version="1.0" encoding="utf-8"?>
+<p:sld xmlns:a="http://schemas.openxmlformats.org/drawingml/2006/main" xmlns:p="http://schemas.openxmlformats.org/presentationml/2006/main" xmlns:r="http://schemas.openxmlformats.org/officeDocument/2006/relationships">
+  <p:cSld>
+    <p:bg>
+      <p:bgPr>
+        <a:solidFill>
           <a:srgbClr val="1A164B"/>
         </a:solidFill>
         <a:effectLst/>
@@ -20297,7 +21330,7 @@
                 </a:solidFill>
                 <a:latin typeface="Segoe UI"/>
               </a:rPr>
-              <a:t>20</a:t>
+              <a:t>21</a:t>
             </a:r>
           </a:p>
         </p:txBody>
@@ -20310,7 +21343,7 @@
 </p:sld>
 </file>
 
-<file path=ppt/slides/slide21.xml><?xml version="1.0" encoding="utf-8"?>
+<file path=ppt/slides/slide22.xml><?xml version="1.0" encoding="utf-8"?>
 <p:sld xmlns:a="http://schemas.openxmlformats.org/drawingml/2006/main" xmlns:p="http://schemas.openxmlformats.org/presentationml/2006/main" xmlns:r="http://schemas.openxmlformats.org/officeDocument/2006/relationships">
   <p:cSld>
     <p:bg>
@@ -21311,7 +22344,7 @@
                 </a:solidFill>
                 <a:latin typeface="Segoe UI"/>
               </a:rPr>
-              <a:t>21</a:t>
+              <a:t>22</a:t>
             </a:r>
           </a:p>
         </p:txBody>
@@ -21324,7 +22357,7 @@
 </p:sld>
 </file>
 
-<file path=ppt/slides/slide22.xml><?xml version="1.0" encoding="utf-8"?>
+<file path=ppt/slides/slide23.xml><?xml version="1.0" encoding="utf-8"?>
 <p:sld xmlns:a="http://schemas.openxmlformats.org/drawingml/2006/main" xmlns:p="http://schemas.openxmlformats.org/presentationml/2006/main" xmlns:r="http://schemas.openxmlformats.org/officeDocument/2006/relationships">
   <p:cSld>
     <p:bg>
@@ -22467,7 +23500,7 @@
                 </a:solidFill>
                 <a:latin typeface="Segoe UI"/>
               </a:rPr>
-              <a:t>22</a:t>
+              <a:t>23</a:t>
             </a:r>
           </a:p>
         </p:txBody>
@@ -22480,7 +23513,7 @@
 </p:sld>
 </file>
 
-<file path=ppt/slides/slide23.xml><?xml version="1.0" encoding="utf-8"?>
+<file path=ppt/slides/slide24.xml><?xml version="1.0" encoding="utf-8"?>
 <p:sld xmlns:a="http://schemas.openxmlformats.org/drawingml/2006/main" xmlns:p="http://schemas.openxmlformats.org/presentationml/2006/main" xmlns:r="http://schemas.openxmlformats.org/officeDocument/2006/relationships">
   <p:cSld>
     <p:bg>
@@ -24322,7 +25355,7 @@
                 </a:solidFill>
                 <a:latin typeface="Segoe UI"/>
               </a:rPr>
-              <a:t>23</a:t>
+              <a:t>24</a:t>
             </a:r>
           </a:p>
         </p:txBody>
@@ -24335,7 +25368,7 @@
 </p:sld>
 </file>
 
-<file path=ppt/slides/slide24.xml><?xml version="1.0" encoding="utf-8"?>
+<file path=ppt/slides/slide25.xml><?xml version="1.0" encoding="utf-8"?>
 <p:sld xmlns:a="http://schemas.openxmlformats.org/drawingml/2006/main" xmlns:p="http://schemas.openxmlformats.org/presentationml/2006/main" xmlns:r="http://schemas.openxmlformats.org/officeDocument/2006/relationships">
   <p:cSld>
     <p:bg>
